--- a/docs/user-guide/presentations/01-expense-guide.pptx
+++ b/docs/user-guide/presentations/01-expense-guide.pptx
@@ -23,9 +23,16 @@
     <p:sldId id="271" r:id="rId17"/>
     <p:sldId id="272" r:id="rId18"/>
     <p:sldId id="273" r:id="rId19"/>
+    <p:sldId id="274" r:id="rId20"/>
+    <p:sldId id="275" r:id="rId21"/>
+    <p:sldId id="276" r:id="rId22"/>
+    <p:sldId id="277" r:id="rId23"/>
+    <p:sldId id="278" r:id="rId24"/>
+    <p:sldId id="279" r:id="rId25"/>
+    <p:sldId id="280" r:id="rId26"/>
   </p:sldIdLst>
   <p:notesMasterIdLst>
-    <p:notesMasterId r:id="rId20"/>
+    <p:notesMasterId r:id="rId27"/>
   </p:notesMasterIdLst>
   <p:sldSz cx="9144000" cy="5143500"/>
   <p:notesSz cx="5143500" cy="9144000"/>
@@ -1353,6 +1360,94 @@
 </p:notes>
 </file>
 
+<file path=ppt/notesSlides/notesSlide19.xml><?xml version="1.0" encoding="utf-8"?>
+<p:notes xmlns:a="http://schemas.openxmlformats.org/drawingml/2006/main" xmlns:r="http://schemas.openxmlformats.org/officeDocument/2006/relationships" xmlns:p="http://schemas.openxmlformats.org/presentationml/2006/main">
+  <p:cSld>
+    <p:spTree>
+      <p:nvGrpSpPr>
+        <p:cNvPr id="1" name=""/>
+        <p:cNvGrpSpPr/>
+        <p:nvPr/>
+      </p:nvGrpSpPr>
+      <p:grpSpPr>
+        <a:xfrm>
+          <a:off x="0" y="0"/>
+          <a:ext cx="0" cy="0"/>
+          <a:chOff x="0" y="0"/>
+          <a:chExt cx="0" cy="0"/>
+        </a:xfrm>
+      </p:grpSpPr>
+      <p:sp>
+        <p:nvSpPr>
+          <p:cNvPr id="2" name="Slide Image Placeholder 1"/>
+          <p:cNvSpPr>
+            <a:spLocks noGrp="1" noRot="1" noChangeAspect="1"/>
+          </p:cNvSpPr>
+          <p:nvPr>
+            <p:ph type="sldImg"/>
+          </p:nvPr>
+        </p:nvSpPr>
+        <p:spPr/>
+      </p:sp>
+      <p:sp>
+        <p:nvSpPr>
+          <p:cNvPr id="3" name="Notes Placeholder 2"/>
+          <p:cNvSpPr>
+            <a:spLocks noGrp="1"/>
+          </p:cNvSpPr>
+          <p:nvPr>
+            <p:ph type="body" idx="1"/>
+          </p:nvPr>
+        </p:nvSpPr>
+        <p:spPr/>
+        <p:txBody>
+          <a:bodyPr/>
+          <a:lstStyle/>
+          <a:p>
+            <a:r>
+              <a:rPr lang="en-US" dirty="0"/>
+              <a:t/>
+            </a:r>
+            <a:endParaRPr lang="en-US" dirty="0"/>
+          </a:p>
+        </p:txBody>
+      </p:sp>
+      <p:sp>
+        <p:nvSpPr>
+          <p:cNvPr id="4" name="Slide Number Placeholder 3"/>
+          <p:cNvSpPr>
+            <a:spLocks noGrp="1"/>
+          </p:cNvSpPr>
+          <p:nvPr>
+            <p:ph type="sldNum" sz="quarter" idx="10"/>
+          </p:nvPr>
+        </p:nvSpPr>
+        <p:spPr/>
+        <p:txBody>
+          <a:bodyPr/>
+          <a:lstStyle/>
+          <a:p>
+            <a:fld id="{F7021451-1387-4CA6-816F-3879F97B5CBC}" type="slidenum">
+              <a:rPr lang="en-US"/>
+              <a:t>19</a:t>
+            </a:fld>
+            <a:endParaRPr lang="en-US"/>
+          </a:p>
+        </p:txBody>
+      </p:sp>
+    </p:spTree>
+    <p:extLst>
+      <p:ext uri="{BB962C8B-B14F-4D97-AF65-F5344CB8AC3E}">
+        <p14:creationId xmlns:p14="http://schemas.microsoft.com/office/powerpoint/2010/main" val="1024086991"/>
+      </p:ext>
+    </p:extLst>
+  </p:cSld>
+  <p:clrMapOvr>
+    <a:masterClrMapping/>
+  </p:clrMapOvr>
+</p:notes>
+</file>
+
 <file path=ppt/notesSlides/notesSlide2.xml><?xml version="1.0" encoding="utf-8"?>
 <p:notes xmlns:a="http://schemas.openxmlformats.org/drawingml/2006/main" xmlns:r="http://schemas.openxmlformats.org/officeDocument/2006/relationships" xmlns:p="http://schemas.openxmlformats.org/presentationml/2006/main">
   <p:cSld>
@@ -1423,6 +1518,534 @@
             <a:fld id="{F7021451-1387-4CA6-816F-3879F97B5CBC}" type="slidenum">
               <a:rPr lang="en-US"/>
               <a:t>2</a:t>
+            </a:fld>
+            <a:endParaRPr lang="en-US"/>
+          </a:p>
+        </p:txBody>
+      </p:sp>
+    </p:spTree>
+    <p:extLst>
+      <p:ext uri="{BB962C8B-B14F-4D97-AF65-F5344CB8AC3E}">
+        <p14:creationId xmlns:p14="http://schemas.microsoft.com/office/powerpoint/2010/main" val="1024086991"/>
+      </p:ext>
+    </p:extLst>
+  </p:cSld>
+  <p:clrMapOvr>
+    <a:masterClrMapping/>
+  </p:clrMapOvr>
+</p:notes>
+</file>
+
+<file path=ppt/notesSlides/notesSlide20.xml><?xml version="1.0" encoding="utf-8"?>
+<p:notes xmlns:a="http://schemas.openxmlformats.org/drawingml/2006/main" xmlns:r="http://schemas.openxmlformats.org/officeDocument/2006/relationships" xmlns:p="http://schemas.openxmlformats.org/presentationml/2006/main">
+  <p:cSld>
+    <p:spTree>
+      <p:nvGrpSpPr>
+        <p:cNvPr id="1" name=""/>
+        <p:cNvGrpSpPr/>
+        <p:nvPr/>
+      </p:nvGrpSpPr>
+      <p:grpSpPr>
+        <a:xfrm>
+          <a:off x="0" y="0"/>
+          <a:ext cx="0" cy="0"/>
+          <a:chOff x="0" y="0"/>
+          <a:chExt cx="0" cy="0"/>
+        </a:xfrm>
+      </p:grpSpPr>
+      <p:sp>
+        <p:nvSpPr>
+          <p:cNvPr id="2" name="Slide Image Placeholder 1"/>
+          <p:cNvSpPr>
+            <a:spLocks noGrp="1" noRot="1" noChangeAspect="1"/>
+          </p:cNvSpPr>
+          <p:nvPr>
+            <p:ph type="sldImg"/>
+          </p:nvPr>
+        </p:nvSpPr>
+        <p:spPr/>
+      </p:sp>
+      <p:sp>
+        <p:nvSpPr>
+          <p:cNvPr id="3" name="Notes Placeholder 2"/>
+          <p:cNvSpPr>
+            <a:spLocks noGrp="1"/>
+          </p:cNvSpPr>
+          <p:nvPr>
+            <p:ph type="body" idx="1"/>
+          </p:nvPr>
+        </p:nvSpPr>
+        <p:spPr/>
+        <p:txBody>
+          <a:bodyPr/>
+          <a:lstStyle/>
+          <a:p>
+            <a:r>
+              <a:rPr lang="en-US" dirty="0"/>
+              <a:t/>
+            </a:r>
+            <a:endParaRPr lang="en-US" dirty="0"/>
+          </a:p>
+        </p:txBody>
+      </p:sp>
+      <p:sp>
+        <p:nvSpPr>
+          <p:cNvPr id="4" name="Slide Number Placeholder 3"/>
+          <p:cNvSpPr>
+            <a:spLocks noGrp="1"/>
+          </p:cNvSpPr>
+          <p:nvPr>
+            <p:ph type="sldNum" sz="quarter" idx="10"/>
+          </p:nvPr>
+        </p:nvSpPr>
+        <p:spPr/>
+        <p:txBody>
+          <a:bodyPr/>
+          <a:lstStyle/>
+          <a:p>
+            <a:fld id="{F7021451-1387-4CA6-816F-3879F97B5CBC}" type="slidenum">
+              <a:rPr lang="en-US"/>
+              <a:t>20</a:t>
+            </a:fld>
+            <a:endParaRPr lang="en-US"/>
+          </a:p>
+        </p:txBody>
+      </p:sp>
+    </p:spTree>
+    <p:extLst>
+      <p:ext uri="{BB962C8B-B14F-4D97-AF65-F5344CB8AC3E}">
+        <p14:creationId xmlns:p14="http://schemas.microsoft.com/office/powerpoint/2010/main" val="1024086991"/>
+      </p:ext>
+    </p:extLst>
+  </p:cSld>
+  <p:clrMapOvr>
+    <a:masterClrMapping/>
+  </p:clrMapOvr>
+</p:notes>
+</file>
+
+<file path=ppt/notesSlides/notesSlide21.xml><?xml version="1.0" encoding="utf-8"?>
+<p:notes xmlns:a="http://schemas.openxmlformats.org/drawingml/2006/main" xmlns:r="http://schemas.openxmlformats.org/officeDocument/2006/relationships" xmlns:p="http://schemas.openxmlformats.org/presentationml/2006/main">
+  <p:cSld>
+    <p:spTree>
+      <p:nvGrpSpPr>
+        <p:cNvPr id="1" name=""/>
+        <p:cNvGrpSpPr/>
+        <p:nvPr/>
+      </p:nvGrpSpPr>
+      <p:grpSpPr>
+        <a:xfrm>
+          <a:off x="0" y="0"/>
+          <a:ext cx="0" cy="0"/>
+          <a:chOff x="0" y="0"/>
+          <a:chExt cx="0" cy="0"/>
+        </a:xfrm>
+      </p:grpSpPr>
+      <p:sp>
+        <p:nvSpPr>
+          <p:cNvPr id="2" name="Slide Image Placeholder 1"/>
+          <p:cNvSpPr>
+            <a:spLocks noGrp="1" noRot="1" noChangeAspect="1"/>
+          </p:cNvSpPr>
+          <p:nvPr>
+            <p:ph type="sldImg"/>
+          </p:nvPr>
+        </p:nvSpPr>
+        <p:spPr/>
+      </p:sp>
+      <p:sp>
+        <p:nvSpPr>
+          <p:cNvPr id="3" name="Notes Placeholder 2"/>
+          <p:cNvSpPr>
+            <a:spLocks noGrp="1"/>
+          </p:cNvSpPr>
+          <p:nvPr>
+            <p:ph type="body" idx="1"/>
+          </p:nvPr>
+        </p:nvSpPr>
+        <p:spPr/>
+        <p:txBody>
+          <a:bodyPr/>
+          <a:lstStyle/>
+          <a:p>
+            <a:r>
+              <a:rPr lang="en-US" dirty="0"/>
+              <a:t/>
+            </a:r>
+            <a:endParaRPr lang="en-US" dirty="0"/>
+          </a:p>
+        </p:txBody>
+      </p:sp>
+      <p:sp>
+        <p:nvSpPr>
+          <p:cNvPr id="4" name="Slide Number Placeholder 3"/>
+          <p:cNvSpPr>
+            <a:spLocks noGrp="1"/>
+          </p:cNvSpPr>
+          <p:nvPr>
+            <p:ph type="sldNum" sz="quarter" idx="10"/>
+          </p:nvPr>
+        </p:nvSpPr>
+        <p:spPr/>
+        <p:txBody>
+          <a:bodyPr/>
+          <a:lstStyle/>
+          <a:p>
+            <a:fld id="{F7021451-1387-4CA6-816F-3879F97B5CBC}" type="slidenum">
+              <a:rPr lang="en-US"/>
+              <a:t>21</a:t>
+            </a:fld>
+            <a:endParaRPr lang="en-US"/>
+          </a:p>
+        </p:txBody>
+      </p:sp>
+    </p:spTree>
+    <p:extLst>
+      <p:ext uri="{BB962C8B-B14F-4D97-AF65-F5344CB8AC3E}">
+        <p14:creationId xmlns:p14="http://schemas.microsoft.com/office/powerpoint/2010/main" val="1024086991"/>
+      </p:ext>
+    </p:extLst>
+  </p:cSld>
+  <p:clrMapOvr>
+    <a:masterClrMapping/>
+  </p:clrMapOvr>
+</p:notes>
+</file>
+
+<file path=ppt/notesSlides/notesSlide22.xml><?xml version="1.0" encoding="utf-8"?>
+<p:notes xmlns:a="http://schemas.openxmlformats.org/drawingml/2006/main" xmlns:r="http://schemas.openxmlformats.org/officeDocument/2006/relationships" xmlns:p="http://schemas.openxmlformats.org/presentationml/2006/main">
+  <p:cSld>
+    <p:spTree>
+      <p:nvGrpSpPr>
+        <p:cNvPr id="1" name=""/>
+        <p:cNvGrpSpPr/>
+        <p:nvPr/>
+      </p:nvGrpSpPr>
+      <p:grpSpPr>
+        <a:xfrm>
+          <a:off x="0" y="0"/>
+          <a:ext cx="0" cy="0"/>
+          <a:chOff x="0" y="0"/>
+          <a:chExt cx="0" cy="0"/>
+        </a:xfrm>
+      </p:grpSpPr>
+      <p:sp>
+        <p:nvSpPr>
+          <p:cNvPr id="2" name="Slide Image Placeholder 1"/>
+          <p:cNvSpPr>
+            <a:spLocks noGrp="1" noRot="1" noChangeAspect="1"/>
+          </p:cNvSpPr>
+          <p:nvPr>
+            <p:ph type="sldImg"/>
+          </p:nvPr>
+        </p:nvSpPr>
+        <p:spPr/>
+      </p:sp>
+      <p:sp>
+        <p:nvSpPr>
+          <p:cNvPr id="3" name="Notes Placeholder 2"/>
+          <p:cNvSpPr>
+            <a:spLocks noGrp="1"/>
+          </p:cNvSpPr>
+          <p:nvPr>
+            <p:ph type="body" idx="1"/>
+          </p:nvPr>
+        </p:nvSpPr>
+        <p:spPr/>
+        <p:txBody>
+          <a:bodyPr/>
+          <a:lstStyle/>
+          <a:p>
+            <a:r>
+              <a:rPr lang="en-US" dirty="0"/>
+              <a:t/>
+            </a:r>
+            <a:endParaRPr lang="en-US" dirty="0"/>
+          </a:p>
+        </p:txBody>
+      </p:sp>
+      <p:sp>
+        <p:nvSpPr>
+          <p:cNvPr id="4" name="Slide Number Placeholder 3"/>
+          <p:cNvSpPr>
+            <a:spLocks noGrp="1"/>
+          </p:cNvSpPr>
+          <p:nvPr>
+            <p:ph type="sldNum" sz="quarter" idx="10"/>
+          </p:nvPr>
+        </p:nvSpPr>
+        <p:spPr/>
+        <p:txBody>
+          <a:bodyPr/>
+          <a:lstStyle/>
+          <a:p>
+            <a:fld id="{F7021451-1387-4CA6-816F-3879F97B5CBC}" type="slidenum">
+              <a:rPr lang="en-US"/>
+              <a:t>22</a:t>
+            </a:fld>
+            <a:endParaRPr lang="en-US"/>
+          </a:p>
+        </p:txBody>
+      </p:sp>
+    </p:spTree>
+    <p:extLst>
+      <p:ext uri="{BB962C8B-B14F-4D97-AF65-F5344CB8AC3E}">
+        <p14:creationId xmlns:p14="http://schemas.microsoft.com/office/powerpoint/2010/main" val="1024086991"/>
+      </p:ext>
+    </p:extLst>
+  </p:cSld>
+  <p:clrMapOvr>
+    <a:masterClrMapping/>
+  </p:clrMapOvr>
+</p:notes>
+</file>
+
+<file path=ppt/notesSlides/notesSlide23.xml><?xml version="1.0" encoding="utf-8"?>
+<p:notes xmlns:a="http://schemas.openxmlformats.org/drawingml/2006/main" xmlns:r="http://schemas.openxmlformats.org/officeDocument/2006/relationships" xmlns:p="http://schemas.openxmlformats.org/presentationml/2006/main">
+  <p:cSld>
+    <p:spTree>
+      <p:nvGrpSpPr>
+        <p:cNvPr id="1" name=""/>
+        <p:cNvGrpSpPr/>
+        <p:nvPr/>
+      </p:nvGrpSpPr>
+      <p:grpSpPr>
+        <a:xfrm>
+          <a:off x="0" y="0"/>
+          <a:ext cx="0" cy="0"/>
+          <a:chOff x="0" y="0"/>
+          <a:chExt cx="0" cy="0"/>
+        </a:xfrm>
+      </p:grpSpPr>
+      <p:sp>
+        <p:nvSpPr>
+          <p:cNvPr id="2" name="Slide Image Placeholder 1"/>
+          <p:cNvSpPr>
+            <a:spLocks noGrp="1" noRot="1" noChangeAspect="1"/>
+          </p:cNvSpPr>
+          <p:nvPr>
+            <p:ph type="sldImg"/>
+          </p:nvPr>
+        </p:nvSpPr>
+        <p:spPr/>
+      </p:sp>
+      <p:sp>
+        <p:nvSpPr>
+          <p:cNvPr id="3" name="Notes Placeholder 2"/>
+          <p:cNvSpPr>
+            <a:spLocks noGrp="1"/>
+          </p:cNvSpPr>
+          <p:nvPr>
+            <p:ph type="body" idx="1"/>
+          </p:nvPr>
+        </p:nvSpPr>
+        <p:spPr/>
+        <p:txBody>
+          <a:bodyPr/>
+          <a:lstStyle/>
+          <a:p>
+            <a:r>
+              <a:rPr lang="en-US" dirty="0"/>
+              <a:t/>
+            </a:r>
+            <a:endParaRPr lang="en-US" dirty="0"/>
+          </a:p>
+        </p:txBody>
+      </p:sp>
+      <p:sp>
+        <p:nvSpPr>
+          <p:cNvPr id="4" name="Slide Number Placeholder 3"/>
+          <p:cNvSpPr>
+            <a:spLocks noGrp="1"/>
+          </p:cNvSpPr>
+          <p:nvPr>
+            <p:ph type="sldNum" sz="quarter" idx="10"/>
+          </p:nvPr>
+        </p:nvSpPr>
+        <p:spPr/>
+        <p:txBody>
+          <a:bodyPr/>
+          <a:lstStyle/>
+          <a:p>
+            <a:fld id="{F7021451-1387-4CA6-816F-3879F97B5CBC}" type="slidenum">
+              <a:rPr lang="en-US"/>
+              <a:t>23</a:t>
+            </a:fld>
+            <a:endParaRPr lang="en-US"/>
+          </a:p>
+        </p:txBody>
+      </p:sp>
+    </p:spTree>
+    <p:extLst>
+      <p:ext uri="{BB962C8B-B14F-4D97-AF65-F5344CB8AC3E}">
+        <p14:creationId xmlns:p14="http://schemas.microsoft.com/office/powerpoint/2010/main" val="1024086991"/>
+      </p:ext>
+    </p:extLst>
+  </p:cSld>
+  <p:clrMapOvr>
+    <a:masterClrMapping/>
+  </p:clrMapOvr>
+</p:notes>
+</file>
+
+<file path=ppt/notesSlides/notesSlide24.xml><?xml version="1.0" encoding="utf-8"?>
+<p:notes xmlns:a="http://schemas.openxmlformats.org/drawingml/2006/main" xmlns:r="http://schemas.openxmlformats.org/officeDocument/2006/relationships" xmlns:p="http://schemas.openxmlformats.org/presentationml/2006/main">
+  <p:cSld>
+    <p:spTree>
+      <p:nvGrpSpPr>
+        <p:cNvPr id="1" name=""/>
+        <p:cNvGrpSpPr/>
+        <p:nvPr/>
+      </p:nvGrpSpPr>
+      <p:grpSpPr>
+        <a:xfrm>
+          <a:off x="0" y="0"/>
+          <a:ext cx="0" cy="0"/>
+          <a:chOff x="0" y="0"/>
+          <a:chExt cx="0" cy="0"/>
+        </a:xfrm>
+      </p:grpSpPr>
+      <p:sp>
+        <p:nvSpPr>
+          <p:cNvPr id="2" name="Slide Image Placeholder 1"/>
+          <p:cNvSpPr>
+            <a:spLocks noGrp="1" noRot="1" noChangeAspect="1"/>
+          </p:cNvSpPr>
+          <p:nvPr>
+            <p:ph type="sldImg"/>
+          </p:nvPr>
+        </p:nvSpPr>
+        <p:spPr/>
+      </p:sp>
+      <p:sp>
+        <p:nvSpPr>
+          <p:cNvPr id="3" name="Notes Placeholder 2"/>
+          <p:cNvSpPr>
+            <a:spLocks noGrp="1"/>
+          </p:cNvSpPr>
+          <p:nvPr>
+            <p:ph type="body" idx="1"/>
+          </p:nvPr>
+        </p:nvSpPr>
+        <p:spPr/>
+        <p:txBody>
+          <a:bodyPr/>
+          <a:lstStyle/>
+          <a:p>
+            <a:r>
+              <a:rPr lang="en-US" dirty="0"/>
+              <a:t/>
+            </a:r>
+            <a:endParaRPr lang="en-US" dirty="0"/>
+          </a:p>
+        </p:txBody>
+      </p:sp>
+      <p:sp>
+        <p:nvSpPr>
+          <p:cNvPr id="4" name="Slide Number Placeholder 3"/>
+          <p:cNvSpPr>
+            <a:spLocks noGrp="1"/>
+          </p:cNvSpPr>
+          <p:nvPr>
+            <p:ph type="sldNum" sz="quarter" idx="10"/>
+          </p:nvPr>
+        </p:nvSpPr>
+        <p:spPr/>
+        <p:txBody>
+          <a:bodyPr/>
+          <a:lstStyle/>
+          <a:p>
+            <a:fld id="{F7021451-1387-4CA6-816F-3879F97B5CBC}" type="slidenum">
+              <a:rPr lang="en-US"/>
+              <a:t>24</a:t>
+            </a:fld>
+            <a:endParaRPr lang="en-US"/>
+          </a:p>
+        </p:txBody>
+      </p:sp>
+    </p:spTree>
+    <p:extLst>
+      <p:ext uri="{BB962C8B-B14F-4D97-AF65-F5344CB8AC3E}">
+        <p14:creationId xmlns:p14="http://schemas.microsoft.com/office/powerpoint/2010/main" val="1024086991"/>
+      </p:ext>
+    </p:extLst>
+  </p:cSld>
+  <p:clrMapOvr>
+    <a:masterClrMapping/>
+  </p:clrMapOvr>
+</p:notes>
+</file>
+
+<file path=ppt/notesSlides/notesSlide25.xml><?xml version="1.0" encoding="utf-8"?>
+<p:notes xmlns:a="http://schemas.openxmlformats.org/drawingml/2006/main" xmlns:r="http://schemas.openxmlformats.org/officeDocument/2006/relationships" xmlns:p="http://schemas.openxmlformats.org/presentationml/2006/main">
+  <p:cSld>
+    <p:spTree>
+      <p:nvGrpSpPr>
+        <p:cNvPr id="1" name=""/>
+        <p:cNvGrpSpPr/>
+        <p:nvPr/>
+      </p:nvGrpSpPr>
+      <p:grpSpPr>
+        <a:xfrm>
+          <a:off x="0" y="0"/>
+          <a:ext cx="0" cy="0"/>
+          <a:chOff x="0" y="0"/>
+          <a:chExt cx="0" cy="0"/>
+        </a:xfrm>
+      </p:grpSpPr>
+      <p:sp>
+        <p:nvSpPr>
+          <p:cNvPr id="2" name="Slide Image Placeholder 1"/>
+          <p:cNvSpPr>
+            <a:spLocks noGrp="1" noRot="1" noChangeAspect="1"/>
+          </p:cNvSpPr>
+          <p:nvPr>
+            <p:ph type="sldImg"/>
+          </p:nvPr>
+        </p:nvSpPr>
+        <p:spPr/>
+      </p:sp>
+      <p:sp>
+        <p:nvSpPr>
+          <p:cNvPr id="3" name="Notes Placeholder 2"/>
+          <p:cNvSpPr>
+            <a:spLocks noGrp="1"/>
+          </p:cNvSpPr>
+          <p:nvPr>
+            <p:ph type="body" idx="1"/>
+          </p:nvPr>
+        </p:nvSpPr>
+        <p:spPr/>
+        <p:txBody>
+          <a:bodyPr/>
+          <a:lstStyle/>
+          <a:p>
+            <a:r>
+              <a:rPr lang="en-US" dirty="0"/>
+              <a:t/>
+            </a:r>
+            <a:endParaRPr lang="en-US" dirty="0"/>
+          </a:p>
+        </p:txBody>
+      </p:sp>
+      <p:sp>
+        <p:nvSpPr>
+          <p:cNvPr id="4" name="Slide Number Placeholder 3"/>
+          <p:cNvSpPr>
+            <a:spLocks noGrp="1"/>
+          </p:cNvSpPr>
+          <p:nvPr>
+            <p:ph type="sldNum" sz="quarter" idx="10"/>
+          </p:nvPr>
+        </p:nvSpPr>
+        <p:spPr/>
+        <p:txBody>
+          <a:bodyPr/>
+          <a:lstStyle/>
+          <a:p>
+            <a:fld id="{F7021451-1387-4CA6-816F-3879F97B5CBC}" type="slidenum">
+              <a:rPr lang="en-US"/>
+              <a:t>25</a:t>
             </a:fld>
             <a:endParaRPr lang="en-US"/>
           </a:p>
@@ -2707,111 +3330,1234 @@
                   <a:srgbClr val="1E40AF"/>
                 </a:solidFill>
               </a:rPr>
-              <a:t>4단계: 은행 정보 입력</a:t>
+              <a:t>세부 항목 입력 필드</a:t>
             </a:r>
             <a:endParaRPr lang="en-US" sz="2800" dirty="0"/>
           </a:p>
         </p:txBody>
       </p:sp>
-      <p:sp>
-        <p:nvSpPr>
-          <p:cNvPr id="3" name="Text 1"/>
-          <p:cNvSpPr/>
-          <p:nvPr/>
-        </p:nvSpPr>
-        <p:spPr>
-          <a:xfrm>
-            <a:off x="640080" y="914400"/>
-            <a:ext cx="7772400" cy="0"/>
-          </a:xfrm>
-          <a:prstGeom prst="rect">
-            <a:avLst/>
-          </a:prstGeom>
-          <a:noFill/>
-          <a:ln/>
-        </p:spPr>
-        <p:txBody>
-          <a:bodyPr wrap="square" rtlCol="0" anchor="ctr"/>
-          <a:lstStyle/>
-          <a:p>
-            <a:r>
-              <a:rPr lang="en-US" sz="1400" dirty="0">
-                <a:solidFill>
-                  <a:srgbClr val="374151"/>
-                </a:solidFill>
-              </a:rPr>
-              <a:t>모드 1: 저장된 계좌 - 미리 저장한 계좌 드롭다운 선택</a:t>
-            </a:r>
-            <a:endParaRPr lang="en-US" sz="1400" dirty="0"/>
-          </a:p>
-        </p:txBody>
-      </p:sp>
-      <p:sp>
-        <p:nvSpPr>
-          <p:cNvPr id="4" name="Text 2"/>
-          <p:cNvSpPr/>
-          <p:nvPr/>
-        </p:nvSpPr>
-        <p:spPr>
-          <a:xfrm>
-            <a:off x="640080" y="1280160"/>
-            <a:ext cx="7772400" cy="0"/>
-          </a:xfrm>
-          <a:prstGeom prst="rect">
-            <a:avLst/>
-          </a:prstGeom>
-          <a:noFill/>
-          <a:ln/>
-        </p:spPr>
-        <p:txBody>
-          <a:bodyPr wrap="square" rtlCol="0" anchor="ctr"/>
-          <a:lstStyle/>
-          <a:p>
-            <a:r>
-              <a:rPr lang="en-US" sz="1400" dirty="0">
-                <a:solidFill>
-                  <a:srgbClr val="374151"/>
-                </a:solidFill>
-              </a:rPr>
-              <a:t>모드 2: 직접 입력 - 은행명, 계좌번호, 예금주 입력</a:t>
-            </a:r>
-            <a:endParaRPr lang="en-US" sz="1400" dirty="0"/>
-          </a:p>
-        </p:txBody>
-      </p:sp>
-      <p:sp>
-        <p:nvSpPr>
-          <p:cNvPr id="5" name="Text 3"/>
-          <p:cNvSpPr/>
-          <p:nvPr/>
-        </p:nvSpPr>
-        <p:spPr>
-          <a:xfrm>
-            <a:off x="640080" y="1645920"/>
-            <a:ext cx="7772400" cy="0"/>
-          </a:xfrm>
-          <a:prstGeom prst="rect">
-            <a:avLst/>
-          </a:prstGeom>
-          <a:noFill/>
-          <a:ln/>
-        </p:spPr>
-        <p:txBody>
-          <a:bodyPr wrap="square" rtlCol="0" anchor="ctr"/>
-          <a:lstStyle/>
-          <a:p>
-            <a:r>
-              <a:rPr lang="en-US" sz="1400" dirty="0">
-                <a:solidFill>
-                  <a:srgbClr val="374151"/>
-                </a:solidFill>
-              </a:rPr>
-              <a:t>기본 계좌가 있으면 자동 선택됨</a:t>
-            </a:r>
-            <a:endParaRPr lang="en-US" sz="1400" dirty="0"/>
-          </a:p>
-        </p:txBody>
-      </p:sp>
+      <p:graphicFrame>
+        <p:nvGraphicFramePr>
+          <p:cNvPr id="11" name="Table 0"/>
+          <p:cNvGraphicFramePr>
+            <a:graphicFrameLocks noGrp="1"/>
+          </p:cNvGraphicFramePr>
+          <p:nvPr>
+            <p:extLst>
+              <p:ext uri="{D42A27DB-BD31-4B8C-83A1-F6EECF244321}">
+                <p14:modId xmlns:p14="http://schemas.microsoft.com/office/powerpoint/2010/main" val="1579011935"/>
+              </p:ext>
+            </p:extLst>
+          </p:nvPr>
+        </p:nvGraphicFramePr>
+        <p:xfrm>
+          <a:off x="457200" y="914400"/>
+          <a:ext cx="8229600" cy="914400"/>
+        </p:xfrm>
+        <a:graphic>
+          <a:graphicData uri="http://schemas.openxmlformats.org/drawingml/2006/table">
+            <a:tbl>
+              <a:tblPr/>
+              <a:tblGrid>
+                <a:gridCol w="2743200"/>
+                <a:gridCol w="2743200"/>
+                <a:gridCol w="2743200"/>
+              </a:tblGrid>
+              <a:tr h="0">
+                <a:tc>
+                  <a:txBody>
+                    <a:bodyPr/>
+                    <a:lstStyle/>
+                    <a:p>
+                      <a:pPr indent="0" marL="0">
+                        <a:buNone/>
+                      </a:pPr>
+                      <a:r>
+                        <a:rPr lang="en-US" sz="1200" b="1" dirty="0">
+                          <a:solidFill>
+                            <a:srgbClr val="FFFFFF"/>
+                          </a:solidFill>
+                          <a:latin typeface="Apple SD Gothic Neo" pitchFamily="34" charset="0"/>
+                          <a:ea typeface="Apple SD Gothic Neo" pitchFamily="34" charset="-122"/>
+                          <a:cs typeface="Apple SD Gothic Neo" pitchFamily="34" charset="-120"/>
+                        </a:rPr>
+                        <a:t>필드</a:t>
+                      </a:r>
+                      <a:endParaRPr lang="en-US" sz="1200" dirty="0">
+                        <a:latin typeface="Apple SD Gothic Neo" charset="0"/>
+                        <a:ea typeface="Apple SD Gothic Neo" charset="0"/>
+                        <a:cs typeface="Apple SD Gothic Neo" charset="0"/>
+                      </a:endParaRPr>
+                    </a:p>
+                  </a:txBody>
+                  <a:tcPr marL="91440" marR="91440" marT="45720" marB="45720">
+                    <a:lnL w="6350" cap="flat" cmpd="sng" algn="ctr">
+                      <a:solidFill>
+                        <a:srgbClr val="E5E7EB"/>
+                      </a:solidFill>
+                      <a:prstDash val="solid"/>
+                      <a:round/>
+                      <a:headEnd type="none" w="med" len="med"/>
+                      <a:tailEnd type="none" w="med" len="med"/>
+                    </a:lnL>
+                    <a:lnR w="6350" cap="flat" cmpd="sng" algn="ctr">
+                      <a:solidFill>
+                        <a:srgbClr val="E5E7EB"/>
+                      </a:solidFill>
+                      <a:prstDash val="solid"/>
+                      <a:round/>
+                      <a:headEnd type="none" w="med" len="med"/>
+                      <a:tailEnd type="none" w="med" len="med"/>
+                    </a:lnR>
+                    <a:lnT w="6350" cap="flat" cmpd="sng" algn="ctr">
+                      <a:solidFill>
+                        <a:srgbClr val="E5E7EB"/>
+                      </a:solidFill>
+                      <a:prstDash val="solid"/>
+                      <a:round/>
+                      <a:headEnd type="none" w="med" len="med"/>
+                      <a:tailEnd type="none" w="med" len="med"/>
+                    </a:lnT>
+                    <a:lnB w="6350" cap="flat" cmpd="sng" algn="ctr">
+                      <a:solidFill>
+                        <a:srgbClr val="E5E7EB"/>
+                      </a:solidFill>
+                      <a:prstDash val="solid"/>
+                      <a:round/>
+                      <a:headEnd type="none" w="med" len="med"/>
+                      <a:tailEnd type="none" w="med" len="med"/>
+                    </a:lnB>
+                    <a:solidFill>
+                      <a:srgbClr val="3B82F6"/>
+                    </a:solidFill>
+                  </a:tcPr>
+                </a:tc>
+                <a:tc>
+                  <a:txBody>
+                    <a:bodyPr/>
+                    <a:lstStyle/>
+                    <a:p>
+                      <a:pPr indent="0" marL="0">
+                        <a:buNone/>
+                      </a:pPr>
+                      <a:r>
+                        <a:rPr lang="en-US" sz="1200" b="1" dirty="0">
+                          <a:solidFill>
+                            <a:srgbClr val="FFFFFF"/>
+                          </a:solidFill>
+                          <a:latin typeface="Apple SD Gothic Neo" pitchFamily="34" charset="0"/>
+                          <a:ea typeface="Apple SD Gothic Neo" pitchFamily="34" charset="-122"/>
+                          <a:cs typeface="Apple SD Gothic Neo" pitchFamily="34" charset="-120"/>
+                        </a:rPr>
+                        <a:t>설명</a:t>
+                      </a:r>
+                      <a:endParaRPr lang="en-US" sz="1200" dirty="0">
+                        <a:latin typeface="Apple SD Gothic Neo" charset="0"/>
+                        <a:ea typeface="Apple SD Gothic Neo" charset="0"/>
+                        <a:cs typeface="Apple SD Gothic Neo" charset="0"/>
+                      </a:endParaRPr>
+                    </a:p>
+                  </a:txBody>
+                  <a:tcPr marL="91440" marR="91440" marT="45720" marB="45720">
+                    <a:lnL w="6350" cap="flat" cmpd="sng" algn="ctr">
+                      <a:solidFill>
+                        <a:srgbClr val="E5E7EB"/>
+                      </a:solidFill>
+                      <a:prstDash val="solid"/>
+                      <a:round/>
+                      <a:headEnd type="none" w="med" len="med"/>
+                      <a:tailEnd type="none" w="med" len="med"/>
+                    </a:lnL>
+                    <a:lnR w="6350" cap="flat" cmpd="sng" algn="ctr">
+                      <a:solidFill>
+                        <a:srgbClr val="E5E7EB"/>
+                      </a:solidFill>
+                      <a:prstDash val="solid"/>
+                      <a:round/>
+                      <a:headEnd type="none" w="med" len="med"/>
+                      <a:tailEnd type="none" w="med" len="med"/>
+                    </a:lnR>
+                    <a:lnT w="6350" cap="flat" cmpd="sng" algn="ctr">
+                      <a:solidFill>
+                        <a:srgbClr val="E5E7EB"/>
+                      </a:solidFill>
+                      <a:prstDash val="solid"/>
+                      <a:round/>
+                      <a:headEnd type="none" w="med" len="med"/>
+                      <a:tailEnd type="none" w="med" len="med"/>
+                    </a:lnT>
+                    <a:lnB w="6350" cap="flat" cmpd="sng" algn="ctr">
+                      <a:solidFill>
+                        <a:srgbClr val="E5E7EB"/>
+                      </a:solidFill>
+                      <a:prstDash val="solid"/>
+                      <a:round/>
+                      <a:headEnd type="none" w="med" len="med"/>
+                      <a:tailEnd type="none" w="med" len="med"/>
+                    </a:lnB>
+                    <a:solidFill>
+                      <a:srgbClr val="3B82F6"/>
+                    </a:solidFill>
+                  </a:tcPr>
+                </a:tc>
+                <a:tc>
+                  <a:txBody>
+                    <a:bodyPr/>
+                    <a:lstStyle/>
+                    <a:p>
+                      <a:pPr indent="0" marL="0">
+                        <a:buNone/>
+                      </a:pPr>
+                      <a:r>
+                        <a:rPr lang="en-US" sz="1200" b="1" dirty="0">
+                          <a:solidFill>
+                            <a:srgbClr val="FFFFFF"/>
+                          </a:solidFill>
+                          <a:latin typeface="Apple SD Gothic Neo" pitchFamily="34" charset="0"/>
+                          <a:ea typeface="Apple SD Gothic Neo" pitchFamily="34" charset="-122"/>
+                          <a:cs typeface="Apple SD Gothic Neo" pitchFamily="34" charset="-120"/>
+                        </a:rPr>
+                        <a:t>필수</a:t>
+                      </a:r>
+                      <a:endParaRPr lang="en-US" sz="1200" dirty="0">
+                        <a:latin typeface="Apple SD Gothic Neo" charset="0"/>
+                        <a:ea typeface="Apple SD Gothic Neo" charset="0"/>
+                        <a:cs typeface="Apple SD Gothic Neo" charset="0"/>
+                      </a:endParaRPr>
+                    </a:p>
+                  </a:txBody>
+                  <a:tcPr marL="91440" marR="91440" marT="45720" marB="45720">
+                    <a:lnL w="6350" cap="flat" cmpd="sng" algn="ctr">
+                      <a:solidFill>
+                        <a:srgbClr val="E5E7EB"/>
+                      </a:solidFill>
+                      <a:prstDash val="solid"/>
+                      <a:round/>
+                      <a:headEnd type="none" w="med" len="med"/>
+                      <a:tailEnd type="none" w="med" len="med"/>
+                    </a:lnL>
+                    <a:lnR w="6350" cap="flat" cmpd="sng" algn="ctr">
+                      <a:solidFill>
+                        <a:srgbClr val="E5E7EB"/>
+                      </a:solidFill>
+                      <a:prstDash val="solid"/>
+                      <a:round/>
+                      <a:headEnd type="none" w="med" len="med"/>
+                      <a:tailEnd type="none" w="med" len="med"/>
+                    </a:lnR>
+                    <a:lnT w="6350" cap="flat" cmpd="sng" algn="ctr">
+                      <a:solidFill>
+                        <a:srgbClr val="E5E7EB"/>
+                      </a:solidFill>
+                      <a:prstDash val="solid"/>
+                      <a:round/>
+                      <a:headEnd type="none" w="med" len="med"/>
+                      <a:tailEnd type="none" w="med" len="med"/>
+                    </a:lnT>
+                    <a:lnB w="6350" cap="flat" cmpd="sng" algn="ctr">
+                      <a:solidFill>
+                        <a:srgbClr val="E5E7EB"/>
+                      </a:solidFill>
+                      <a:prstDash val="solid"/>
+                      <a:round/>
+                      <a:headEnd type="none" w="med" len="med"/>
+                      <a:tailEnd type="none" w="med" len="med"/>
+                    </a:lnB>
+                    <a:solidFill>
+                      <a:srgbClr val="3B82F6"/>
+                    </a:solidFill>
+                  </a:tcPr>
+                </a:tc>
+              </a:tr>
+              <a:tr h="0">
+                <a:tc>
+                  <a:txBody>
+                    <a:bodyPr/>
+                    <a:lstStyle/>
+                    <a:p>
+                      <a:pPr indent="0" marL="0">
+                        <a:buNone/>
+                      </a:pPr>
+                      <a:r>
+                        <a:rPr lang="en-US" sz="1100" dirty="0">
+                          <a:solidFill>
+                            <a:srgbClr val="374151"/>
+                          </a:solidFill>
+                          <a:latin typeface="Apple SD Gothic Neo" pitchFamily="34" charset="0"/>
+                          <a:ea typeface="Apple SD Gothic Neo" pitchFamily="34" charset="-122"/>
+                          <a:cs typeface="Apple SD Gothic Neo" pitchFamily="34" charset="-120"/>
+                        </a:rPr>
+                        <a:t>예산(세목)</a:t>
+                      </a:r>
+                      <a:endParaRPr lang="en-US" sz="1100" dirty="0">
+                        <a:latin typeface="Apple SD Gothic Neo" charset="0"/>
+                        <a:ea typeface="Apple SD Gothic Neo" charset="0"/>
+                        <a:cs typeface="Apple SD Gothic Neo" charset="0"/>
+                      </a:endParaRPr>
+                    </a:p>
+                  </a:txBody>
+                  <a:tcPr marL="91440" marR="91440" marT="45720" marB="45720">
+                    <a:lnL w="6350" cap="flat" cmpd="sng" algn="ctr">
+                      <a:solidFill>
+                        <a:srgbClr val="E5E7EB"/>
+                      </a:solidFill>
+                      <a:prstDash val="solid"/>
+                      <a:round/>
+                      <a:headEnd type="none" w="med" len="med"/>
+                      <a:tailEnd type="none" w="med" len="med"/>
+                    </a:lnL>
+                    <a:lnR w="6350" cap="flat" cmpd="sng" algn="ctr">
+                      <a:solidFill>
+                        <a:srgbClr val="E5E7EB"/>
+                      </a:solidFill>
+                      <a:prstDash val="solid"/>
+                      <a:round/>
+                      <a:headEnd type="none" w="med" len="med"/>
+                      <a:tailEnd type="none" w="med" len="med"/>
+                    </a:lnR>
+                    <a:lnT w="6350" cap="flat" cmpd="sng" algn="ctr">
+                      <a:solidFill>
+                        <a:srgbClr val="E5E7EB"/>
+                      </a:solidFill>
+                      <a:prstDash val="solid"/>
+                      <a:round/>
+                      <a:headEnd type="none" w="med" len="med"/>
+                      <a:tailEnd type="none" w="med" len="med"/>
+                    </a:lnT>
+                    <a:lnB w="6350" cap="flat" cmpd="sng" algn="ctr">
+                      <a:solidFill>
+                        <a:srgbClr val="E5E7EB"/>
+                      </a:solidFill>
+                      <a:prstDash val="solid"/>
+                      <a:round/>
+                      <a:headEnd type="none" w="med" len="med"/>
+                      <a:tailEnd type="none" w="med" len="med"/>
+                    </a:lnB>
+                  </a:tcPr>
+                </a:tc>
+                <a:tc>
+                  <a:txBody>
+                    <a:bodyPr/>
+                    <a:lstStyle/>
+                    <a:p>
+                      <a:pPr indent="0" marL="0">
+                        <a:buNone/>
+                      </a:pPr>
+                      <a:r>
+                        <a:rPr lang="en-US" sz="1100" dirty="0">
+                          <a:solidFill>
+                            <a:srgbClr val="374151"/>
+                          </a:solidFill>
+                          <a:latin typeface="Apple SD Gothic Neo" pitchFamily="34" charset="0"/>
+                          <a:ea typeface="Apple SD Gothic Neo" pitchFamily="34" charset="-122"/>
+                          <a:cs typeface="Apple SD Gothic Neo" pitchFamily="34" charset="-120"/>
+                        </a:rPr>
+                        <a:t>드롭다운 선택</a:t>
+                      </a:r>
+                      <a:endParaRPr lang="en-US" sz="1100" dirty="0">
+                        <a:latin typeface="Apple SD Gothic Neo" charset="0"/>
+                        <a:ea typeface="Apple SD Gothic Neo" charset="0"/>
+                        <a:cs typeface="Apple SD Gothic Neo" charset="0"/>
+                      </a:endParaRPr>
+                    </a:p>
+                  </a:txBody>
+                  <a:tcPr marL="91440" marR="91440" marT="45720" marB="45720">
+                    <a:lnL w="6350" cap="flat" cmpd="sng" algn="ctr">
+                      <a:solidFill>
+                        <a:srgbClr val="E5E7EB"/>
+                      </a:solidFill>
+                      <a:prstDash val="solid"/>
+                      <a:round/>
+                      <a:headEnd type="none" w="med" len="med"/>
+                      <a:tailEnd type="none" w="med" len="med"/>
+                    </a:lnL>
+                    <a:lnR w="6350" cap="flat" cmpd="sng" algn="ctr">
+                      <a:solidFill>
+                        <a:srgbClr val="E5E7EB"/>
+                      </a:solidFill>
+                      <a:prstDash val="solid"/>
+                      <a:round/>
+                      <a:headEnd type="none" w="med" len="med"/>
+                      <a:tailEnd type="none" w="med" len="med"/>
+                    </a:lnR>
+                    <a:lnT w="6350" cap="flat" cmpd="sng" algn="ctr">
+                      <a:solidFill>
+                        <a:srgbClr val="E5E7EB"/>
+                      </a:solidFill>
+                      <a:prstDash val="solid"/>
+                      <a:round/>
+                      <a:headEnd type="none" w="med" len="med"/>
+                      <a:tailEnd type="none" w="med" len="med"/>
+                    </a:lnT>
+                    <a:lnB w="6350" cap="flat" cmpd="sng" algn="ctr">
+                      <a:solidFill>
+                        <a:srgbClr val="E5E7EB"/>
+                      </a:solidFill>
+                      <a:prstDash val="solid"/>
+                      <a:round/>
+                      <a:headEnd type="none" w="med" len="med"/>
+                      <a:tailEnd type="none" w="med" len="med"/>
+                    </a:lnB>
+                  </a:tcPr>
+                </a:tc>
+                <a:tc>
+                  <a:txBody>
+                    <a:bodyPr/>
+                    <a:lstStyle/>
+                    <a:p>
+                      <a:pPr indent="0" marL="0">
+                        <a:buNone/>
+                      </a:pPr>
+                      <a:r>
+                        <a:rPr lang="en-US" sz="1100" dirty="0">
+                          <a:solidFill>
+                            <a:srgbClr val="374151"/>
+                          </a:solidFill>
+                          <a:latin typeface="Apple SD Gothic Neo" pitchFamily="34" charset="0"/>
+                          <a:ea typeface="Apple SD Gothic Neo" pitchFamily="34" charset="-122"/>
+                          <a:cs typeface="Apple SD Gothic Neo" pitchFamily="34" charset="-120"/>
+                        </a:rPr>
+                        <a:t>O</a:t>
+                      </a:r>
+                      <a:endParaRPr lang="en-US" sz="1100" dirty="0">
+                        <a:latin typeface="Apple SD Gothic Neo" charset="0"/>
+                        <a:ea typeface="Apple SD Gothic Neo" charset="0"/>
+                        <a:cs typeface="Apple SD Gothic Neo" charset="0"/>
+                      </a:endParaRPr>
+                    </a:p>
+                  </a:txBody>
+                  <a:tcPr marL="91440" marR="91440" marT="45720" marB="45720">
+                    <a:lnL w="6350" cap="flat" cmpd="sng" algn="ctr">
+                      <a:solidFill>
+                        <a:srgbClr val="E5E7EB"/>
+                      </a:solidFill>
+                      <a:prstDash val="solid"/>
+                      <a:round/>
+                      <a:headEnd type="none" w="med" len="med"/>
+                      <a:tailEnd type="none" w="med" len="med"/>
+                    </a:lnL>
+                    <a:lnR w="6350" cap="flat" cmpd="sng" algn="ctr">
+                      <a:solidFill>
+                        <a:srgbClr val="E5E7EB"/>
+                      </a:solidFill>
+                      <a:prstDash val="solid"/>
+                      <a:round/>
+                      <a:headEnd type="none" w="med" len="med"/>
+                      <a:tailEnd type="none" w="med" len="med"/>
+                    </a:lnR>
+                    <a:lnT w="6350" cap="flat" cmpd="sng" algn="ctr">
+                      <a:solidFill>
+                        <a:srgbClr val="E5E7EB"/>
+                      </a:solidFill>
+                      <a:prstDash val="solid"/>
+                      <a:round/>
+                      <a:headEnd type="none" w="med" len="med"/>
+                      <a:tailEnd type="none" w="med" len="med"/>
+                    </a:lnT>
+                    <a:lnB w="6350" cap="flat" cmpd="sng" algn="ctr">
+                      <a:solidFill>
+                        <a:srgbClr val="E5E7EB"/>
+                      </a:solidFill>
+                      <a:prstDash val="solid"/>
+                      <a:round/>
+                      <a:headEnd type="none" w="med" len="med"/>
+                      <a:tailEnd type="none" w="med" len="med"/>
+                    </a:lnB>
+                  </a:tcPr>
+                </a:tc>
+              </a:tr>
+              <a:tr h="0">
+                <a:tc>
+                  <a:txBody>
+                    <a:bodyPr/>
+                    <a:lstStyle/>
+                    <a:p>
+                      <a:pPr indent="0" marL="0">
+                        <a:buNone/>
+                      </a:pPr>
+                      <a:r>
+                        <a:rPr lang="en-US" sz="1100" dirty="0">
+                          <a:solidFill>
+                            <a:srgbClr val="374151"/>
+                          </a:solidFill>
+                          <a:latin typeface="Apple SD Gothic Neo" pitchFamily="34" charset="0"/>
+                          <a:ea typeface="Apple SD Gothic Neo" pitchFamily="34" charset="-122"/>
+                          <a:cs typeface="Apple SD Gothic Neo" pitchFamily="34" charset="-120"/>
+                        </a:rPr>
+                        <a:t>적요</a:t>
+                      </a:r>
+                      <a:endParaRPr lang="en-US" sz="1100" dirty="0">
+                        <a:latin typeface="Apple SD Gothic Neo" charset="0"/>
+                        <a:ea typeface="Apple SD Gothic Neo" charset="0"/>
+                        <a:cs typeface="Apple SD Gothic Neo" charset="0"/>
+                      </a:endParaRPr>
+                    </a:p>
+                  </a:txBody>
+                  <a:tcPr marL="91440" marR="91440" marT="45720" marB="45720">
+                    <a:lnL w="6350" cap="flat" cmpd="sng" algn="ctr">
+                      <a:solidFill>
+                        <a:srgbClr val="E5E7EB"/>
+                      </a:solidFill>
+                      <a:prstDash val="solid"/>
+                      <a:round/>
+                      <a:headEnd type="none" w="med" len="med"/>
+                      <a:tailEnd type="none" w="med" len="med"/>
+                    </a:lnL>
+                    <a:lnR w="6350" cap="flat" cmpd="sng" algn="ctr">
+                      <a:solidFill>
+                        <a:srgbClr val="E5E7EB"/>
+                      </a:solidFill>
+                      <a:prstDash val="solid"/>
+                      <a:round/>
+                      <a:headEnd type="none" w="med" len="med"/>
+                      <a:tailEnd type="none" w="med" len="med"/>
+                    </a:lnR>
+                    <a:lnT w="6350" cap="flat" cmpd="sng" algn="ctr">
+                      <a:solidFill>
+                        <a:srgbClr val="E5E7EB"/>
+                      </a:solidFill>
+                      <a:prstDash val="solid"/>
+                      <a:round/>
+                      <a:headEnd type="none" w="med" len="med"/>
+                      <a:tailEnd type="none" w="med" len="med"/>
+                    </a:lnT>
+                    <a:lnB w="6350" cap="flat" cmpd="sng" algn="ctr">
+                      <a:solidFill>
+                        <a:srgbClr val="E5E7EB"/>
+                      </a:solidFill>
+                      <a:prstDash val="solid"/>
+                      <a:round/>
+                      <a:headEnd type="none" w="med" len="med"/>
+                      <a:tailEnd type="none" w="med" len="med"/>
+                    </a:lnB>
+                  </a:tcPr>
+                </a:tc>
+                <a:tc>
+                  <a:txBody>
+                    <a:bodyPr/>
+                    <a:lstStyle/>
+                    <a:p>
+                      <a:pPr indent="0" marL="0">
+                        <a:buNone/>
+                      </a:pPr>
+                      <a:r>
+                        <a:rPr lang="en-US" sz="1100" dirty="0">
+                          <a:solidFill>
+                            <a:srgbClr val="374151"/>
+                          </a:solidFill>
+                          <a:latin typeface="Apple SD Gothic Neo" pitchFamily="34" charset="0"/>
+                          <a:ea typeface="Apple SD Gothic Neo" pitchFamily="34" charset="-122"/>
+                          <a:cs typeface="Apple SD Gothic Neo" pitchFamily="34" charset="-120"/>
+                        </a:rPr>
+                        <a:t>지출 상세 설명</a:t>
+                      </a:r>
+                      <a:endParaRPr lang="en-US" sz="1100" dirty="0">
+                        <a:latin typeface="Apple SD Gothic Neo" charset="0"/>
+                        <a:ea typeface="Apple SD Gothic Neo" charset="0"/>
+                        <a:cs typeface="Apple SD Gothic Neo" charset="0"/>
+                      </a:endParaRPr>
+                    </a:p>
+                  </a:txBody>
+                  <a:tcPr marL="91440" marR="91440" marT="45720" marB="45720">
+                    <a:lnL w="6350" cap="flat" cmpd="sng" algn="ctr">
+                      <a:solidFill>
+                        <a:srgbClr val="E5E7EB"/>
+                      </a:solidFill>
+                      <a:prstDash val="solid"/>
+                      <a:round/>
+                      <a:headEnd type="none" w="med" len="med"/>
+                      <a:tailEnd type="none" w="med" len="med"/>
+                    </a:lnL>
+                    <a:lnR w="6350" cap="flat" cmpd="sng" algn="ctr">
+                      <a:solidFill>
+                        <a:srgbClr val="E5E7EB"/>
+                      </a:solidFill>
+                      <a:prstDash val="solid"/>
+                      <a:round/>
+                      <a:headEnd type="none" w="med" len="med"/>
+                      <a:tailEnd type="none" w="med" len="med"/>
+                    </a:lnR>
+                    <a:lnT w="6350" cap="flat" cmpd="sng" algn="ctr">
+                      <a:solidFill>
+                        <a:srgbClr val="E5E7EB"/>
+                      </a:solidFill>
+                      <a:prstDash val="solid"/>
+                      <a:round/>
+                      <a:headEnd type="none" w="med" len="med"/>
+                      <a:tailEnd type="none" w="med" len="med"/>
+                    </a:lnT>
+                    <a:lnB w="6350" cap="flat" cmpd="sng" algn="ctr">
+                      <a:solidFill>
+                        <a:srgbClr val="E5E7EB"/>
+                      </a:solidFill>
+                      <a:prstDash val="solid"/>
+                      <a:round/>
+                      <a:headEnd type="none" w="med" len="med"/>
+                      <a:tailEnd type="none" w="med" len="med"/>
+                    </a:lnB>
+                  </a:tcPr>
+                </a:tc>
+                <a:tc>
+                  <a:txBody>
+                    <a:bodyPr/>
+                    <a:lstStyle/>
+                    <a:p>
+                      <a:pPr indent="0" marL="0">
+                        <a:buNone/>
+                      </a:pPr>
+                      <a:r>
+                        <a:rPr lang="en-US" sz="1100" dirty="0">
+                          <a:solidFill>
+                            <a:srgbClr val="374151"/>
+                          </a:solidFill>
+                          <a:latin typeface="Apple SD Gothic Neo" pitchFamily="34" charset="0"/>
+                          <a:ea typeface="Apple SD Gothic Neo" pitchFamily="34" charset="-122"/>
+                          <a:cs typeface="Apple SD Gothic Neo" pitchFamily="34" charset="-120"/>
+                        </a:rPr>
+                        <a:t>O</a:t>
+                      </a:r>
+                      <a:endParaRPr lang="en-US" sz="1100" dirty="0">
+                        <a:latin typeface="Apple SD Gothic Neo" charset="0"/>
+                        <a:ea typeface="Apple SD Gothic Neo" charset="0"/>
+                        <a:cs typeface="Apple SD Gothic Neo" charset="0"/>
+                      </a:endParaRPr>
+                    </a:p>
+                  </a:txBody>
+                  <a:tcPr marL="91440" marR="91440" marT="45720" marB="45720">
+                    <a:lnL w="6350" cap="flat" cmpd="sng" algn="ctr">
+                      <a:solidFill>
+                        <a:srgbClr val="E5E7EB"/>
+                      </a:solidFill>
+                      <a:prstDash val="solid"/>
+                      <a:round/>
+                      <a:headEnd type="none" w="med" len="med"/>
+                      <a:tailEnd type="none" w="med" len="med"/>
+                    </a:lnL>
+                    <a:lnR w="6350" cap="flat" cmpd="sng" algn="ctr">
+                      <a:solidFill>
+                        <a:srgbClr val="E5E7EB"/>
+                      </a:solidFill>
+                      <a:prstDash val="solid"/>
+                      <a:round/>
+                      <a:headEnd type="none" w="med" len="med"/>
+                      <a:tailEnd type="none" w="med" len="med"/>
+                    </a:lnR>
+                    <a:lnT w="6350" cap="flat" cmpd="sng" algn="ctr">
+                      <a:solidFill>
+                        <a:srgbClr val="E5E7EB"/>
+                      </a:solidFill>
+                      <a:prstDash val="solid"/>
+                      <a:round/>
+                      <a:headEnd type="none" w="med" len="med"/>
+                      <a:tailEnd type="none" w="med" len="med"/>
+                    </a:lnT>
+                    <a:lnB w="6350" cap="flat" cmpd="sng" algn="ctr">
+                      <a:solidFill>
+                        <a:srgbClr val="E5E7EB"/>
+                      </a:solidFill>
+                      <a:prstDash val="solid"/>
+                      <a:round/>
+                      <a:headEnd type="none" w="med" len="med"/>
+                      <a:tailEnd type="none" w="med" len="med"/>
+                    </a:lnB>
+                  </a:tcPr>
+                </a:tc>
+              </a:tr>
+              <a:tr h="0">
+                <a:tc>
+                  <a:txBody>
+                    <a:bodyPr/>
+                    <a:lstStyle/>
+                    <a:p>
+                      <a:pPr indent="0" marL="0">
+                        <a:buNone/>
+                      </a:pPr>
+                      <a:r>
+                        <a:rPr lang="en-US" sz="1100" dirty="0">
+                          <a:solidFill>
+                            <a:srgbClr val="374151"/>
+                          </a:solidFill>
+                          <a:latin typeface="Apple SD Gothic Neo" pitchFamily="34" charset="0"/>
+                          <a:ea typeface="Apple SD Gothic Neo" pitchFamily="34" charset="-122"/>
+                          <a:cs typeface="Apple SD Gothic Neo" pitchFamily="34" charset="-120"/>
+                        </a:rPr>
+                        <a:t>단가</a:t>
+                      </a:r>
+                      <a:endParaRPr lang="en-US" sz="1100" dirty="0">
+                        <a:latin typeface="Apple SD Gothic Neo" charset="0"/>
+                        <a:ea typeface="Apple SD Gothic Neo" charset="0"/>
+                        <a:cs typeface="Apple SD Gothic Neo" charset="0"/>
+                      </a:endParaRPr>
+                    </a:p>
+                  </a:txBody>
+                  <a:tcPr marL="91440" marR="91440" marT="45720" marB="45720">
+                    <a:lnL w="6350" cap="flat" cmpd="sng" algn="ctr">
+                      <a:solidFill>
+                        <a:srgbClr val="E5E7EB"/>
+                      </a:solidFill>
+                      <a:prstDash val="solid"/>
+                      <a:round/>
+                      <a:headEnd type="none" w="med" len="med"/>
+                      <a:tailEnd type="none" w="med" len="med"/>
+                    </a:lnL>
+                    <a:lnR w="6350" cap="flat" cmpd="sng" algn="ctr">
+                      <a:solidFill>
+                        <a:srgbClr val="E5E7EB"/>
+                      </a:solidFill>
+                      <a:prstDash val="solid"/>
+                      <a:round/>
+                      <a:headEnd type="none" w="med" len="med"/>
+                      <a:tailEnd type="none" w="med" len="med"/>
+                    </a:lnR>
+                    <a:lnT w="6350" cap="flat" cmpd="sng" algn="ctr">
+                      <a:solidFill>
+                        <a:srgbClr val="E5E7EB"/>
+                      </a:solidFill>
+                      <a:prstDash val="solid"/>
+                      <a:round/>
+                      <a:headEnd type="none" w="med" len="med"/>
+                      <a:tailEnd type="none" w="med" len="med"/>
+                    </a:lnT>
+                    <a:lnB w="6350" cap="flat" cmpd="sng" algn="ctr">
+                      <a:solidFill>
+                        <a:srgbClr val="E5E7EB"/>
+                      </a:solidFill>
+                      <a:prstDash val="solid"/>
+                      <a:round/>
+                      <a:headEnd type="none" w="med" len="med"/>
+                      <a:tailEnd type="none" w="med" len="med"/>
+                    </a:lnB>
+                  </a:tcPr>
+                </a:tc>
+                <a:tc>
+                  <a:txBody>
+                    <a:bodyPr/>
+                    <a:lstStyle/>
+                    <a:p>
+                      <a:pPr indent="0" marL="0">
+                        <a:buNone/>
+                      </a:pPr>
+                      <a:r>
+                        <a:rPr lang="en-US" sz="1100" dirty="0">
+                          <a:solidFill>
+                            <a:srgbClr val="374151"/>
+                          </a:solidFill>
+                          <a:latin typeface="Apple SD Gothic Neo" pitchFamily="34" charset="0"/>
+                          <a:ea typeface="Apple SD Gothic Neo" pitchFamily="34" charset="-122"/>
+                          <a:cs typeface="Apple SD Gothic Neo" pitchFamily="34" charset="-120"/>
+                        </a:rPr>
+                        <a:t>건당 금액 (원)</a:t>
+                      </a:r>
+                      <a:endParaRPr lang="en-US" sz="1100" dirty="0">
+                        <a:latin typeface="Apple SD Gothic Neo" charset="0"/>
+                        <a:ea typeface="Apple SD Gothic Neo" charset="0"/>
+                        <a:cs typeface="Apple SD Gothic Neo" charset="0"/>
+                      </a:endParaRPr>
+                    </a:p>
+                  </a:txBody>
+                  <a:tcPr marL="91440" marR="91440" marT="45720" marB="45720">
+                    <a:lnL w="6350" cap="flat" cmpd="sng" algn="ctr">
+                      <a:solidFill>
+                        <a:srgbClr val="E5E7EB"/>
+                      </a:solidFill>
+                      <a:prstDash val="solid"/>
+                      <a:round/>
+                      <a:headEnd type="none" w="med" len="med"/>
+                      <a:tailEnd type="none" w="med" len="med"/>
+                    </a:lnL>
+                    <a:lnR w="6350" cap="flat" cmpd="sng" algn="ctr">
+                      <a:solidFill>
+                        <a:srgbClr val="E5E7EB"/>
+                      </a:solidFill>
+                      <a:prstDash val="solid"/>
+                      <a:round/>
+                      <a:headEnd type="none" w="med" len="med"/>
+                      <a:tailEnd type="none" w="med" len="med"/>
+                    </a:lnR>
+                    <a:lnT w="6350" cap="flat" cmpd="sng" algn="ctr">
+                      <a:solidFill>
+                        <a:srgbClr val="E5E7EB"/>
+                      </a:solidFill>
+                      <a:prstDash val="solid"/>
+                      <a:round/>
+                      <a:headEnd type="none" w="med" len="med"/>
+                      <a:tailEnd type="none" w="med" len="med"/>
+                    </a:lnT>
+                    <a:lnB w="6350" cap="flat" cmpd="sng" algn="ctr">
+                      <a:solidFill>
+                        <a:srgbClr val="E5E7EB"/>
+                      </a:solidFill>
+                      <a:prstDash val="solid"/>
+                      <a:round/>
+                      <a:headEnd type="none" w="med" len="med"/>
+                      <a:tailEnd type="none" w="med" len="med"/>
+                    </a:lnB>
+                  </a:tcPr>
+                </a:tc>
+                <a:tc>
+                  <a:txBody>
+                    <a:bodyPr/>
+                    <a:lstStyle/>
+                    <a:p>
+                      <a:pPr indent="0" marL="0">
+                        <a:buNone/>
+                      </a:pPr>
+                      <a:r>
+                        <a:rPr lang="en-US" sz="1100" dirty="0">
+                          <a:solidFill>
+                            <a:srgbClr val="374151"/>
+                          </a:solidFill>
+                          <a:latin typeface="Apple SD Gothic Neo" pitchFamily="34" charset="0"/>
+                          <a:ea typeface="Apple SD Gothic Neo" pitchFamily="34" charset="-122"/>
+                          <a:cs typeface="Apple SD Gothic Neo" pitchFamily="34" charset="-120"/>
+                        </a:rPr>
+                        <a:t>O</a:t>
+                      </a:r>
+                      <a:endParaRPr lang="en-US" sz="1100" dirty="0">
+                        <a:latin typeface="Apple SD Gothic Neo" charset="0"/>
+                        <a:ea typeface="Apple SD Gothic Neo" charset="0"/>
+                        <a:cs typeface="Apple SD Gothic Neo" charset="0"/>
+                      </a:endParaRPr>
+                    </a:p>
+                  </a:txBody>
+                  <a:tcPr marL="91440" marR="91440" marT="45720" marB="45720">
+                    <a:lnL w="6350" cap="flat" cmpd="sng" algn="ctr">
+                      <a:solidFill>
+                        <a:srgbClr val="E5E7EB"/>
+                      </a:solidFill>
+                      <a:prstDash val="solid"/>
+                      <a:round/>
+                      <a:headEnd type="none" w="med" len="med"/>
+                      <a:tailEnd type="none" w="med" len="med"/>
+                    </a:lnL>
+                    <a:lnR w="6350" cap="flat" cmpd="sng" algn="ctr">
+                      <a:solidFill>
+                        <a:srgbClr val="E5E7EB"/>
+                      </a:solidFill>
+                      <a:prstDash val="solid"/>
+                      <a:round/>
+                      <a:headEnd type="none" w="med" len="med"/>
+                      <a:tailEnd type="none" w="med" len="med"/>
+                    </a:lnR>
+                    <a:lnT w="6350" cap="flat" cmpd="sng" algn="ctr">
+                      <a:solidFill>
+                        <a:srgbClr val="E5E7EB"/>
+                      </a:solidFill>
+                      <a:prstDash val="solid"/>
+                      <a:round/>
+                      <a:headEnd type="none" w="med" len="med"/>
+                      <a:tailEnd type="none" w="med" len="med"/>
+                    </a:lnT>
+                    <a:lnB w="6350" cap="flat" cmpd="sng" algn="ctr">
+                      <a:solidFill>
+                        <a:srgbClr val="E5E7EB"/>
+                      </a:solidFill>
+                      <a:prstDash val="solid"/>
+                      <a:round/>
+                      <a:headEnd type="none" w="med" len="med"/>
+                      <a:tailEnd type="none" w="med" len="med"/>
+                    </a:lnB>
+                  </a:tcPr>
+                </a:tc>
+              </a:tr>
+              <a:tr h="0">
+                <a:tc>
+                  <a:txBody>
+                    <a:bodyPr/>
+                    <a:lstStyle/>
+                    <a:p>
+                      <a:pPr indent="0" marL="0">
+                        <a:buNone/>
+                      </a:pPr>
+                      <a:r>
+                        <a:rPr lang="en-US" sz="1100" dirty="0">
+                          <a:solidFill>
+                            <a:srgbClr val="374151"/>
+                          </a:solidFill>
+                          <a:latin typeface="Apple SD Gothic Neo" pitchFamily="34" charset="0"/>
+                          <a:ea typeface="Apple SD Gothic Neo" pitchFamily="34" charset="-122"/>
+                          <a:cs typeface="Apple SD Gothic Neo" pitchFamily="34" charset="-120"/>
+                        </a:rPr>
+                        <a:t>수량</a:t>
+                      </a:r>
+                      <a:endParaRPr lang="en-US" sz="1100" dirty="0">
+                        <a:latin typeface="Apple SD Gothic Neo" charset="0"/>
+                        <a:ea typeface="Apple SD Gothic Neo" charset="0"/>
+                        <a:cs typeface="Apple SD Gothic Neo" charset="0"/>
+                      </a:endParaRPr>
+                    </a:p>
+                  </a:txBody>
+                  <a:tcPr marL="91440" marR="91440" marT="45720" marB="45720">
+                    <a:lnL w="6350" cap="flat" cmpd="sng" algn="ctr">
+                      <a:solidFill>
+                        <a:srgbClr val="E5E7EB"/>
+                      </a:solidFill>
+                      <a:prstDash val="solid"/>
+                      <a:round/>
+                      <a:headEnd type="none" w="med" len="med"/>
+                      <a:tailEnd type="none" w="med" len="med"/>
+                    </a:lnL>
+                    <a:lnR w="6350" cap="flat" cmpd="sng" algn="ctr">
+                      <a:solidFill>
+                        <a:srgbClr val="E5E7EB"/>
+                      </a:solidFill>
+                      <a:prstDash val="solid"/>
+                      <a:round/>
+                      <a:headEnd type="none" w="med" len="med"/>
+                      <a:tailEnd type="none" w="med" len="med"/>
+                    </a:lnR>
+                    <a:lnT w="6350" cap="flat" cmpd="sng" algn="ctr">
+                      <a:solidFill>
+                        <a:srgbClr val="E5E7EB"/>
+                      </a:solidFill>
+                      <a:prstDash val="solid"/>
+                      <a:round/>
+                      <a:headEnd type="none" w="med" len="med"/>
+                      <a:tailEnd type="none" w="med" len="med"/>
+                    </a:lnT>
+                    <a:lnB w="6350" cap="flat" cmpd="sng" algn="ctr">
+                      <a:solidFill>
+                        <a:srgbClr val="E5E7EB"/>
+                      </a:solidFill>
+                      <a:prstDash val="solid"/>
+                      <a:round/>
+                      <a:headEnd type="none" w="med" len="med"/>
+                      <a:tailEnd type="none" w="med" len="med"/>
+                    </a:lnB>
+                  </a:tcPr>
+                </a:tc>
+                <a:tc>
+                  <a:txBody>
+                    <a:bodyPr/>
+                    <a:lstStyle/>
+                    <a:p>
+                      <a:pPr indent="0" marL="0">
+                        <a:buNone/>
+                      </a:pPr>
+                      <a:r>
+                        <a:rPr lang="en-US" sz="1100" dirty="0">
+                          <a:solidFill>
+                            <a:srgbClr val="374151"/>
+                          </a:solidFill>
+                          <a:latin typeface="Apple SD Gothic Neo" pitchFamily="34" charset="0"/>
+                          <a:ea typeface="Apple SD Gothic Neo" pitchFamily="34" charset="-122"/>
+                          <a:cs typeface="Apple SD Gothic Neo" pitchFamily="34" charset="-120"/>
+                        </a:rPr>
+                        <a:t>개수/인원</a:t>
+                      </a:r>
+                      <a:endParaRPr lang="en-US" sz="1100" dirty="0">
+                        <a:latin typeface="Apple SD Gothic Neo" charset="0"/>
+                        <a:ea typeface="Apple SD Gothic Neo" charset="0"/>
+                        <a:cs typeface="Apple SD Gothic Neo" charset="0"/>
+                      </a:endParaRPr>
+                    </a:p>
+                  </a:txBody>
+                  <a:tcPr marL="91440" marR="91440" marT="45720" marB="45720">
+                    <a:lnL w="6350" cap="flat" cmpd="sng" algn="ctr">
+                      <a:solidFill>
+                        <a:srgbClr val="E5E7EB"/>
+                      </a:solidFill>
+                      <a:prstDash val="solid"/>
+                      <a:round/>
+                      <a:headEnd type="none" w="med" len="med"/>
+                      <a:tailEnd type="none" w="med" len="med"/>
+                    </a:lnL>
+                    <a:lnR w="6350" cap="flat" cmpd="sng" algn="ctr">
+                      <a:solidFill>
+                        <a:srgbClr val="E5E7EB"/>
+                      </a:solidFill>
+                      <a:prstDash val="solid"/>
+                      <a:round/>
+                      <a:headEnd type="none" w="med" len="med"/>
+                      <a:tailEnd type="none" w="med" len="med"/>
+                    </a:lnR>
+                    <a:lnT w="6350" cap="flat" cmpd="sng" algn="ctr">
+                      <a:solidFill>
+                        <a:srgbClr val="E5E7EB"/>
+                      </a:solidFill>
+                      <a:prstDash val="solid"/>
+                      <a:round/>
+                      <a:headEnd type="none" w="med" len="med"/>
+                      <a:tailEnd type="none" w="med" len="med"/>
+                    </a:lnT>
+                    <a:lnB w="6350" cap="flat" cmpd="sng" algn="ctr">
+                      <a:solidFill>
+                        <a:srgbClr val="E5E7EB"/>
+                      </a:solidFill>
+                      <a:prstDash val="solid"/>
+                      <a:round/>
+                      <a:headEnd type="none" w="med" len="med"/>
+                      <a:tailEnd type="none" w="med" len="med"/>
+                    </a:lnB>
+                  </a:tcPr>
+                </a:tc>
+                <a:tc>
+                  <a:txBody>
+                    <a:bodyPr/>
+                    <a:lstStyle/>
+                    <a:p>
+                      <a:pPr indent="0" marL="0">
+                        <a:buNone/>
+                      </a:pPr>
+                      <a:r>
+                        <a:rPr lang="en-US" sz="1100" dirty="0">
+                          <a:solidFill>
+                            <a:srgbClr val="374151"/>
+                          </a:solidFill>
+                          <a:latin typeface="Apple SD Gothic Neo" pitchFamily="34" charset="0"/>
+                          <a:ea typeface="Apple SD Gothic Neo" pitchFamily="34" charset="-122"/>
+                          <a:cs typeface="Apple SD Gothic Neo" pitchFamily="34" charset="-120"/>
+                        </a:rPr>
+                        <a:t>O</a:t>
+                      </a:r>
+                      <a:endParaRPr lang="en-US" sz="1100" dirty="0">
+                        <a:latin typeface="Apple SD Gothic Neo" charset="0"/>
+                        <a:ea typeface="Apple SD Gothic Neo" charset="0"/>
+                        <a:cs typeface="Apple SD Gothic Neo" charset="0"/>
+                      </a:endParaRPr>
+                    </a:p>
+                  </a:txBody>
+                  <a:tcPr marL="91440" marR="91440" marT="45720" marB="45720">
+                    <a:lnL w="6350" cap="flat" cmpd="sng" algn="ctr">
+                      <a:solidFill>
+                        <a:srgbClr val="E5E7EB"/>
+                      </a:solidFill>
+                      <a:prstDash val="solid"/>
+                      <a:round/>
+                      <a:headEnd type="none" w="med" len="med"/>
+                      <a:tailEnd type="none" w="med" len="med"/>
+                    </a:lnL>
+                    <a:lnR w="6350" cap="flat" cmpd="sng" algn="ctr">
+                      <a:solidFill>
+                        <a:srgbClr val="E5E7EB"/>
+                      </a:solidFill>
+                      <a:prstDash val="solid"/>
+                      <a:round/>
+                      <a:headEnd type="none" w="med" len="med"/>
+                      <a:tailEnd type="none" w="med" len="med"/>
+                    </a:lnR>
+                    <a:lnT w="6350" cap="flat" cmpd="sng" algn="ctr">
+                      <a:solidFill>
+                        <a:srgbClr val="E5E7EB"/>
+                      </a:solidFill>
+                      <a:prstDash val="solid"/>
+                      <a:round/>
+                      <a:headEnd type="none" w="med" len="med"/>
+                      <a:tailEnd type="none" w="med" len="med"/>
+                    </a:lnT>
+                    <a:lnB w="6350" cap="flat" cmpd="sng" algn="ctr">
+                      <a:solidFill>
+                        <a:srgbClr val="E5E7EB"/>
+                      </a:solidFill>
+                      <a:prstDash val="solid"/>
+                      <a:round/>
+                      <a:headEnd type="none" w="med" len="med"/>
+                      <a:tailEnd type="none" w="med" len="med"/>
+                    </a:lnB>
+                  </a:tcPr>
+                </a:tc>
+              </a:tr>
+              <a:tr h="0">
+                <a:tc>
+                  <a:txBody>
+                    <a:bodyPr/>
+                    <a:lstStyle/>
+                    <a:p>
+                      <a:pPr indent="0" marL="0">
+                        <a:buNone/>
+                      </a:pPr>
+                      <a:r>
+                        <a:rPr lang="en-US" sz="1100" dirty="0">
+                          <a:solidFill>
+                            <a:srgbClr val="374151"/>
+                          </a:solidFill>
+                          <a:latin typeface="Apple SD Gothic Neo" pitchFamily="34" charset="0"/>
+                          <a:ea typeface="Apple SD Gothic Neo" pitchFamily="34" charset="-122"/>
+                          <a:cs typeface="Apple SD Gothic Neo" pitchFamily="34" charset="-120"/>
+                        </a:rPr>
+                        <a:t>금액</a:t>
+                      </a:r>
+                      <a:endParaRPr lang="en-US" sz="1100" dirty="0">
+                        <a:latin typeface="Apple SD Gothic Neo" charset="0"/>
+                        <a:ea typeface="Apple SD Gothic Neo" charset="0"/>
+                        <a:cs typeface="Apple SD Gothic Neo" charset="0"/>
+                      </a:endParaRPr>
+                    </a:p>
+                  </a:txBody>
+                  <a:tcPr marL="91440" marR="91440" marT="45720" marB="45720">
+                    <a:lnL w="6350" cap="flat" cmpd="sng" algn="ctr">
+                      <a:solidFill>
+                        <a:srgbClr val="E5E7EB"/>
+                      </a:solidFill>
+                      <a:prstDash val="solid"/>
+                      <a:round/>
+                      <a:headEnd type="none" w="med" len="med"/>
+                      <a:tailEnd type="none" w="med" len="med"/>
+                    </a:lnL>
+                    <a:lnR w="6350" cap="flat" cmpd="sng" algn="ctr">
+                      <a:solidFill>
+                        <a:srgbClr val="E5E7EB"/>
+                      </a:solidFill>
+                      <a:prstDash val="solid"/>
+                      <a:round/>
+                      <a:headEnd type="none" w="med" len="med"/>
+                      <a:tailEnd type="none" w="med" len="med"/>
+                    </a:lnR>
+                    <a:lnT w="6350" cap="flat" cmpd="sng" algn="ctr">
+                      <a:solidFill>
+                        <a:srgbClr val="E5E7EB"/>
+                      </a:solidFill>
+                      <a:prstDash val="solid"/>
+                      <a:round/>
+                      <a:headEnd type="none" w="med" len="med"/>
+                      <a:tailEnd type="none" w="med" len="med"/>
+                    </a:lnT>
+                    <a:lnB w="6350" cap="flat" cmpd="sng" algn="ctr">
+                      <a:solidFill>
+                        <a:srgbClr val="E5E7EB"/>
+                      </a:solidFill>
+                      <a:prstDash val="solid"/>
+                      <a:round/>
+                      <a:headEnd type="none" w="med" len="med"/>
+                      <a:tailEnd type="none" w="med" len="med"/>
+                    </a:lnB>
+                  </a:tcPr>
+                </a:tc>
+                <a:tc>
+                  <a:txBody>
+                    <a:bodyPr/>
+                    <a:lstStyle/>
+                    <a:p>
+                      <a:pPr indent="0" marL="0">
+                        <a:buNone/>
+                      </a:pPr>
+                      <a:r>
+                        <a:rPr lang="en-US" sz="1100" dirty="0">
+                          <a:solidFill>
+                            <a:srgbClr val="374151"/>
+                          </a:solidFill>
+                          <a:latin typeface="Apple SD Gothic Neo" pitchFamily="34" charset="0"/>
+                          <a:ea typeface="Apple SD Gothic Neo" pitchFamily="34" charset="-122"/>
+                          <a:cs typeface="Apple SD Gothic Neo" pitchFamily="34" charset="-120"/>
+                        </a:rPr>
+                        <a:t>자동 계산 (단가 × 수량)</a:t>
+                      </a:r>
+                      <a:endParaRPr lang="en-US" sz="1100" dirty="0">
+                        <a:latin typeface="Apple SD Gothic Neo" charset="0"/>
+                        <a:ea typeface="Apple SD Gothic Neo" charset="0"/>
+                        <a:cs typeface="Apple SD Gothic Neo" charset="0"/>
+                      </a:endParaRPr>
+                    </a:p>
+                  </a:txBody>
+                  <a:tcPr marL="91440" marR="91440" marT="45720" marB="45720">
+                    <a:lnL w="6350" cap="flat" cmpd="sng" algn="ctr">
+                      <a:solidFill>
+                        <a:srgbClr val="E5E7EB"/>
+                      </a:solidFill>
+                      <a:prstDash val="solid"/>
+                      <a:round/>
+                      <a:headEnd type="none" w="med" len="med"/>
+                      <a:tailEnd type="none" w="med" len="med"/>
+                    </a:lnL>
+                    <a:lnR w="6350" cap="flat" cmpd="sng" algn="ctr">
+                      <a:solidFill>
+                        <a:srgbClr val="E5E7EB"/>
+                      </a:solidFill>
+                      <a:prstDash val="solid"/>
+                      <a:round/>
+                      <a:headEnd type="none" w="med" len="med"/>
+                      <a:tailEnd type="none" w="med" len="med"/>
+                    </a:lnR>
+                    <a:lnT w="6350" cap="flat" cmpd="sng" algn="ctr">
+                      <a:solidFill>
+                        <a:srgbClr val="E5E7EB"/>
+                      </a:solidFill>
+                      <a:prstDash val="solid"/>
+                      <a:round/>
+                      <a:headEnd type="none" w="med" len="med"/>
+                      <a:tailEnd type="none" w="med" len="med"/>
+                    </a:lnT>
+                    <a:lnB w="6350" cap="flat" cmpd="sng" algn="ctr">
+                      <a:solidFill>
+                        <a:srgbClr val="E5E7EB"/>
+                      </a:solidFill>
+                      <a:prstDash val="solid"/>
+                      <a:round/>
+                      <a:headEnd type="none" w="med" len="med"/>
+                      <a:tailEnd type="none" w="med" len="med"/>
+                    </a:lnB>
+                  </a:tcPr>
+                </a:tc>
+                <a:tc>
+                  <a:txBody>
+                    <a:bodyPr/>
+                    <a:lstStyle/>
+                    <a:p>
+                      <a:pPr indent="0" marL="0">
+                        <a:buNone/>
+                      </a:pPr>
+                      <a:r>
+                        <a:rPr lang="en-US" sz="1100" dirty="0">
+                          <a:solidFill>
+                            <a:srgbClr val="374151"/>
+                          </a:solidFill>
+                          <a:latin typeface="Apple SD Gothic Neo" pitchFamily="34" charset="0"/>
+                          <a:ea typeface="Apple SD Gothic Neo" pitchFamily="34" charset="-122"/>
+                          <a:cs typeface="Apple SD Gothic Neo" pitchFamily="34" charset="-120"/>
+                        </a:rPr>
+                        <a:t>자동</a:t>
+                      </a:r>
+                      <a:endParaRPr lang="en-US" sz="1100" dirty="0">
+                        <a:latin typeface="Apple SD Gothic Neo" charset="0"/>
+                        <a:ea typeface="Apple SD Gothic Neo" charset="0"/>
+                        <a:cs typeface="Apple SD Gothic Neo" charset="0"/>
+                      </a:endParaRPr>
+                    </a:p>
+                  </a:txBody>
+                  <a:tcPr marL="91440" marR="91440" marT="45720" marB="45720">
+                    <a:lnL w="6350" cap="flat" cmpd="sng" algn="ctr">
+                      <a:solidFill>
+                        <a:srgbClr val="E5E7EB"/>
+                      </a:solidFill>
+                      <a:prstDash val="solid"/>
+                      <a:round/>
+                      <a:headEnd type="none" w="med" len="med"/>
+                      <a:tailEnd type="none" w="med" len="med"/>
+                    </a:lnL>
+                    <a:lnR w="6350" cap="flat" cmpd="sng" algn="ctr">
+                      <a:solidFill>
+                        <a:srgbClr val="E5E7EB"/>
+                      </a:solidFill>
+                      <a:prstDash val="solid"/>
+                      <a:round/>
+                      <a:headEnd type="none" w="med" len="med"/>
+                      <a:tailEnd type="none" w="med" len="med"/>
+                    </a:lnR>
+                    <a:lnT w="6350" cap="flat" cmpd="sng" algn="ctr">
+                      <a:solidFill>
+                        <a:srgbClr val="E5E7EB"/>
+                      </a:solidFill>
+                      <a:prstDash val="solid"/>
+                      <a:round/>
+                      <a:headEnd type="none" w="med" len="med"/>
+                      <a:tailEnd type="none" w="med" len="med"/>
+                    </a:lnT>
+                    <a:lnB w="6350" cap="flat" cmpd="sng" algn="ctr">
+                      <a:solidFill>
+                        <a:srgbClr val="E5E7EB"/>
+                      </a:solidFill>
+                      <a:prstDash val="solid"/>
+                      <a:round/>
+                      <a:headEnd type="none" w="med" len="med"/>
+                      <a:tailEnd type="none" w="med" len="med"/>
+                    </a:lnB>
+                  </a:tcPr>
+                </a:tc>
+              </a:tr>
+            </a:tbl>
+          </a:graphicData>
+        </a:graphic>
+      </p:graphicFrame>
       <p:sp>
         <p:nvSpPr>
           <p:cNvPr id="25" name="Slide Number Placeholder 0"/>
@@ -2912,7 +4658,7 @@
                   <a:srgbClr val="1E40AF"/>
                 </a:solidFill>
               </a:rPr>
-              <a:t>5단계: 첨부파일 업로드</a:t>
+              <a:t>세부 항목 - 편의 기능</a:t>
             </a:r>
             <a:endParaRPr lang="en-US" sz="2800" dirty="0"/>
           </a:p>
@@ -2945,7 +4691,7 @@
                   <a:srgbClr val="374151"/>
                 </a:solidFill>
               </a:rPr>
-              <a:t>드래그 앤 드롭: 파일 끌어다 놓기</a:t>
+              <a:t>적요 입력 도우미: 포커스 시 예제 툴팁 표시</a:t>
             </a:r>
             <a:endParaRPr lang="en-US" sz="1400" dirty="0"/>
           </a:p>
@@ -2978,7 +4724,7 @@
                   <a:srgbClr val="374151"/>
                 </a:solidFill>
               </a:rPr>
-              <a:t>클릭하여 선택: 업로드 영역 클릭</a:t>
+              <a:t>음성 입력 (모바일): 마이크 버튼 탭 → 음성으로 적요 입력</a:t>
             </a:r>
             <a:endParaRPr lang="en-US" sz="1400" dirty="0"/>
           </a:p>
@@ -3011,7 +4757,7 @@
                   <a:srgbClr val="374151"/>
                 </a:solidFill>
               </a:rPr>
-              <a:t>카메라 촬영 (모바일): 영수증 바로 촬영</a:t>
+              <a:t>항목 추가: "+ 항목 추가" 버튼 (최대 10개)</a:t>
             </a:r>
             <a:endParaRPr lang="en-US" sz="1400" dirty="0"/>
           </a:p>
@@ -3044,7 +4790,7 @@
                   <a:srgbClr val="374151"/>
                 </a:solidFill>
               </a:rPr>
-              <a:t>제한: 이미지/PDF, 각 5MB 이하, 최대 10개</a:t>
+              <a:t>항목 삭제: 각 항목의 "X" 버튼 (최소 1개 유지)</a:t>
             </a:r>
             <a:endParaRPr lang="en-US" sz="1400" dirty="0"/>
           </a:p>
@@ -3150,21 +4896,44 @@
                   <a:srgbClr val="1E40AF"/>
                 </a:solidFill>
               </a:rPr>
-              <a:t>6단계: 결재선 미리보기</a:t>
+              <a:t>3단계: 신청 정보 입력</a:t>
             </a:r>
             <a:endParaRPr lang="en-US" sz="2800" dirty="0"/>
           </a:p>
         </p:txBody>
       </p:sp>
-      <p:sp>
-        <p:nvSpPr>
-          <p:cNvPr id="3" name="Text 1"/>
+      <p:pic>
+        <p:nvPicPr>
+          <p:cNvPr id="3" name="Image 0" descr="/Users/wandosea/Documents/GitHub/expense-system/docs/user-guide/screenshots/applicant-section.png">    </p:cNvPr>
+          <p:cNvPicPr>
+            <a:picLocks noChangeAspect="1"/>
+          </p:cNvPicPr>
+          <p:nvPr/>
+        </p:nvPicPr>
+        <p:blipFill>
+          <a:blip r:embed="rId1"/>
+          <a:srcRect l="0" r="0" t="0" b="0"/>
+          <a:stretch/>
+        </p:blipFill>
+        <p:spPr>
+          <a:xfrm>
+            <a:off x="457200" y="914400"/>
+            <a:ext cx="8229600" cy="3657600"/>
+          </a:xfrm>
+          <a:prstGeom prst="rect">
+            <a:avLst/>
+          </a:prstGeom>
+        </p:spPr>
+      </p:pic>
+      <p:sp>
+        <p:nvSpPr>
+          <p:cNvPr id="4" name="Text 1"/>
           <p:cNvSpPr/>
           <p:nvPr/>
         </p:nvSpPr>
         <p:spPr>
           <a:xfrm>
-            <a:off x="457200" y="822960"/>
+            <a:off x="457200" y="4754880"/>
             <a:ext cx="8229600" cy="0"/>
           </a:xfrm>
           <a:prstGeom prst="rect">
@@ -3181,121 +4950,12 @@
               <a:buNone/>
             </a:pPr>
             <a:r>
-              <a:rPr lang="en-US" sz="1400" dirty="0">
+              <a:rPr lang="en-US" sz="1200" dirty="0">
                 <a:solidFill>
                   <a:srgbClr val="6B7280"/>
                 </a:solidFill>
               </a:rPr>
-              <a:t>예산 현황: 배정 예산 / 사용 금액 / 잔여 예산 표시</a:t>
-            </a:r>
-            <a:endParaRPr lang="en-US" sz="1400" dirty="0"/>
-          </a:p>
-        </p:txBody>
-      </p:sp>
-      <p:sp>
-        <p:nvSpPr>
-          <p:cNvPr id="4" name="Text 2"/>
-          <p:cNvSpPr/>
-          <p:nvPr/>
-        </p:nvSpPr>
-        <p:spPr>
-          <a:xfrm>
-            <a:off x="457200" y="1280160"/>
-            <a:ext cx="8229600" cy="2743200"/>
-          </a:xfrm>
-          <a:prstGeom prst="rect">
-            <a:avLst/>
-          </a:prstGeom>
-          <a:solidFill>
-            <a:srgbClr val="F3F4F6"/>
-          </a:solidFill>
-          <a:ln/>
-        </p:spPr>
-        <p:txBody>
-          <a:bodyPr wrap="square" rtlCol="0" anchor="t"/>
-          <a:lstStyle/>
-          <a:p>
-            <a:pPr indent="0" marL="0">
-              <a:buNone/>
-            </a:pPr>
-            <a:r>
-              <a:rPr lang="en-US" sz="1200" dirty="0">
-                <a:solidFill>
-                  <a:srgbClr val="1F2937"/>
-                </a:solidFill>
-                <a:latin typeface="Courier New" pitchFamily="34" charset="0"/>
-                <a:ea typeface="Courier New" pitchFamily="34" charset="-122"/>
-                <a:cs typeface="Courier New" pitchFamily="34" charset="-120"/>
-              </a:rPr>
-              <a:t>1차 결재: 세목 담당자 (팀장)</a:t>
-            </a:r>
-            <a:endParaRPr lang="en-US" sz="1200" dirty="0"/>
-          </a:p>
-          <a:p>
-            <a:pPr indent="0" marL="0">
-              <a:buNone/>
-            </a:pPr>
-            <a:r>
-              <a:rPr lang="en-US" sz="1200" dirty="0">
-                <a:solidFill>
-                  <a:srgbClr val="1F2937"/>
-                </a:solidFill>
-                <a:latin typeface="Courier New" pitchFamily="34" charset="0"/>
-                <a:ea typeface="Courier New" pitchFamily="34" charset="-122"/>
-                <a:cs typeface="Courier New" pitchFamily="34" charset="-120"/>
-              </a:rPr>
-              <a:t>    ↓</a:t>
-            </a:r>
-            <a:endParaRPr lang="en-US" sz="1200" dirty="0"/>
-          </a:p>
-          <a:p>
-            <a:pPr indent="0" marL="0">
-              <a:buNone/>
-            </a:pPr>
-            <a:r>
-              <a:rPr lang="en-US" sz="1200" dirty="0">
-                <a:solidFill>
-                  <a:srgbClr val="1F2937"/>
-                </a:solidFill>
-                <a:latin typeface="Courier New" pitchFamily="34" charset="0"/>
-                <a:ea typeface="Courier New" pitchFamily="34" charset="-122"/>
-                <a:cs typeface="Courier New" pitchFamily="34" charset="-120"/>
-              </a:rPr>
-              <a:t>2차 결재: 회계</a:t>
-            </a:r>
-            <a:endParaRPr lang="en-US" sz="1200" dirty="0"/>
-          </a:p>
-          <a:p>
-            <a:pPr indent="0" marL="0">
-              <a:buNone/>
-            </a:pPr>
-            <a:r>
-              <a:rPr lang="en-US" sz="1200" dirty="0">
-                <a:solidFill>
-                  <a:srgbClr val="1F2937"/>
-                </a:solidFill>
-                <a:latin typeface="Courier New" pitchFamily="34" charset="0"/>
-                <a:ea typeface="Courier New" pitchFamily="34" charset="-122"/>
-                <a:cs typeface="Courier New" pitchFamily="34" charset="-120"/>
-              </a:rPr>
-              <a:t>    ↓</a:t>
-            </a:r>
-            <a:endParaRPr lang="en-US" sz="1200" dirty="0"/>
-          </a:p>
-          <a:p>
-            <a:pPr indent="0" marL="0">
-              <a:buNone/>
-            </a:pPr>
-            <a:r>
-              <a:rPr lang="en-US" sz="1200" dirty="0">
-                <a:solidFill>
-                  <a:srgbClr val="1F2937"/>
-                </a:solidFill>
-                <a:latin typeface="Courier New" pitchFamily="34" charset="0"/>
-                <a:ea typeface="Courier New" pitchFamily="34" charset="-122"/>
-                <a:cs typeface="Courier New" pitchFamily="34" charset="-120"/>
-              </a:rPr>
-              <a:t>3차 결재: 재정팀장</a:t>
+              <a:t>청구일자, 청구팀, 청구인, 직책</a:t>
             </a:r>
             <a:endParaRPr lang="en-US" sz="1200" dirty="0"/>
           </a:p>
@@ -3401,6 +5061,2161 @@
                   <a:srgbClr val="1E40AF"/>
                 </a:solidFill>
               </a:rPr>
+              <a:t>신청 정보 필드</a:t>
+            </a:r>
+            <a:endParaRPr lang="en-US" sz="2800" dirty="0"/>
+          </a:p>
+        </p:txBody>
+      </p:sp>
+      <p:graphicFrame>
+        <p:nvGraphicFramePr>
+          <p:cNvPr id="14" name="Table 0"/>
+          <p:cNvGraphicFramePr>
+            <a:graphicFrameLocks noGrp="1"/>
+          </p:cNvGraphicFramePr>
+          <p:nvPr>
+            <p:extLst>
+              <p:ext uri="{D42A27DB-BD31-4B8C-83A1-F6EECF244321}">
+                <p14:modId xmlns:p14="http://schemas.microsoft.com/office/powerpoint/2010/main" val="1579011935"/>
+              </p:ext>
+            </p:extLst>
+          </p:nvPr>
+        </p:nvGraphicFramePr>
+        <p:xfrm>
+          <a:off x="457200" y="914400"/>
+          <a:ext cx="8229600" cy="914400"/>
+        </p:xfrm>
+        <a:graphic>
+          <a:graphicData uri="http://schemas.openxmlformats.org/drawingml/2006/table">
+            <a:tbl>
+              <a:tblPr/>
+              <a:tblGrid>
+                <a:gridCol w="2743200"/>
+                <a:gridCol w="2743200"/>
+                <a:gridCol w="2743200"/>
+              </a:tblGrid>
+              <a:tr h="0">
+                <a:tc>
+                  <a:txBody>
+                    <a:bodyPr/>
+                    <a:lstStyle/>
+                    <a:p>
+                      <a:pPr indent="0" marL="0">
+                        <a:buNone/>
+                      </a:pPr>
+                      <a:r>
+                        <a:rPr lang="en-US" sz="1200" b="1" dirty="0">
+                          <a:solidFill>
+                            <a:srgbClr val="FFFFFF"/>
+                          </a:solidFill>
+                          <a:latin typeface="Apple SD Gothic Neo" pitchFamily="34" charset="0"/>
+                          <a:ea typeface="Apple SD Gothic Neo" pitchFamily="34" charset="-122"/>
+                          <a:cs typeface="Apple SD Gothic Neo" pitchFamily="34" charset="-120"/>
+                        </a:rPr>
+                        <a:t>필드</a:t>
+                      </a:r>
+                      <a:endParaRPr lang="en-US" sz="1200" dirty="0">
+                        <a:latin typeface="Apple SD Gothic Neo" charset="0"/>
+                        <a:ea typeface="Apple SD Gothic Neo" charset="0"/>
+                        <a:cs typeface="Apple SD Gothic Neo" charset="0"/>
+                      </a:endParaRPr>
+                    </a:p>
+                  </a:txBody>
+                  <a:tcPr marL="91440" marR="91440" marT="45720" marB="45720">
+                    <a:lnL w="6350" cap="flat" cmpd="sng" algn="ctr">
+                      <a:solidFill>
+                        <a:srgbClr val="E5E7EB"/>
+                      </a:solidFill>
+                      <a:prstDash val="solid"/>
+                      <a:round/>
+                      <a:headEnd type="none" w="med" len="med"/>
+                      <a:tailEnd type="none" w="med" len="med"/>
+                    </a:lnL>
+                    <a:lnR w="6350" cap="flat" cmpd="sng" algn="ctr">
+                      <a:solidFill>
+                        <a:srgbClr val="E5E7EB"/>
+                      </a:solidFill>
+                      <a:prstDash val="solid"/>
+                      <a:round/>
+                      <a:headEnd type="none" w="med" len="med"/>
+                      <a:tailEnd type="none" w="med" len="med"/>
+                    </a:lnR>
+                    <a:lnT w="6350" cap="flat" cmpd="sng" algn="ctr">
+                      <a:solidFill>
+                        <a:srgbClr val="E5E7EB"/>
+                      </a:solidFill>
+                      <a:prstDash val="solid"/>
+                      <a:round/>
+                      <a:headEnd type="none" w="med" len="med"/>
+                      <a:tailEnd type="none" w="med" len="med"/>
+                    </a:lnT>
+                    <a:lnB w="6350" cap="flat" cmpd="sng" algn="ctr">
+                      <a:solidFill>
+                        <a:srgbClr val="E5E7EB"/>
+                      </a:solidFill>
+                      <a:prstDash val="solid"/>
+                      <a:round/>
+                      <a:headEnd type="none" w="med" len="med"/>
+                      <a:tailEnd type="none" w="med" len="med"/>
+                    </a:lnB>
+                    <a:solidFill>
+                      <a:srgbClr val="3B82F6"/>
+                    </a:solidFill>
+                  </a:tcPr>
+                </a:tc>
+                <a:tc>
+                  <a:txBody>
+                    <a:bodyPr/>
+                    <a:lstStyle/>
+                    <a:p>
+                      <a:pPr indent="0" marL="0">
+                        <a:buNone/>
+                      </a:pPr>
+                      <a:r>
+                        <a:rPr lang="en-US" sz="1200" b="1" dirty="0">
+                          <a:solidFill>
+                            <a:srgbClr val="FFFFFF"/>
+                          </a:solidFill>
+                          <a:latin typeface="Apple SD Gothic Neo" pitchFamily="34" charset="0"/>
+                          <a:ea typeface="Apple SD Gothic Neo" pitchFamily="34" charset="-122"/>
+                          <a:cs typeface="Apple SD Gothic Neo" pitchFamily="34" charset="-120"/>
+                        </a:rPr>
+                        <a:t>설명</a:t>
+                      </a:r>
+                      <a:endParaRPr lang="en-US" sz="1200" dirty="0">
+                        <a:latin typeface="Apple SD Gothic Neo" charset="0"/>
+                        <a:ea typeface="Apple SD Gothic Neo" charset="0"/>
+                        <a:cs typeface="Apple SD Gothic Neo" charset="0"/>
+                      </a:endParaRPr>
+                    </a:p>
+                  </a:txBody>
+                  <a:tcPr marL="91440" marR="91440" marT="45720" marB="45720">
+                    <a:lnL w="6350" cap="flat" cmpd="sng" algn="ctr">
+                      <a:solidFill>
+                        <a:srgbClr val="E5E7EB"/>
+                      </a:solidFill>
+                      <a:prstDash val="solid"/>
+                      <a:round/>
+                      <a:headEnd type="none" w="med" len="med"/>
+                      <a:tailEnd type="none" w="med" len="med"/>
+                    </a:lnL>
+                    <a:lnR w="6350" cap="flat" cmpd="sng" algn="ctr">
+                      <a:solidFill>
+                        <a:srgbClr val="E5E7EB"/>
+                      </a:solidFill>
+                      <a:prstDash val="solid"/>
+                      <a:round/>
+                      <a:headEnd type="none" w="med" len="med"/>
+                      <a:tailEnd type="none" w="med" len="med"/>
+                    </a:lnR>
+                    <a:lnT w="6350" cap="flat" cmpd="sng" algn="ctr">
+                      <a:solidFill>
+                        <a:srgbClr val="E5E7EB"/>
+                      </a:solidFill>
+                      <a:prstDash val="solid"/>
+                      <a:round/>
+                      <a:headEnd type="none" w="med" len="med"/>
+                      <a:tailEnd type="none" w="med" len="med"/>
+                    </a:lnT>
+                    <a:lnB w="6350" cap="flat" cmpd="sng" algn="ctr">
+                      <a:solidFill>
+                        <a:srgbClr val="E5E7EB"/>
+                      </a:solidFill>
+                      <a:prstDash val="solid"/>
+                      <a:round/>
+                      <a:headEnd type="none" w="med" len="med"/>
+                      <a:tailEnd type="none" w="med" len="med"/>
+                    </a:lnB>
+                    <a:solidFill>
+                      <a:srgbClr val="3B82F6"/>
+                    </a:solidFill>
+                  </a:tcPr>
+                </a:tc>
+                <a:tc>
+                  <a:txBody>
+                    <a:bodyPr/>
+                    <a:lstStyle/>
+                    <a:p>
+                      <a:pPr indent="0" marL="0">
+                        <a:buNone/>
+                      </a:pPr>
+                      <a:r>
+                        <a:rPr lang="en-US" sz="1200" b="1" dirty="0">
+                          <a:solidFill>
+                            <a:srgbClr val="FFFFFF"/>
+                          </a:solidFill>
+                          <a:latin typeface="Apple SD Gothic Neo" pitchFamily="34" charset="0"/>
+                          <a:ea typeface="Apple SD Gothic Neo" pitchFamily="34" charset="-122"/>
+                          <a:cs typeface="Apple SD Gothic Neo" pitchFamily="34" charset="-120"/>
+                        </a:rPr>
+                        <a:t>자동 입력</a:t>
+                      </a:r>
+                      <a:endParaRPr lang="en-US" sz="1200" dirty="0">
+                        <a:latin typeface="Apple SD Gothic Neo" charset="0"/>
+                        <a:ea typeface="Apple SD Gothic Neo" charset="0"/>
+                        <a:cs typeface="Apple SD Gothic Neo" charset="0"/>
+                      </a:endParaRPr>
+                    </a:p>
+                  </a:txBody>
+                  <a:tcPr marL="91440" marR="91440" marT="45720" marB="45720">
+                    <a:lnL w="6350" cap="flat" cmpd="sng" algn="ctr">
+                      <a:solidFill>
+                        <a:srgbClr val="E5E7EB"/>
+                      </a:solidFill>
+                      <a:prstDash val="solid"/>
+                      <a:round/>
+                      <a:headEnd type="none" w="med" len="med"/>
+                      <a:tailEnd type="none" w="med" len="med"/>
+                    </a:lnL>
+                    <a:lnR w="6350" cap="flat" cmpd="sng" algn="ctr">
+                      <a:solidFill>
+                        <a:srgbClr val="E5E7EB"/>
+                      </a:solidFill>
+                      <a:prstDash val="solid"/>
+                      <a:round/>
+                      <a:headEnd type="none" w="med" len="med"/>
+                      <a:tailEnd type="none" w="med" len="med"/>
+                    </a:lnR>
+                    <a:lnT w="6350" cap="flat" cmpd="sng" algn="ctr">
+                      <a:solidFill>
+                        <a:srgbClr val="E5E7EB"/>
+                      </a:solidFill>
+                      <a:prstDash val="solid"/>
+                      <a:round/>
+                      <a:headEnd type="none" w="med" len="med"/>
+                      <a:tailEnd type="none" w="med" len="med"/>
+                    </a:lnT>
+                    <a:lnB w="6350" cap="flat" cmpd="sng" algn="ctr">
+                      <a:solidFill>
+                        <a:srgbClr val="E5E7EB"/>
+                      </a:solidFill>
+                      <a:prstDash val="solid"/>
+                      <a:round/>
+                      <a:headEnd type="none" w="med" len="med"/>
+                      <a:tailEnd type="none" w="med" len="med"/>
+                    </a:lnB>
+                    <a:solidFill>
+                      <a:srgbClr val="3B82F6"/>
+                    </a:solidFill>
+                  </a:tcPr>
+                </a:tc>
+              </a:tr>
+              <a:tr h="0">
+                <a:tc>
+                  <a:txBody>
+                    <a:bodyPr/>
+                    <a:lstStyle/>
+                    <a:p>
+                      <a:pPr indent="0" marL="0">
+                        <a:buNone/>
+                      </a:pPr>
+                      <a:r>
+                        <a:rPr lang="en-US" sz="1100" dirty="0">
+                          <a:solidFill>
+                            <a:srgbClr val="374151"/>
+                          </a:solidFill>
+                          <a:latin typeface="Apple SD Gothic Neo" pitchFamily="34" charset="0"/>
+                          <a:ea typeface="Apple SD Gothic Neo" pitchFamily="34" charset="-122"/>
+                          <a:cs typeface="Apple SD Gothic Neo" pitchFamily="34" charset="-120"/>
+                        </a:rPr>
+                        <a:t>청구일자</a:t>
+                      </a:r>
+                      <a:endParaRPr lang="en-US" sz="1100" dirty="0">
+                        <a:latin typeface="Apple SD Gothic Neo" charset="0"/>
+                        <a:ea typeface="Apple SD Gothic Neo" charset="0"/>
+                        <a:cs typeface="Apple SD Gothic Neo" charset="0"/>
+                      </a:endParaRPr>
+                    </a:p>
+                  </a:txBody>
+                  <a:tcPr marL="91440" marR="91440" marT="45720" marB="45720">
+                    <a:lnL w="6350" cap="flat" cmpd="sng" algn="ctr">
+                      <a:solidFill>
+                        <a:srgbClr val="E5E7EB"/>
+                      </a:solidFill>
+                      <a:prstDash val="solid"/>
+                      <a:round/>
+                      <a:headEnd type="none" w="med" len="med"/>
+                      <a:tailEnd type="none" w="med" len="med"/>
+                    </a:lnL>
+                    <a:lnR w="6350" cap="flat" cmpd="sng" algn="ctr">
+                      <a:solidFill>
+                        <a:srgbClr val="E5E7EB"/>
+                      </a:solidFill>
+                      <a:prstDash val="solid"/>
+                      <a:round/>
+                      <a:headEnd type="none" w="med" len="med"/>
+                      <a:tailEnd type="none" w="med" len="med"/>
+                    </a:lnR>
+                    <a:lnT w="6350" cap="flat" cmpd="sng" algn="ctr">
+                      <a:solidFill>
+                        <a:srgbClr val="E5E7EB"/>
+                      </a:solidFill>
+                      <a:prstDash val="solid"/>
+                      <a:round/>
+                      <a:headEnd type="none" w="med" len="med"/>
+                      <a:tailEnd type="none" w="med" len="med"/>
+                    </a:lnT>
+                    <a:lnB w="6350" cap="flat" cmpd="sng" algn="ctr">
+                      <a:solidFill>
+                        <a:srgbClr val="E5E7EB"/>
+                      </a:solidFill>
+                      <a:prstDash val="solid"/>
+                      <a:round/>
+                      <a:headEnd type="none" w="med" len="med"/>
+                      <a:tailEnd type="none" w="med" len="med"/>
+                    </a:lnB>
+                  </a:tcPr>
+                </a:tc>
+                <a:tc>
+                  <a:txBody>
+                    <a:bodyPr/>
+                    <a:lstStyle/>
+                    <a:p>
+                      <a:pPr indent="0" marL="0">
+                        <a:buNone/>
+                      </a:pPr>
+                      <a:r>
+                        <a:rPr lang="en-US" sz="1100" dirty="0">
+                          <a:solidFill>
+                            <a:srgbClr val="374151"/>
+                          </a:solidFill>
+                          <a:latin typeface="Apple SD Gothic Neo" pitchFamily="34" charset="0"/>
+                          <a:ea typeface="Apple SD Gothic Neo" pitchFamily="34" charset="-122"/>
+                          <a:cs typeface="Apple SD Gothic Neo" pitchFamily="34" charset="-120"/>
+                        </a:rPr>
+                        <a:t>청구 날짜</a:t>
+                      </a:r>
+                      <a:endParaRPr lang="en-US" sz="1100" dirty="0">
+                        <a:latin typeface="Apple SD Gothic Neo" charset="0"/>
+                        <a:ea typeface="Apple SD Gothic Neo" charset="0"/>
+                        <a:cs typeface="Apple SD Gothic Neo" charset="0"/>
+                      </a:endParaRPr>
+                    </a:p>
+                  </a:txBody>
+                  <a:tcPr marL="91440" marR="91440" marT="45720" marB="45720">
+                    <a:lnL w="6350" cap="flat" cmpd="sng" algn="ctr">
+                      <a:solidFill>
+                        <a:srgbClr val="E5E7EB"/>
+                      </a:solidFill>
+                      <a:prstDash val="solid"/>
+                      <a:round/>
+                      <a:headEnd type="none" w="med" len="med"/>
+                      <a:tailEnd type="none" w="med" len="med"/>
+                    </a:lnL>
+                    <a:lnR w="6350" cap="flat" cmpd="sng" algn="ctr">
+                      <a:solidFill>
+                        <a:srgbClr val="E5E7EB"/>
+                      </a:solidFill>
+                      <a:prstDash val="solid"/>
+                      <a:round/>
+                      <a:headEnd type="none" w="med" len="med"/>
+                      <a:tailEnd type="none" w="med" len="med"/>
+                    </a:lnR>
+                    <a:lnT w="6350" cap="flat" cmpd="sng" algn="ctr">
+                      <a:solidFill>
+                        <a:srgbClr val="E5E7EB"/>
+                      </a:solidFill>
+                      <a:prstDash val="solid"/>
+                      <a:round/>
+                      <a:headEnd type="none" w="med" len="med"/>
+                      <a:tailEnd type="none" w="med" len="med"/>
+                    </a:lnT>
+                    <a:lnB w="6350" cap="flat" cmpd="sng" algn="ctr">
+                      <a:solidFill>
+                        <a:srgbClr val="E5E7EB"/>
+                      </a:solidFill>
+                      <a:prstDash val="solid"/>
+                      <a:round/>
+                      <a:headEnd type="none" w="med" len="med"/>
+                      <a:tailEnd type="none" w="med" len="med"/>
+                    </a:lnB>
+                  </a:tcPr>
+                </a:tc>
+                <a:tc>
+                  <a:txBody>
+                    <a:bodyPr/>
+                    <a:lstStyle/>
+                    <a:p>
+                      <a:pPr indent="0" marL="0">
+                        <a:buNone/>
+                      </a:pPr>
+                      <a:r>
+                        <a:rPr lang="en-US" sz="1100" dirty="0">
+                          <a:solidFill>
+                            <a:srgbClr val="374151"/>
+                          </a:solidFill>
+                          <a:latin typeface="Apple SD Gothic Neo" pitchFamily="34" charset="0"/>
+                          <a:ea typeface="Apple SD Gothic Neo" pitchFamily="34" charset="-122"/>
+                          <a:cs typeface="Apple SD Gothic Neo" pitchFamily="34" charset="-120"/>
+                        </a:rPr>
+                        <a:t>오늘 날짜</a:t>
+                      </a:r>
+                      <a:endParaRPr lang="en-US" sz="1100" dirty="0">
+                        <a:latin typeface="Apple SD Gothic Neo" charset="0"/>
+                        <a:ea typeface="Apple SD Gothic Neo" charset="0"/>
+                        <a:cs typeface="Apple SD Gothic Neo" charset="0"/>
+                      </a:endParaRPr>
+                    </a:p>
+                  </a:txBody>
+                  <a:tcPr marL="91440" marR="91440" marT="45720" marB="45720">
+                    <a:lnL w="6350" cap="flat" cmpd="sng" algn="ctr">
+                      <a:solidFill>
+                        <a:srgbClr val="E5E7EB"/>
+                      </a:solidFill>
+                      <a:prstDash val="solid"/>
+                      <a:round/>
+                      <a:headEnd type="none" w="med" len="med"/>
+                      <a:tailEnd type="none" w="med" len="med"/>
+                    </a:lnL>
+                    <a:lnR w="6350" cap="flat" cmpd="sng" algn="ctr">
+                      <a:solidFill>
+                        <a:srgbClr val="E5E7EB"/>
+                      </a:solidFill>
+                      <a:prstDash val="solid"/>
+                      <a:round/>
+                      <a:headEnd type="none" w="med" len="med"/>
+                      <a:tailEnd type="none" w="med" len="med"/>
+                    </a:lnR>
+                    <a:lnT w="6350" cap="flat" cmpd="sng" algn="ctr">
+                      <a:solidFill>
+                        <a:srgbClr val="E5E7EB"/>
+                      </a:solidFill>
+                      <a:prstDash val="solid"/>
+                      <a:round/>
+                      <a:headEnd type="none" w="med" len="med"/>
+                      <a:tailEnd type="none" w="med" len="med"/>
+                    </a:lnT>
+                    <a:lnB w="6350" cap="flat" cmpd="sng" algn="ctr">
+                      <a:solidFill>
+                        <a:srgbClr val="E5E7EB"/>
+                      </a:solidFill>
+                      <a:prstDash val="solid"/>
+                      <a:round/>
+                      <a:headEnd type="none" w="med" len="med"/>
+                      <a:tailEnd type="none" w="med" len="med"/>
+                    </a:lnB>
+                  </a:tcPr>
+                </a:tc>
+              </a:tr>
+              <a:tr h="0">
+                <a:tc>
+                  <a:txBody>
+                    <a:bodyPr/>
+                    <a:lstStyle/>
+                    <a:p>
+                      <a:pPr indent="0" marL="0">
+                        <a:buNone/>
+                      </a:pPr>
+                      <a:r>
+                        <a:rPr lang="en-US" sz="1100" dirty="0">
+                          <a:solidFill>
+                            <a:srgbClr val="374151"/>
+                          </a:solidFill>
+                          <a:latin typeface="Apple SD Gothic Neo" pitchFamily="34" charset="0"/>
+                          <a:ea typeface="Apple SD Gothic Neo" pitchFamily="34" charset="-122"/>
+                          <a:cs typeface="Apple SD Gothic Neo" pitchFamily="34" charset="-120"/>
+                        </a:rPr>
+                        <a:t>청구팀</a:t>
+                      </a:r>
+                      <a:endParaRPr lang="en-US" sz="1100" dirty="0">
+                        <a:latin typeface="Apple SD Gothic Neo" charset="0"/>
+                        <a:ea typeface="Apple SD Gothic Neo" charset="0"/>
+                        <a:cs typeface="Apple SD Gothic Neo" charset="0"/>
+                      </a:endParaRPr>
+                    </a:p>
+                  </a:txBody>
+                  <a:tcPr marL="91440" marR="91440" marT="45720" marB="45720">
+                    <a:lnL w="6350" cap="flat" cmpd="sng" algn="ctr">
+                      <a:solidFill>
+                        <a:srgbClr val="E5E7EB"/>
+                      </a:solidFill>
+                      <a:prstDash val="solid"/>
+                      <a:round/>
+                      <a:headEnd type="none" w="med" len="med"/>
+                      <a:tailEnd type="none" w="med" len="med"/>
+                    </a:lnL>
+                    <a:lnR w="6350" cap="flat" cmpd="sng" algn="ctr">
+                      <a:solidFill>
+                        <a:srgbClr val="E5E7EB"/>
+                      </a:solidFill>
+                      <a:prstDash val="solid"/>
+                      <a:round/>
+                      <a:headEnd type="none" w="med" len="med"/>
+                      <a:tailEnd type="none" w="med" len="med"/>
+                    </a:lnR>
+                    <a:lnT w="6350" cap="flat" cmpd="sng" algn="ctr">
+                      <a:solidFill>
+                        <a:srgbClr val="E5E7EB"/>
+                      </a:solidFill>
+                      <a:prstDash val="solid"/>
+                      <a:round/>
+                      <a:headEnd type="none" w="med" len="med"/>
+                      <a:tailEnd type="none" w="med" len="med"/>
+                    </a:lnT>
+                    <a:lnB w="6350" cap="flat" cmpd="sng" algn="ctr">
+                      <a:solidFill>
+                        <a:srgbClr val="E5E7EB"/>
+                      </a:solidFill>
+                      <a:prstDash val="solid"/>
+                      <a:round/>
+                      <a:headEnd type="none" w="med" len="med"/>
+                      <a:tailEnd type="none" w="med" len="med"/>
+                    </a:lnB>
+                  </a:tcPr>
+                </a:tc>
+                <a:tc>
+                  <a:txBody>
+                    <a:bodyPr/>
+                    <a:lstStyle/>
+                    <a:p>
+                      <a:pPr indent="0" marL="0">
+                        <a:buNone/>
+                      </a:pPr>
+                      <a:r>
+                        <a:rPr lang="en-US" sz="1100" dirty="0">
+                          <a:solidFill>
+                            <a:srgbClr val="374151"/>
+                          </a:solidFill>
+                          <a:latin typeface="Apple SD Gothic Neo" pitchFamily="34" charset="0"/>
+                          <a:ea typeface="Apple SD Gothic Neo" pitchFamily="34" charset="-122"/>
+                          <a:cs typeface="Apple SD Gothic Neo" pitchFamily="34" charset="-120"/>
+                        </a:rPr>
+                        <a:t>위원회 + 사역팀</a:t>
+                      </a:r>
+                      <a:endParaRPr lang="en-US" sz="1100" dirty="0">
+                        <a:latin typeface="Apple SD Gothic Neo" charset="0"/>
+                        <a:ea typeface="Apple SD Gothic Neo" charset="0"/>
+                        <a:cs typeface="Apple SD Gothic Neo" charset="0"/>
+                      </a:endParaRPr>
+                    </a:p>
+                  </a:txBody>
+                  <a:tcPr marL="91440" marR="91440" marT="45720" marB="45720">
+                    <a:lnL w="6350" cap="flat" cmpd="sng" algn="ctr">
+                      <a:solidFill>
+                        <a:srgbClr val="E5E7EB"/>
+                      </a:solidFill>
+                      <a:prstDash val="solid"/>
+                      <a:round/>
+                      <a:headEnd type="none" w="med" len="med"/>
+                      <a:tailEnd type="none" w="med" len="med"/>
+                    </a:lnL>
+                    <a:lnR w="6350" cap="flat" cmpd="sng" algn="ctr">
+                      <a:solidFill>
+                        <a:srgbClr val="E5E7EB"/>
+                      </a:solidFill>
+                      <a:prstDash val="solid"/>
+                      <a:round/>
+                      <a:headEnd type="none" w="med" len="med"/>
+                      <a:tailEnd type="none" w="med" len="med"/>
+                    </a:lnR>
+                    <a:lnT w="6350" cap="flat" cmpd="sng" algn="ctr">
+                      <a:solidFill>
+                        <a:srgbClr val="E5E7EB"/>
+                      </a:solidFill>
+                      <a:prstDash val="solid"/>
+                      <a:round/>
+                      <a:headEnd type="none" w="med" len="med"/>
+                      <a:tailEnd type="none" w="med" len="med"/>
+                    </a:lnT>
+                    <a:lnB w="6350" cap="flat" cmpd="sng" algn="ctr">
+                      <a:solidFill>
+                        <a:srgbClr val="E5E7EB"/>
+                      </a:solidFill>
+                      <a:prstDash val="solid"/>
+                      <a:round/>
+                      <a:headEnd type="none" w="med" len="med"/>
+                      <a:tailEnd type="none" w="med" len="med"/>
+                    </a:lnB>
+                  </a:tcPr>
+                </a:tc>
+                <a:tc>
+                  <a:txBody>
+                    <a:bodyPr/>
+                    <a:lstStyle/>
+                    <a:p>
+                      <a:pPr indent="0" marL="0">
+                        <a:buNone/>
+                      </a:pPr>
+                      <a:r>
+                        <a:rPr lang="en-US" sz="1100" dirty="0">
+                          <a:solidFill>
+                            <a:srgbClr val="374151"/>
+                          </a:solidFill>
+                          <a:latin typeface="Apple SD Gothic Neo" pitchFamily="34" charset="0"/>
+                          <a:ea typeface="Apple SD Gothic Neo" pitchFamily="34" charset="-122"/>
+                          <a:cs typeface="Apple SD Gothic Neo" pitchFamily="34" charset="-120"/>
+                        </a:rPr>
+                        <a:t>자동 생성</a:t>
+                      </a:r>
+                      <a:endParaRPr lang="en-US" sz="1100" dirty="0">
+                        <a:latin typeface="Apple SD Gothic Neo" charset="0"/>
+                        <a:ea typeface="Apple SD Gothic Neo" charset="0"/>
+                        <a:cs typeface="Apple SD Gothic Neo" charset="0"/>
+                      </a:endParaRPr>
+                    </a:p>
+                  </a:txBody>
+                  <a:tcPr marL="91440" marR="91440" marT="45720" marB="45720">
+                    <a:lnL w="6350" cap="flat" cmpd="sng" algn="ctr">
+                      <a:solidFill>
+                        <a:srgbClr val="E5E7EB"/>
+                      </a:solidFill>
+                      <a:prstDash val="solid"/>
+                      <a:round/>
+                      <a:headEnd type="none" w="med" len="med"/>
+                      <a:tailEnd type="none" w="med" len="med"/>
+                    </a:lnL>
+                    <a:lnR w="6350" cap="flat" cmpd="sng" algn="ctr">
+                      <a:solidFill>
+                        <a:srgbClr val="E5E7EB"/>
+                      </a:solidFill>
+                      <a:prstDash val="solid"/>
+                      <a:round/>
+                      <a:headEnd type="none" w="med" len="med"/>
+                      <a:tailEnd type="none" w="med" len="med"/>
+                    </a:lnR>
+                    <a:lnT w="6350" cap="flat" cmpd="sng" algn="ctr">
+                      <a:solidFill>
+                        <a:srgbClr val="E5E7EB"/>
+                      </a:solidFill>
+                      <a:prstDash val="solid"/>
+                      <a:round/>
+                      <a:headEnd type="none" w="med" len="med"/>
+                      <a:tailEnd type="none" w="med" len="med"/>
+                    </a:lnT>
+                    <a:lnB w="6350" cap="flat" cmpd="sng" algn="ctr">
+                      <a:solidFill>
+                        <a:srgbClr val="E5E7EB"/>
+                      </a:solidFill>
+                      <a:prstDash val="solid"/>
+                      <a:round/>
+                      <a:headEnd type="none" w="med" len="med"/>
+                      <a:tailEnd type="none" w="med" len="med"/>
+                    </a:lnB>
+                  </a:tcPr>
+                </a:tc>
+              </a:tr>
+              <a:tr h="0">
+                <a:tc>
+                  <a:txBody>
+                    <a:bodyPr/>
+                    <a:lstStyle/>
+                    <a:p>
+                      <a:pPr indent="0" marL="0">
+                        <a:buNone/>
+                      </a:pPr>
+                      <a:r>
+                        <a:rPr lang="en-US" sz="1100" dirty="0">
+                          <a:solidFill>
+                            <a:srgbClr val="374151"/>
+                          </a:solidFill>
+                          <a:latin typeface="Apple SD Gothic Neo" pitchFamily="34" charset="0"/>
+                          <a:ea typeface="Apple SD Gothic Neo" pitchFamily="34" charset="-122"/>
+                          <a:cs typeface="Apple SD Gothic Neo" pitchFamily="34" charset="-120"/>
+                        </a:rPr>
+                        <a:t>청구인</a:t>
+                      </a:r>
+                      <a:endParaRPr lang="en-US" sz="1100" dirty="0">
+                        <a:latin typeface="Apple SD Gothic Neo" charset="0"/>
+                        <a:ea typeface="Apple SD Gothic Neo" charset="0"/>
+                        <a:cs typeface="Apple SD Gothic Neo" charset="0"/>
+                      </a:endParaRPr>
+                    </a:p>
+                  </a:txBody>
+                  <a:tcPr marL="91440" marR="91440" marT="45720" marB="45720">
+                    <a:lnL w="6350" cap="flat" cmpd="sng" algn="ctr">
+                      <a:solidFill>
+                        <a:srgbClr val="E5E7EB"/>
+                      </a:solidFill>
+                      <a:prstDash val="solid"/>
+                      <a:round/>
+                      <a:headEnd type="none" w="med" len="med"/>
+                      <a:tailEnd type="none" w="med" len="med"/>
+                    </a:lnL>
+                    <a:lnR w="6350" cap="flat" cmpd="sng" algn="ctr">
+                      <a:solidFill>
+                        <a:srgbClr val="E5E7EB"/>
+                      </a:solidFill>
+                      <a:prstDash val="solid"/>
+                      <a:round/>
+                      <a:headEnd type="none" w="med" len="med"/>
+                      <a:tailEnd type="none" w="med" len="med"/>
+                    </a:lnR>
+                    <a:lnT w="6350" cap="flat" cmpd="sng" algn="ctr">
+                      <a:solidFill>
+                        <a:srgbClr val="E5E7EB"/>
+                      </a:solidFill>
+                      <a:prstDash val="solid"/>
+                      <a:round/>
+                      <a:headEnd type="none" w="med" len="med"/>
+                      <a:tailEnd type="none" w="med" len="med"/>
+                    </a:lnT>
+                    <a:lnB w="6350" cap="flat" cmpd="sng" algn="ctr">
+                      <a:solidFill>
+                        <a:srgbClr val="E5E7EB"/>
+                      </a:solidFill>
+                      <a:prstDash val="solid"/>
+                      <a:round/>
+                      <a:headEnd type="none" w="med" len="med"/>
+                      <a:tailEnd type="none" w="med" len="med"/>
+                    </a:lnB>
+                  </a:tcPr>
+                </a:tc>
+                <a:tc>
+                  <a:txBody>
+                    <a:bodyPr/>
+                    <a:lstStyle/>
+                    <a:p>
+                      <a:pPr indent="0" marL="0">
+                        <a:buNone/>
+                      </a:pPr>
+                      <a:r>
+                        <a:rPr lang="en-US" sz="1100" dirty="0">
+                          <a:solidFill>
+                            <a:srgbClr val="374151"/>
+                          </a:solidFill>
+                          <a:latin typeface="Apple SD Gothic Neo" pitchFamily="34" charset="0"/>
+                          <a:ea typeface="Apple SD Gothic Neo" pitchFamily="34" charset="-122"/>
+                          <a:cs typeface="Apple SD Gothic Neo" pitchFamily="34" charset="-120"/>
+                        </a:rPr>
+                        <a:t>작성자 이름</a:t>
+                      </a:r>
+                      <a:endParaRPr lang="en-US" sz="1100" dirty="0">
+                        <a:latin typeface="Apple SD Gothic Neo" charset="0"/>
+                        <a:ea typeface="Apple SD Gothic Neo" charset="0"/>
+                        <a:cs typeface="Apple SD Gothic Neo" charset="0"/>
+                      </a:endParaRPr>
+                    </a:p>
+                  </a:txBody>
+                  <a:tcPr marL="91440" marR="91440" marT="45720" marB="45720">
+                    <a:lnL w="6350" cap="flat" cmpd="sng" algn="ctr">
+                      <a:solidFill>
+                        <a:srgbClr val="E5E7EB"/>
+                      </a:solidFill>
+                      <a:prstDash val="solid"/>
+                      <a:round/>
+                      <a:headEnd type="none" w="med" len="med"/>
+                      <a:tailEnd type="none" w="med" len="med"/>
+                    </a:lnL>
+                    <a:lnR w="6350" cap="flat" cmpd="sng" algn="ctr">
+                      <a:solidFill>
+                        <a:srgbClr val="E5E7EB"/>
+                      </a:solidFill>
+                      <a:prstDash val="solid"/>
+                      <a:round/>
+                      <a:headEnd type="none" w="med" len="med"/>
+                      <a:tailEnd type="none" w="med" len="med"/>
+                    </a:lnR>
+                    <a:lnT w="6350" cap="flat" cmpd="sng" algn="ctr">
+                      <a:solidFill>
+                        <a:srgbClr val="E5E7EB"/>
+                      </a:solidFill>
+                      <a:prstDash val="solid"/>
+                      <a:round/>
+                      <a:headEnd type="none" w="med" len="med"/>
+                      <a:tailEnd type="none" w="med" len="med"/>
+                    </a:lnT>
+                    <a:lnB w="6350" cap="flat" cmpd="sng" algn="ctr">
+                      <a:solidFill>
+                        <a:srgbClr val="E5E7EB"/>
+                      </a:solidFill>
+                      <a:prstDash val="solid"/>
+                      <a:round/>
+                      <a:headEnd type="none" w="med" len="med"/>
+                      <a:tailEnd type="none" w="med" len="med"/>
+                    </a:lnB>
+                  </a:tcPr>
+                </a:tc>
+                <a:tc>
+                  <a:txBody>
+                    <a:bodyPr/>
+                    <a:lstStyle/>
+                    <a:p>
+                      <a:pPr indent="0" marL="0">
+                        <a:buNone/>
+                      </a:pPr>
+                      <a:r>
+                        <a:rPr lang="en-US" sz="1100" dirty="0">
+                          <a:solidFill>
+                            <a:srgbClr val="374151"/>
+                          </a:solidFill>
+                          <a:latin typeface="Apple SD Gothic Neo" pitchFamily="34" charset="0"/>
+                          <a:ea typeface="Apple SD Gothic Neo" pitchFamily="34" charset="-122"/>
+                          <a:cs typeface="Apple SD Gothic Neo" pitchFamily="34" charset="-120"/>
+                        </a:rPr>
+                        <a:t>로그인 사용자</a:t>
+                      </a:r>
+                      <a:endParaRPr lang="en-US" sz="1100" dirty="0">
+                        <a:latin typeface="Apple SD Gothic Neo" charset="0"/>
+                        <a:ea typeface="Apple SD Gothic Neo" charset="0"/>
+                        <a:cs typeface="Apple SD Gothic Neo" charset="0"/>
+                      </a:endParaRPr>
+                    </a:p>
+                  </a:txBody>
+                  <a:tcPr marL="91440" marR="91440" marT="45720" marB="45720">
+                    <a:lnL w="6350" cap="flat" cmpd="sng" algn="ctr">
+                      <a:solidFill>
+                        <a:srgbClr val="E5E7EB"/>
+                      </a:solidFill>
+                      <a:prstDash val="solid"/>
+                      <a:round/>
+                      <a:headEnd type="none" w="med" len="med"/>
+                      <a:tailEnd type="none" w="med" len="med"/>
+                    </a:lnL>
+                    <a:lnR w="6350" cap="flat" cmpd="sng" algn="ctr">
+                      <a:solidFill>
+                        <a:srgbClr val="E5E7EB"/>
+                      </a:solidFill>
+                      <a:prstDash val="solid"/>
+                      <a:round/>
+                      <a:headEnd type="none" w="med" len="med"/>
+                      <a:tailEnd type="none" w="med" len="med"/>
+                    </a:lnR>
+                    <a:lnT w="6350" cap="flat" cmpd="sng" algn="ctr">
+                      <a:solidFill>
+                        <a:srgbClr val="E5E7EB"/>
+                      </a:solidFill>
+                      <a:prstDash val="solid"/>
+                      <a:round/>
+                      <a:headEnd type="none" w="med" len="med"/>
+                      <a:tailEnd type="none" w="med" len="med"/>
+                    </a:lnT>
+                    <a:lnB w="6350" cap="flat" cmpd="sng" algn="ctr">
+                      <a:solidFill>
+                        <a:srgbClr val="E5E7EB"/>
+                      </a:solidFill>
+                      <a:prstDash val="solid"/>
+                      <a:round/>
+                      <a:headEnd type="none" w="med" len="med"/>
+                      <a:tailEnd type="none" w="med" len="med"/>
+                    </a:lnB>
+                  </a:tcPr>
+                </a:tc>
+              </a:tr>
+              <a:tr h="0">
+                <a:tc>
+                  <a:txBody>
+                    <a:bodyPr/>
+                    <a:lstStyle/>
+                    <a:p>
+                      <a:pPr indent="0" marL="0">
+                        <a:buNone/>
+                      </a:pPr>
+                      <a:r>
+                        <a:rPr lang="en-US" sz="1100" dirty="0">
+                          <a:solidFill>
+                            <a:srgbClr val="374151"/>
+                          </a:solidFill>
+                          <a:latin typeface="Apple SD Gothic Neo" pitchFamily="34" charset="0"/>
+                          <a:ea typeface="Apple SD Gothic Neo" pitchFamily="34" charset="-122"/>
+                          <a:cs typeface="Apple SD Gothic Neo" pitchFamily="34" charset="-120"/>
+                        </a:rPr>
+                        <a:t>직책</a:t>
+                      </a:r>
+                      <a:endParaRPr lang="en-US" sz="1100" dirty="0">
+                        <a:latin typeface="Apple SD Gothic Neo" charset="0"/>
+                        <a:ea typeface="Apple SD Gothic Neo" charset="0"/>
+                        <a:cs typeface="Apple SD Gothic Neo" charset="0"/>
+                      </a:endParaRPr>
+                    </a:p>
+                  </a:txBody>
+                  <a:tcPr marL="91440" marR="91440" marT="45720" marB="45720">
+                    <a:lnL w="6350" cap="flat" cmpd="sng" algn="ctr">
+                      <a:solidFill>
+                        <a:srgbClr val="E5E7EB"/>
+                      </a:solidFill>
+                      <a:prstDash val="solid"/>
+                      <a:round/>
+                      <a:headEnd type="none" w="med" len="med"/>
+                      <a:tailEnd type="none" w="med" len="med"/>
+                    </a:lnL>
+                    <a:lnR w="6350" cap="flat" cmpd="sng" algn="ctr">
+                      <a:solidFill>
+                        <a:srgbClr val="E5E7EB"/>
+                      </a:solidFill>
+                      <a:prstDash val="solid"/>
+                      <a:round/>
+                      <a:headEnd type="none" w="med" len="med"/>
+                      <a:tailEnd type="none" w="med" len="med"/>
+                    </a:lnR>
+                    <a:lnT w="6350" cap="flat" cmpd="sng" algn="ctr">
+                      <a:solidFill>
+                        <a:srgbClr val="E5E7EB"/>
+                      </a:solidFill>
+                      <a:prstDash val="solid"/>
+                      <a:round/>
+                      <a:headEnd type="none" w="med" len="med"/>
+                      <a:tailEnd type="none" w="med" len="med"/>
+                    </a:lnT>
+                    <a:lnB w="6350" cap="flat" cmpd="sng" algn="ctr">
+                      <a:solidFill>
+                        <a:srgbClr val="E5E7EB"/>
+                      </a:solidFill>
+                      <a:prstDash val="solid"/>
+                      <a:round/>
+                      <a:headEnd type="none" w="med" len="med"/>
+                      <a:tailEnd type="none" w="med" len="med"/>
+                    </a:lnB>
+                  </a:tcPr>
+                </a:tc>
+                <a:tc>
+                  <a:txBody>
+                    <a:bodyPr/>
+                    <a:lstStyle/>
+                    <a:p>
+                      <a:pPr indent="0" marL="0">
+                        <a:buNone/>
+                      </a:pPr>
+                      <a:r>
+                        <a:rPr lang="en-US" sz="1100" dirty="0">
+                          <a:solidFill>
+                            <a:srgbClr val="374151"/>
+                          </a:solidFill>
+                          <a:latin typeface="Apple SD Gothic Neo" pitchFamily="34" charset="0"/>
+                          <a:ea typeface="Apple SD Gothic Neo" pitchFamily="34" charset="-122"/>
+                          <a:cs typeface="Apple SD Gothic Neo" pitchFamily="34" charset="-120"/>
+                        </a:rPr>
+                        <a:t>작성자 직책</a:t>
+                      </a:r>
+                      <a:endParaRPr lang="en-US" sz="1100" dirty="0">
+                        <a:latin typeface="Apple SD Gothic Neo" charset="0"/>
+                        <a:ea typeface="Apple SD Gothic Neo" charset="0"/>
+                        <a:cs typeface="Apple SD Gothic Neo" charset="0"/>
+                      </a:endParaRPr>
+                    </a:p>
+                  </a:txBody>
+                  <a:tcPr marL="91440" marR="91440" marT="45720" marB="45720">
+                    <a:lnL w="6350" cap="flat" cmpd="sng" algn="ctr">
+                      <a:solidFill>
+                        <a:srgbClr val="E5E7EB"/>
+                      </a:solidFill>
+                      <a:prstDash val="solid"/>
+                      <a:round/>
+                      <a:headEnd type="none" w="med" len="med"/>
+                      <a:tailEnd type="none" w="med" len="med"/>
+                    </a:lnL>
+                    <a:lnR w="6350" cap="flat" cmpd="sng" algn="ctr">
+                      <a:solidFill>
+                        <a:srgbClr val="E5E7EB"/>
+                      </a:solidFill>
+                      <a:prstDash val="solid"/>
+                      <a:round/>
+                      <a:headEnd type="none" w="med" len="med"/>
+                      <a:tailEnd type="none" w="med" len="med"/>
+                    </a:lnR>
+                    <a:lnT w="6350" cap="flat" cmpd="sng" algn="ctr">
+                      <a:solidFill>
+                        <a:srgbClr val="E5E7EB"/>
+                      </a:solidFill>
+                      <a:prstDash val="solid"/>
+                      <a:round/>
+                      <a:headEnd type="none" w="med" len="med"/>
+                      <a:tailEnd type="none" w="med" len="med"/>
+                    </a:lnT>
+                    <a:lnB w="6350" cap="flat" cmpd="sng" algn="ctr">
+                      <a:solidFill>
+                        <a:srgbClr val="E5E7EB"/>
+                      </a:solidFill>
+                      <a:prstDash val="solid"/>
+                      <a:round/>
+                      <a:headEnd type="none" w="med" len="med"/>
+                      <a:tailEnd type="none" w="med" len="med"/>
+                    </a:lnB>
+                  </a:tcPr>
+                </a:tc>
+                <a:tc>
+                  <a:txBody>
+                    <a:bodyPr/>
+                    <a:lstStyle/>
+                    <a:p>
+                      <a:pPr indent="0" marL="0">
+                        <a:buNone/>
+                      </a:pPr>
+                      <a:r>
+                        <a:rPr lang="en-US" sz="1100" dirty="0">
+                          <a:solidFill>
+                            <a:srgbClr val="374151"/>
+                          </a:solidFill>
+                          <a:latin typeface="Apple SD Gothic Neo" pitchFamily="34" charset="0"/>
+                          <a:ea typeface="Apple SD Gothic Neo" pitchFamily="34" charset="-122"/>
+                          <a:cs typeface="Apple SD Gothic Neo" pitchFamily="34" charset="-120"/>
+                        </a:rPr>
+                        <a:t>-</a:t>
+                      </a:r>
+                      <a:endParaRPr lang="en-US" sz="1100" dirty="0">
+                        <a:latin typeface="Apple SD Gothic Neo" charset="0"/>
+                        <a:ea typeface="Apple SD Gothic Neo" charset="0"/>
+                        <a:cs typeface="Apple SD Gothic Neo" charset="0"/>
+                      </a:endParaRPr>
+                    </a:p>
+                  </a:txBody>
+                  <a:tcPr marL="91440" marR="91440" marT="45720" marB="45720">
+                    <a:lnL w="6350" cap="flat" cmpd="sng" algn="ctr">
+                      <a:solidFill>
+                        <a:srgbClr val="E5E7EB"/>
+                      </a:solidFill>
+                      <a:prstDash val="solid"/>
+                      <a:round/>
+                      <a:headEnd type="none" w="med" len="med"/>
+                      <a:tailEnd type="none" w="med" len="med"/>
+                    </a:lnL>
+                    <a:lnR w="6350" cap="flat" cmpd="sng" algn="ctr">
+                      <a:solidFill>
+                        <a:srgbClr val="E5E7EB"/>
+                      </a:solidFill>
+                      <a:prstDash val="solid"/>
+                      <a:round/>
+                      <a:headEnd type="none" w="med" len="med"/>
+                      <a:tailEnd type="none" w="med" len="med"/>
+                    </a:lnR>
+                    <a:lnT w="6350" cap="flat" cmpd="sng" algn="ctr">
+                      <a:solidFill>
+                        <a:srgbClr val="E5E7EB"/>
+                      </a:solidFill>
+                      <a:prstDash val="solid"/>
+                      <a:round/>
+                      <a:headEnd type="none" w="med" len="med"/>
+                      <a:tailEnd type="none" w="med" len="med"/>
+                    </a:lnT>
+                    <a:lnB w="6350" cap="flat" cmpd="sng" algn="ctr">
+                      <a:solidFill>
+                        <a:srgbClr val="E5E7EB"/>
+                      </a:solidFill>
+                      <a:prstDash val="solid"/>
+                      <a:round/>
+                      <a:headEnd type="none" w="med" len="med"/>
+                      <a:tailEnd type="none" w="med" len="med"/>
+                    </a:lnB>
+                  </a:tcPr>
+                </a:tc>
+              </a:tr>
+            </a:tbl>
+          </a:graphicData>
+        </a:graphic>
+      </p:graphicFrame>
+      <p:sp>
+        <p:nvSpPr>
+          <p:cNvPr id="25" name="Slide Number Placeholder 0"/>
+          <p:cNvSpPr>
+            <a:spLocks noGrp="1"/>
+          </p:cNvSpPr>
+          <p:nvPr>
+            <p:ph type="sldNum" sz="quarter" idx="4294967295"/>
+          </p:nvPr>
+        </p:nvSpPr>
+        <p:spPr>
+          <a:xfrm>
+            <a:off x="8686800" y="4937760"/>
+            <a:ext cx="800000" cy="300000"/>
+          </a:xfrm>
+          <a:prstGeom prst="rect">
+            <a:avLst/>
+          </a:prstGeom>
+          <a:extLst>
+            <a:ext uri="{C572A759-6A51-4108-AA02-DFA0A04FC94B}">
+              <ma14:wrappingTextBoxFlag xmlns:ma14="http://schemas.microsoft.com/office/mac/drawingml/2011/main" val="0"/>
+            </a:ext>
+          </a:extLst>
+        </p:spPr>
+        <p:txBody>
+          <a:bodyPr/>
+          <a:lstStyle>
+            <a:lvl1pPr>
+              <a:defRPr sz="1000">
+                <a:solidFill>
+                  <a:srgbClr val="FFFFFF"/>
+                </a:solidFill>
+              </a:defRPr>
+            </a:lvl1pPr>
+          </a:lstStyle>
+          <a:p>
+            <a:pPr algn="l"/>
+            <a:fld id="{F7021451-1387-4CA6-816F-3879F97B5CBC}" type="slidenum">
+              <a:rPr b="0" lang="en-US"/>
+              <a:t>13</a:t>
+            </a:fld>
+            <a:endParaRPr lang="en-US"/>
+          </a:p>
+        </p:txBody>
+      </p:sp>
+    </p:spTree>
+  </p:cSld>
+  <p:clrMapOvr>
+    <a:masterClrMapping/>
+  </p:clrMapOvr>
+</p:sld>
+</file>
+
+<file path=ppt/slides/slide14.xml><?xml version="1.0" encoding="utf-8"?>
+<p:sld xmlns:a="http://schemas.openxmlformats.org/drawingml/2006/main" xmlns:r="http://schemas.openxmlformats.org/officeDocument/2006/relationships" xmlns:p="http://schemas.openxmlformats.org/presentationml/2006/main">
+  <p:cSld name="Slide 14">
+    <p:spTree>
+      <p:nvGrpSpPr>
+        <p:cNvPr id="1" name=""/>
+        <p:cNvGrpSpPr/>
+        <p:nvPr/>
+      </p:nvGrpSpPr>
+      <p:grpSpPr>
+        <a:xfrm>
+          <a:off x="0" y="0"/>
+          <a:ext cx="0" cy="0"/>
+          <a:chOff x="0" y="0"/>
+          <a:chExt cx="0" cy="0"/>
+        </a:xfrm>
+      </p:grpSpPr>
+      <p:sp>
+        <p:nvSpPr>
+          <p:cNvPr id="2" name="Text 0"/>
+          <p:cNvSpPr/>
+          <p:nvPr/>
+        </p:nvSpPr>
+        <p:spPr>
+          <a:xfrm>
+            <a:off x="457200" y="274320"/>
+            <a:ext cx="8229600" cy="0"/>
+          </a:xfrm>
+          <a:prstGeom prst="rect">
+            <a:avLst/>
+          </a:prstGeom>
+          <a:noFill/>
+          <a:ln/>
+        </p:spPr>
+        <p:txBody>
+          <a:bodyPr wrap="square" rtlCol="0" anchor="ctr"/>
+          <a:lstStyle/>
+          <a:p>
+            <a:pPr indent="0" marL="0">
+              <a:buNone/>
+            </a:pPr>
+            <a:r>
+              <a:rPr lang="en-US" sz="2800" b="1" dirty="0">
+                <a:solidFill>
+                  <a:srgbClr val="1E40AF"/>
+                </a:solidFill>
+              </a:rPr>
+              <a:t>4단계: 은행 정보 입력</a:t>
+            </a:r>
+            <a:endParaRPr lang="en-US" sz="2800" dirty="0"/>
+          </a:p>
+        </p:txBody>
+      </p:sp>
+      <p:pic>
+        <p:nvPicPr>
+          <p:cNvPr id="3" name="Image 0" descr="/Users/wandosea/Documents/GitHub/expense-system/docs/user-guide/screenshots/bank-section.png">    </p:cNvPr>
+          <p:cNvPicPr>
+            <a:picLocks noChangeAspect="1"/>
+          </p:cNvPicPr>
+          <p:nvPr/>
+        </p:nvPicPr>
+        <p:blipFill>
+          <a:blip r:embed="rId1"/>
+          <a:srcRect l="0" r="0" t="0" b="0"/>
+          <a:stretch/>
+        </p:blipFill>
+        <p:spPr>
+          <a:xfrm>
+            <a:off x="457200" y="914400"/>
+            <a:ext cx="8229600" cy="3657600"/>
+          </a:xfrm>
+          <a:prstGeom prst="rect">
+            <a:avLst/>
+          </a:prstGeom>
+        </p:spPr>
+      </p:pic>
+      <p:sp>
+        <p:nvSpPr>
+          <p:cNvPr id="4" name="Text 1"/>
+          <p:cNvSpPr/>
+          <p:nvPr/>
+        </p:nvSpPr>
+        <p:spPr>
+          <a:xfrm>
+            <a:off x="457200" y="4754880"/>
+            <a:ext cx="8229600" cy="0"/>
+          </a:xfrm>
+          <a:prstGeom prst="rect">
+            <a:avLst/>
+          </a:prstGeom>
+          <a:noFill/>
+          <a:ln/>
+        </p:spPr>
+        <p:txBody>
+          <a:bodyPr wrap="square" rtlCol="0" anchor="ctr"/>
+          <a:lstStyle/>
+          <a:p>
+            <a:pPr indent="0" marL="0">
+              <a:buNone/>
+            </a:pPr>
+            <a:r>
+              <a:rPr lang="en-US" sz="1200" dirty="0">
+                <a:solidFill>
+                  <a:srgbClr val="6B7280"/>
+                </a:solidFill>
+              </a:rPr>
+              <a:t>저장된 계좌 선택 또는 직접 입력</a:t>
+            </a:r>
+            <a:endParaRPr lang="en-US" sz="1200" dirty="0"/>
+          </a:p>
+        </p:txBody>
+      </p:sp>
+      <p:sp>
+        <p:nvSpPr>
+          <p:cNvPr id="25" name="Slide Number Placeholder 0"/>
+          <p:cNvSpPr>
+            <a:spLocks noGrp="1"/>
+          </p:cNvSpPr>
+          <p:nvPr>
+            <p:ph type="sldNum" sz="quarter" idx="4294967295"/>
+          </p:nvPr>
+        </p:nvSpPr>
+        <p:spPr>
+          <a:xfrm>
+            <a:off x="8686800" y="4937760"/>
+            <a:ext cx="800000" cy="300000"/>
+          </a:xfrm>
+          <a:prstGeom prst="rect">
+            <a:avLst/>
+          </a:prstGeom>
+          <a:extLst>
+            <a:ext uri="{C572A759-6A51-4108-AA02-DFA0A04FC94B}">
+              <ma14:wrappingTextBoxFlag xmlns:ma14="http://schemas.microsoft.com/office/mac/drawingml/2011/main" val="0"/>
+            </a:ext>
+          </a:extLst>
+        </p:spPr>
+        <p:txBody>
+          <a:bodyPr/>
+          <a:lstStyle>
+            <a:lvl1pPr>
+              <a:defRPr sz="1000">
+                <a:solidFill>
+                  <a:srgbClr val="FFFFFF"/>
+                </a:solidFill>
+              </a:defRPr>
+            </a:lvl1pPr>
+          </a:lstStyle>
+          <a:p>
+            <a:pPr algn="l"/>
+            <a:fld id="{F7021451-1387-4CA6-816F-3879F97B5CBC}" type="slidenum">
+              <a:rPr b="0" lang="en-US"/>
+              <a:t>14</a:t>
+            </a:fld>
+            <a:endParaRPr lang="en-US"/>
+          </a:p>
+        </p:txBody>
+      </p:sp>
+    </p:spTree>
+  </p:cSld>
+  <p:clrMapOvr>
+    <a:masterClrMapping/>
+  </p:clrMapOvr>
+</p:sld>
+</file>
+
+<file path=ppt/slides/slide15.xml><?xml version="1.0" encoding="utf-8"?>
+<p:sld xmlns:a="http://schemas.openxmlformats.org/drawingml/2006/main" xmlns:r="http://schemas.openxmlformats.org/officeDocument/2006/relationships" xmlns:p="http://schemas.openxmlformats.org/presentationml/2006/main">
+  <p:cSld name="Slide 15">
+    <p:spTree>
+      <p:nvGrpSpPr>
+        <p:cNvPr id="1" name=""/>
+        <p:cNvGrpSpPr/>
+        <p:nvPr/>
+      </p:nvGrpSpPr>
+      <p:grpSpPr>
+        <a:xfrm>
+          <a:off x="0" y="0"/>
+          <a:ext cx="0" cy="0"/>
+          <a:chOff x="0" y="0"/>
+          <a:chExt cx="0" cy="0"/>
+        </a:xfrm>
+      </p:grpSpPr>
+      <p:sp>
+        <p:nvSpPr>
+          <p:cNvPr id="2" name="Text 0"/>
+          <p:cNvSpPr/>
+          <p:nvPr/>
+        </p:nvSpPr>
+        <p:spPr>
+          <a:xfrm>
+            <a:off x="457200" y="274320"/>
+            <a:ext cx="8229600" cy="0"/>
+          </a:xfrm>
+          <a:prstGeom prst="rect">
+            <a:avLst/>
+          </a:prstGeom>
+          <a:noFill/>
+          <a:ln/>
+        </p:spPr>
+        <p:txBody>
+          <a:bodyPr wrap="square" rtlCol="0" anchor="ctr"/>
+          <a:lstStyle/>
+          <a:p>
+            <a:pPr indent="0" marL="0">
+              <a:buNone/>
+            </a:pPr>
+            <a:r>
+              <a:rPr lang="en-US" sz="2800" b="1" dirty="0">
+                <a:solidFill>
+                  <a:srgbClr val="1E40AF"/>
+                </a:solidFill>
+              </a:rPr>
+              <a:t>은행 정보 입력 방식</a:t>
+            </a:r>
+            <a:endParaRPr lang="en-US" sz="2800" dirty="0"/>
+          </a:p>
+        </p:txBody>
+      </p:sp>
+      <p:sp>
+        <p:nvSpPr>
+          <p:cNvPr id="3" name="Text 1"/>
+          <p:cNvSpPr/>
+          <p:nvPr/>
+        </p:nvSpPr>
+        <p:spPr>
+          <a:xfrm>
+            <a:off x="640080" y="914400"/>
+            <a:ext cx="7772400" cy="0"/>
+          </a:xfrm>
+          <a:prstGeom prst="rect">
+            <a:avLst/>
+          </a:prstGeom>
+          <a:noFill/>
+          <a:ln/>
+        </p:spPr>
+        <p:txBody>
+          <a:bodyPr wrap="square" rtlCol="0" anchor="ctr"/>
+          <a:lstStyle/>
+          <a:p>
+            <a:r>
+              <a:rPr lang="en-US" sz="1400" dirty="0">
+                <a:solidFill>
+                  <a:srgbClr val="374151"/>
+                </a:solidFill>
+              </a:rPr>
+              <a:t>모드 1: 저장된 계좌 - 미리 저장한 계좌 드롭다운 선택</a:t>
+            </a:r>
+            <a:endParaRPr lang="en-US" sz="1400" dirty="0"/>
+          </a:p>
+        </p:txBody>
+      </p:sp>
+      <p:sp>
+        <p:nvSpPr>
+          <p:cNvPr id="4" name="Text 2"/>
+          <p:cNvSpPr/>
+          <p:nvPr/>
+        </p:nvSpPr>
+        <p:spPr>
+          <a:xfrm>
+            <a:off x="640080" y="1280160"/>
+            <a:ext cx="7772400" cy="0"/>
+          </a:xfrm>
+          <a:prstGeom prst="rect">
+            <a:avLst/>
+          </a:prstGeom>
+          <a:noFill/>
+          <a:ln/>
+        </p:spPr>
+        <p:txBody>
+          <a:bodyPr wrap="square" rtlCol="0" anchor="ctr"/>
+          <a:lstStyle/>
+          <a:p>
+            <a:r>
+              <a:rPr lang="en-US" sz="1400" dirty="0">
+                <a:solidFill>
+                  <a:srgbClr val="374151"/>
+                </a:solidFill>
+              </a:rPr>
+              <a:t>모드 2: 직접 입력 - 은행명, 계좌번호, 예금주 입력</a:t>
+            </a:r>
+            <a:endParaRPr lang="en-US" sz="1400" dirty="0"/>
+          </a:p>
+        </p:txBody>
+      </p:sp>
+      <p:sp>
+        <p:nvSpPr>
+          <p:cNvPr id="5" name="Text 3"/>
+          <p:cNvSpPr/>
+          <p:nvPr/>
+        </p:nvSpPr>
+        <p:spPr>
+          <a:xfrm>
+            <a:off x="640080" y="1645920"/>
+            <a:ext cx="7772400" cy="0"/>
+          </a:xfrm>
+          <a:prstGeom prst="rect">
+            <a:avLst/>
+          </a:prstGeom>
+          <a:noFill/>
+          <a:ln/>
+        </p:spPr>
+        <p:txBody>
+          <a:bodyPr wrap="square" rtlCol="0" anchor="ctr"/>
+          <a:lstStyle/>
+          <a:p>
+            <a:r>
+              <a:rPr lang="en-US" sz="1400" dirty="0">
+                <a:solidFill>
+                  <a:srgbClr val="374151"/>
+                </a:solidFill>
+              </a:rPr>
+              <a:t>기본 계좌가 있으면 자동 선택됨</a:t>
+            </a:r>
+            <a:endParaRPr lang="en-US" sz="1400" dirty="0"/>
+          </a:p>
+        </p:txBody>
+      </p:sp>
+      <p:sp>
+        <p:nvSpPr>
+          <p:cNvPr id="25" name="Slide Number Placeholder 0"/>
+          <p:cNvSpPr>
+            <a:spLocks noGrp="1"/>
+          </p:cNvSpPr>
+          <p:nvPr>
+            <p:ph type="sldNum" sz="quarter" idx="4294967295"/>
+          </p:nvPr>
+        </p:nvSpPr>
+        <p:spPr>
+          <a:xfrm>
+            <a:off x="8686800" y="4937760"/>
+            <a:ext cx="800000" cy="300000"/>
+          </a:xfrm>
+          <a:prstGeom prst="rect">
+            <a:avLst/>
+          </a:prstGeom>
+          <a:extLst>
+            <a:ext uri="{C572A759-6A51-4108-AA02-DFA0A04FC94B}">
+              <ma14:wrappingTextBoxFlag xmlns:ma14="http://schemas.microsoft.com/office/mac/drawingml/2011/main" val="0"/>
+            </a:ext>
+          </a:extLst>
+        </p:spPr>
+        <p:txBody>
+          <a:bodyPr/>
+          <a:lstStyle>
+            <a:lvl1pPr>
+              <a:defRPr sz="1000">
+                <a:solidFill>
+                  <a:srgbClr val="FFFFFF"/>
+                </a:solidFill>
+              </a:defRPr>
+            </a:lvl1pPr>
+          </a:lstStyle>
+          <a:p>
+            <a:pPr algn="l"/>
+            <a:fld id="{F7021451-1387-4CA6-816F-3879F97B5CBC}" type="slidenum">
+              <a:rPr b="0" lang="en-US"/>
+              <a:t>15</a:t>
+            </a:fld>
+            <a:endParaRPr lang="en-US"/>
+          </a:p>
+        </p:txBody>
+      </p:sp>
+    </p:spTree>
+  </p:cSld>
+  <p:clrMapOvr>
+    <a:masterClrMapping/>
+  </p:clrMapOvr>
+</p:sld>
+</file>
+
+<file path=ppt/slides/slide16.xml><?xml version="1.0" encoding="utf-8"?>
+<p:sld xmlns:a="http://schemas.openxmlformats.org/drawingml/2006/main" xmlns:r="http://schemas.openxmlformats.org/officeDocument/2006/relationships" xmlns:p="http://schemas.openxmlformats.org/presentationml/2006/main">
+  <p:cSld name="Slide 16">
+    <p:spTree>
+      <p:nvGrpSpPr>
+        <p:cNvPr id="1" name=""/>
+        <p:cNvGrpSpPr/>
+        <p:nvPr/>
+      </p:nvGrpSpPr>
+      <p:grpSpPr>
+        <a:xfrm>
+          <a:off x="0" y="0"/>
+          <a:ext cx="0" cy="0"/>
+          <a:chOff x="0" y="0"/>
+          <a:chExt cx="0" cy="0"/>
+        </a:xfrm>
+      </p:grpSpPr>
+      <p:sp>
+        <p:nvSpPr>
+          <p:cNvPr id="2" name="Text 0"/>
+          <p:cNvSpPr/>
+          <p:nvPr/>
+        </p:nvSpPr>
+        <p:spPr>
+          <a:xfrm>
+            <a:off x="457200" y="274320"/>
+            <a:ext cx="8229600" cy="0"/>
+          </a:xfrm>
+          <a:prstGeom prst="rect">
+            <a:avLst/>
+          </a:prstGeom>
+          <a:noFill/>
+          <a:ln/>
+        </p:spPr>
+        <p:txBody>
+          <a:bodyPr wrap="square" rtlCol="0" anchor="ctr"/>
+          <a:lstStyle/>
+          <a:p>
+            <a:pPr indent="0" marL="0">
+              <a:buNone/>
+            </a:pPr>
+            <a:r>
+              <a:rPr lang="en-US" sz="2800" b="1" dirty="0">
+                <a:solidFill>
+                  <a:srgbClr val="1E40AF"/>
+                </a:solidFill>
+              </a:rPr>
+              <a:t>5단계: 첨부파일 업로드</a:t>
+            </a:r>
+            <a:endParaRPr lang="en-US" sz="2800" dirty="0"/>
+          </a:p>
+        </p:txBody>
+      </p:sp>
+      <p:pic>
+        <p:nvPicPr>
+          <p:cNvPr id="3" name="Image 0" descr="/Users/wandosea/Documents/GitHub/expense-system/docs/user-guide/screenshots/file-upload.png">    </p:cNvPr>
+          <p:cNvPicPr>
+            <a:picLocks noChangeAspect="1"/>
+          </p:cNvPicPr>
+          <p:nvPr/>
+        </p:nvPicPr>
+        <p:blipFill>
+          <a:blip r:embed="rId1"/>
+          <a:srcRect l="0" r="0" t="0" b="0"/>
+          <a:stretch/>
+        </p:blipFill>
+        <p:spPr>
+          <a:xfrm>
+            <a:off x="457200" y="914400"/>
+            <a:ext cx="8229600" cy="3657600"/>
+          </a:xfrm>
+          <a:prstGeom prst="rect">
+            <a:avLst/>
+          </a:prstGeom>
+        </p:spPr>
+      </p:pic>
+      <p:sp>
+        <p:nvSpPr>
+          <p:cNvPr id="4" name="Text 1"/>
+          <p:cNvSpPr/>
+          <p:nvPr/>
+        </p:nvSpPr>
+        <p:spPr>
+          <a:xfrm>
+            <a:off x="457200" y="4754880"/>
+            <a:ext cx="8229600" cy="0"/>
+          </a:xfrm>
+          <a:prstGeom prst="rect">
+            <a:avLst/>
+          </a:prstGeom>
+          <a:noFill/>
+          <a:ln/>
+        </p:spPr>
+        <p:txBody>
+          <a:bodyPr wrap="square" rtlCol="0" anchor="ctr"/>
+          <a:lstStyle/>
+          <a:p>
+            <a:pPr indent="0" marL="0">
+              <a:buNone/>
+            </a:pPr>
+            <a:r>
+              <a:rPr lang="en-US" sz="1200" dirty="0">
+                <a:solidFill>
+                  <a:srgbClr val="6B7280"/>
+                </a:solidFill>
+              </a:rPr>
+              <a:t>드래그 앤 드롭 또는 클릭하여 선택</a:t>
+            </a:r>
+            <a:endParaRPr lang="en-US" sz="1200" dirty="0"/>
+          </a:p>
+        </p:txBody>
+      </p:sp>
+      <p:sp>
+        <p:nvSpPr>
+          <p:cNvPr id="25" name="Slide Number Placeholder 0"/>
+          <p:cNvSpPr>
+            <a:spLocks noGrp="1"/>
+          </p:cNvSpPr>
+          <p:nvPr>
+            <p:ph type="sldNum" sz="quarter" idx="4294967295"/>
+          </p:nvPr>
+        </p:nvSpPr>
+        <p:spPr>
+          <a:xfrm>
+            <a:off x="8686800" y="4937760"/>
+            <a:ext cx="800000" cy="300000"/>
+          </a:xfrm>
+          <a:prstGeom prst="rect">
+            <a:avLst/>
+          </a:prstGeom>
+          <a:extLst>
+            <a:ext uri="{C572A759-6A51-4108-AA02-DFA0A04FC94B}">
+              <ma14:wrappingTextBoxFlag xmlns:ma14="http://schemas.microsoft.com/office/mac/drawingml/2011/main" val="0"/>
+            </a:ext>
+          </a:extLst>
+        </p:spPr>
+        <p:txBody>
+          <a:bodyPr/>
+          <a:lstStyle>
+            <a:lvl1pPr>
+              <a:defRPr sz="1000">
+                <a:solidFill>
+                  <a:srgbClr val="FFFFFF"/>
+                </a:solidFill>
+              </a:defRPr>
+            </a:lvl1pPr>
+          </a:lstStyle>
+          <a:p>
+            <a:pPr algn="l"/>
+            <a:fld id="{F7021451-1387-4CA6-816F-3879F97B5CBC}" type="slidenum">
+              <a:rPr b="0" lang="en-US"/>
+              <a:t>16</a:t>
+            </a:fld>
+            <a:endParaRPr lang="en-US"/>
+          </a:p>
+        </p:txBody>
+      </p:sp>
+    </p:spTree>
+  </p:cSld>
+  <p:clrMapOvr>
+    <a:masterClrMapping/>
+  </p:clrMapOvr>
+</p:sld>
+</file>
+
+<file path=ppt/slides/slide17.xml><?xml version="1.0" encoding="utf-8"?>
+<p:sld xmlns:a="http://schemas.openxmlformats.org/drawingml/2006/main" xmlns:r="http://schemas.openxmlformats.org/officeDocument/2006/relationships" xmlns:p="http://schemas.openxmlformats.org/presentationml/2006/main">
+  <p:cSld name="Slide 17">
+    <p:spTree>
+      <p:nvGrpSpPr>
+        <p:cNvPr id="1" name=""/>
+        <p:cNvGrpSpPr/>
+        <p:nvPr/>
+      </p:nvGrpSpPr>
+      <p:grpSpPr>
+        <a:xfrm>
+          <a:off x="0" y="0"/>
+          <a:ext cx="0" cy="0"/>
+          <a:chOff x="0" y="0"/>
+          <a:chExt cx="0" cy="0"/>
+        </a:xfrm>
+      </p:grpSpPr>
+      <p:sp>
+        <p:nvSpPr>
+          <p:cNvPr id="2" name="Text 0"/>
+          <p:cNvSpPr/>
+          <p:nvPr/>
+        </p:nvSpPr>
+        <p:spPr>
+          <a:xfrm>
+            <a:off x="457200" y="274320"/>
+            <a:ext cx="8229600" cy="0"/>
+          </a:xfrm>
+          <a:prstGeom prst="rect">
+            <a:avLst/>
+          </a:prstGeom>
+          <a:noFill/>
+          <a:ln/>
+        </p:spPr>
+        <p:txBody>
+          <a:bodyPr wrap="square" rtlCol="0" anchor="ctr"/>
+          <a:lstStyle/>
+          <a:p>
+            <a:pPr indent="0" marL="0">
+              <a:buNone/>
+            </a:pPr>
+            <a:r>
+              <a:rPr lang="en-US" sz="2800" b="1" dirty="0">
+                <a:solidFill>
+                  <a:srgbClr val="1E40AF"/>
+                </a:solidFill>
+              </a:rPr>
+              <a:t>첨부파일 업로드 방법</a:t>
+            </a:r>
+            <a:endParaRPr lang="en-US" sz="2800" dirty="0"/>
+          </a:p>
+        </p:txBody>
+      </p:sp>
+      <p:sp>
+        <p:nvSpPr>
+          <p:cNvPr id="3" name="Text 1"/>
+          <p:cNvSpPr/>
+          <p:nvPr/>
+        </p:nvSpPr>
+        <p:spPr>
+          <a:xfrm>
+            <a:off x="640080" y="914400"/>
+            <a:ext cx="7772400" cy="0"/>
+          </a:xfrm>
+          <a:prstGeom prst="rect">
+            <a:avLst/>
+          </a:prstGeom>
+          <a:noFill/>
+          <a:ln/>
+        </p:spPr>
+        <p:txBody>
+          <a:bodyPr wrap="square" rtlCol="0" anchor="ctr"/>
+          <a:lstStyle/>
+          <a:p>
+            <a:r>
+              <a:rPr lang="en-US" sz="1400" dirty="0">
+                <a:solidFill>
+                  <a:srgbClr val="374151"/>
+                </a:solidFill>
+              </a:rPr>
+              <a:t>드래그 앤 드롭: 파일 끌어다 놓기</a:t>
+            </a:r>
+            <a:endParaRPr lang="en-US" sz="1400" dirty="0"/>
+          </a:p>
+        </p:txBody>
+      </p:sp>
+      <p:sp>
+        <p:nvSpPr>
+          <p:cNvPr id="4" name="Text 2"/>
+          <p:cNvSpPr/>
+          <p:nvPr/>
+        </p:nvSpPr>
+        <p:spPr>
+          <a:xfrm>
+            <a:off x="640080" y="1280160"/>
+            <a:ext cx="7772400" cy="0"/>
+          </a:xfrm>
+          <a:prstGeom prst="rect">
+            <a:avLst/>
+          </a:prstGeom>
+          <a:noFill/>
+          <a:ln/>
+        </p:spPr>
+        <p:txBody>
+          <a:bodyPr wrap="square" rtlCol="0" anchor="ctr"/>
+          <a:lstStyle/>
+          <a:p>
+            <a:r>
+              <a:rPr lang="en-US" sz="1400" dirty="0">
+                <a:solidFill>
+                  <a:srgbClr val="374151"/>
+                </a:solidFill>
+              </a:rPr>
+              <a:t>클릭하여 선택: 업로드 영역 클릭</a:t>
+            </a:r>
+            <a:endParaRPr lang="en-US" sz="1400" dirty="0"/>
+          </a:p>
+        </p:txBody>
+      </p:sp>
+      <p:sp>
+        <p:nvSpPr>
+          <p:cNvPr id="5" name="Text 3"/>
+          <p:cNvSpPr/>
+          <p:nvPr/>
+        </p:nvSpPr>
+        <p:spPr>
+          <a:xfrm>
+            <a:off x="640080" y="1645920"/>
+            <a:ext cx="7772400" cy="0"/>
+          </a:xfrm>
+          <a:prstGeom prst="rect">
+            <a:avLst/>
+          </a:prstGeom>
+          <a:noFill/>
+          <a:ln/>
+        </p:spPr>
+        <p:txBody>
+          <a:bodyPr wrap="square" rtlCol="0" anchor="ctr"/>
+          <a:lstStyle/>
+          <a:p>
+            <a:r>
+              <a:rPr lang="en-US" sz="1400" dirty="0">
+                <a:solidFill>
+                  <a:srgbClr val="374151"/>
+                </a:solidFill>
+              </a:rPr>
+              <a:t>카메라 촬영 (모바일): 영수증 바로 촬영</a:t>
+            </a:r>
+            <a:endParaRPr lang="en-US" sz="1400" dirty="0"/>
+          </a:p>
+        </p:txBody>
+      </p:sp>
+      <p:sp>
+        <p:nvSpPr>
+          <p:cNvPr id="6" name="Text 4"/>
+          <p:cNvSpPr/>
+          <p:nvPr/>
+        </p:nvSpPr>
+        <p:spPr>
+          <a:xfrm>
+            <a:off x="640080" y="2011680"/>
+            <a:ext cx="7772400" cy="0"/>
+          </a:xfrm>
+          <a:prstGeom prst="rect">
+            <a:avLst/>
+          </a:prstGeom>
+          <a:noFill/>
+          <a:ln/>
+        </p:spPr>
+        <p:txBody>
+          <a:bodyPr wrap="square" rtlCol="0" anchor="ctr"/>
+          <a:lstStyle/>
+          <a:p>
+            <a:r>
+              <a:rPr lang="en-US" sz="1400" dirty="0">
+                <a:solidFill>
+                  <a:srgbClr val="374151"/>
+                </a:solidFill>
+              </a:rPr>
+              <a:t>제한: 이미지/PDF, 각 5MB 이하, 최대 10개</a:t>
+            </a:r>
+            <a:endParaRPr lang="en-US" sz="1400" dirty="0"/>
+          </a:p>
+        </p:txBody>
+      </p:sp>
+      <p:sp>
+        <p:nvSpPr>
+          <p:cNvPr id="25" name="Slide Number Placeholder 0"/>
+          <p:cNvSpPr>
+            <a:spLocks noGrp="1"/>
+          </p:cNvSpPr>
+          <p:nvPr>
+            <p:ph type="sldNum" sz="quarter" idx="4294967295"/>
+          </p:nvPr>
+        </p:nvSpPr>
+        <p:spPr>
+          <a:xfrm>
+            <a:off x="8686800" y="4937760"/>
+            <a:ext cx="800000" cy="300000"/>
+          </a:xfrm>
+          <a:prstGeom prst="rect">
+            <a:avLst/>
+          </a:prstGeom>
+          <a:extLst>
+            <a:ext uri="{C572A759-6A51-4108-AA02-DFA0A04FC94B}">
+              <ma14:wrappingTextBoxFlag xmlns:ma14="http://schemas.microsoft.com/office/mac/drawingml/2011/main" val="0"/>
+            </a:ext>
+          </a:extLst>
+        </p:spPr>
+        <p:txBody>
+          <a:bodyPr/>
+          <a:lstStyle>
+            <a:lvl1pPr>
+              <a:defRPr sz="1000">
+                <a:solidFill>
+                  <a:srgbClr val="FFFFFF"/>
+                </a:solidFill>
+              </a:defRPr>
+            </a:lvl1pPr>
+          </a:lstStyle>
+          <a:p>
+            <a:pPr algn="l"/>
+            <a:fld id="{F7021451-1387-4CA6-816F-3879F97B5CBC}" type="slidenum">
+              <a:rPr b="0" lang="en-US"/>
+              <a:t>17</a:t>
+            </a:fld>
+            <a:endParaRPr lang="en-US"/>
+          </a:p>
+        </p:txBody>
+      </p:sp>
+    </p:spTree>
+  </p:cSld>
+  <p:clrMapOvr>
+    <a:masterClrMapping/>
+  </p:clrMapOvr>
+</p:sld>
+</file>
+
+<file path=ppt/slides/slide18.xml><?xml version="1.0" encoding="utf-8"?>
+<p:sld xmlns:a="http://schemas.openxmlformats.org/drawingml/2006/main" xmlns:r="http://schemas.openxmlformats.org/officeDocument/2006/relationships" xmlns:p="http://schemas.openxmlformats.org/presentationml/2006/main">
+  <p:cSld name="Slide 18">
+    <p:spTree>
+      <p:nvGrpSpPr>
+        <p:cNvPr id="1" name=""/>
+        <p:cNvGrpSpPr/>
+        <p:nvPr/>
+      </p:nvGrpSpPr>
+      <p:grpSpPr>
+        <a:xfrm>
+          <a:off x="0" y="0"/>
+          <a:ext cx="0" cy="0"/>
+          <a:chOff x="0" y="0"/>
+          <a:chExt cx="0" cy="0"/>
+        </a:xfrm>
+      </p:grpSpPr>
+      <p:sp>
+        <p:nvSpPr>
+          <p:cNvPr id="2" name="Text 0"/>
+          <p:cNvSpPr/>
+          <p:nvPr/>
+        </p:nvSpPr>
+        <p:spPr>
+          <a:xfrm>
+            <a:off x="457200" y="274320"/>
+            <a:ext cx="8229600" cy="0"/>
+          </a:xfrm>
+          <a:prstGeom prst="rect">
+            <a:avLst/>
+          </a:prstGeom>
+          <a:noFill/>
+          <a:ln/>
+        </p:spPr>
+        <p:txBody>
+          <a:bodyPr wrap="square" rtlCol="0" anchor="ctr"/>
+          <a:lstStyle/>
+          <a:p>
+            <a:pPr indent="0" marL="0">
+              <a:buNone/>
+            </a:pPr>
+            <a:r>
+              <a:rPr lang="en-US" sz="2800" b="1" dirty="0">
+                <a:solidFill>
+                  <a:srgbClr val="1E40AF"/>
+                </a:solidFill>
+              </a:rPr>
+              <a:t>6단계: 결재선 미리보기</a:t>
+            </a:r>
+            <a:endParaRPr lang="en-US" sz="2800" dirty="0"/>
+          </a:p>
+        </p:txBody>
+      </p:sp>
+      <p:sp>
+        <p:nvSpPr>
+          <p:cNvPr id="3" name="Text 1"/>
+          <p:cNvSpPr/>
+          <p:nvPr/>
+        </p:nvSpPr>
+        <p:spPr>
+          <a:xfrm>
+            <a:off x="457200" y="822960"/>
+            <a:ext cx="8229600" cy="0"/>
+          </a:xfrm>
+          <a:prstGeom prst="rect">
+            <a:avLst/>
+          </a:prstGeom>
+          <a:noFill/>
+          <a:ln/>
+        </p:spPr>
+        <p:txBody>
+          <a:bodyPr wrap="square" rtlCol="0" anchor="ctr"/>
+          <a:lstStyle/>
+          <a:p>
+            <a:pPr indent="0" marL="0">
+              <a:buNone/>
+            </a:pPr>
+            <a:r>
+              <a:rPr lang="en-US" sz="1400" dirty="0">
+                <a:solidFill>
+                  <a:srgbClr val="6B7280"/>
+                </a:solidFill>
+              </a:rPr>
+              <a:t>예산 현황: 배정 예산 / 사용 금액 / 잔여 예산 표시</a:t>
+            </a:r>
+            <a:endParaRPr lang="en-US" sz="1400" dirty="0"/>
+          </a:p>
+        </p:txBody>
+      </p:sp>
+      <p:sp>
+        <p:nvSpPr>
+          <p:cNvPr id="4" name="Text 2"/>
+          <p:cNvSpPr/>
+          <p:nvPr/>
+        </p:nvSpPr>
+        <p:spPr>
+          <a:xfrm>
+            <a:off x="457200" y="1280160"/>
+            <a:ext cx="8229600" cy="2743200"/>
+          </a:xfrm>
+          <a:prstGeom prst="rect">
+            <a:avLst/>
+          </a:prstGeom>
+          <a:solidFill>
+            <a:srgbClr val="F3F4F6"/>
+          </a:solidFill>
+          <a:ln/>
+        </p:spPr>
+        <p:txBody>
+          <a:bodyPr wrap="square" rtlCol="0" anchor="t"/>
+          <a:lstStyle/>
+          <a:p>
+            <a:pPr indent="0" marL="0">
+              <a:buNone/>
+            </a:pPr>
+            <a:r>
+              <a:rPr lang="en-US" sz="1200" dirty="0">
+                <a:solidFill>
+                  <a:srgbClr val="1F2937"/>
+                </a:solidFill>
+                <a:latin typeface="Courier New" pitchFamily="34" charset="0"/>
+                <a:ea typeface="Courier New" pitchFamily="34" charset="-122"/>
+                <a:cs typeface="Courier New" pitchFamily="34" charset="-120"/>
+              </a:rPr>
+              <a:t>1차 결재: 세목 담당자 (팀장)</a:t>
+            </a:r>
+            <a:endParaRPr lang="en-US" sz="1200" dirty="0"/>
+          </a:p>
+          <a:p>
+            <a:pPr indent="0" marL="0">
+              <a:buNone/>
+            </a:pPr>
+            <a:r>
+              <a:rPr lang="en-US" sz="1200" dirty="0">
+                <a:solidFill>
+                  <a:srgbClr val="1F2937"/>
+                </a:solidFill>
+                <a:latin typeface="Courier New" pitchFamily="34" charset="0"/>
+                <a:ea typeface="Courier New" pitchFamily="34" charset="-122"/>
+                <a:cs typeface="Courier New" pitchFamily="34" charset="-120"/>
+              </a:rPr>
+              <a:t>    ↓</a:t>
+            </a:r>
+            <a:endParaRPr lang="en-US" sz="1200" dirty="0"/>
+          </a:p>
+          <a:p>
+            <a:pPr indent="0" marL="0">
+              <a:buNone/>
+            </a:pPr>
+            <a:r>
+              <a:rPr lang="en-US" sz="1200" dirty="0">
+                <a:solidFill>
+                  <a:srgbClr val="1F2937"/>
+                </a:solidFill>
+                <a:latin typeface="Courier New" pitchFamily="34" charset="0"/>
+                <a:ea typeface="Courier New" pitchFamily="34" charset="-122"/>
+                <a:cs typeface="Courier New" pitchFamily="34" charset="-120"/>
+              </a:rPr>
+              <a:t>2차 결재: 회계</a:t>
+            </a:r>
+            <a:endParaRPr lang="en-US" sz="1200" dirty="0"/>
+          </a:p>
+          <a:p>
+            <a:pPr indent="0" marL="0">
+              <a:buNone/>
+            </a:pPr>
+            <a:r>
+              <a:rPr lang="en-US" sz="1200" dirty="0">
+                <a:solidFill>
+                  <a:srgbClr val="1F2937"/>
+                </a:solidFill>
+                <a:latin typeface="Courier New" pitchFamily="34" charset="0"/>
+                <a:ea typeface="Courier New" pitchFamily="34" charset="-122"/>
+                <a:cs typeface="Courier New" pitchFamily="34" charset="-120"/>
+              </a:rPr>
+              <a:t>    ↓</a:t>
+            </a:r>
+            <a:endParaRPr lang="en-US" sz="1200" dirty="0"/>
+          </a:p>
+          <a:p>
+            <a:pPr indent="0" marL="0">
+              <a:buNone/>
+            </a:pPr>
+            <a:r>
+              <a:rPr lang="en-US" sz="1200" dirty="0">
+                <a:solidFill>
+                  <a:srgbClr val="1F2937"/>
+                </a:solidFill>
+                <a:latin typeface="Courier New" pitchFamily="34" charset="0"/>
+                <a:ea typeface="Courier New" pitchFamily="34" charset="-122"/>
+                <a:cs typeface="Courier New" pitchFamily="34" charset="-120"/>
+              </a:rPr>
+              <a:t>3차 결재: 재정팀장</a:t>
+            </a:r>
+            <a:endParaRPr lang="en-US" sz="1200" dirty="0"/>
+          </a:p>
+        </p:txBody>
+      </p:sp>
+      <p:sp>
+        <p:nvSpPr>
+          <p:cNvPr id="25" name="Slide Number Placeholder 0"/>
+          <p:cNvSpPr>
+            <a:spLocks noGrp="1"/>
+          </p:cNvSpPr>
+          <p:nvPr>
+            <p:ph type="sldNum" sz="quarter" idx="4294967295"/>
+          </p:nvPr>
+        </p:nvSpPr>
+        <p:spPr>
+          <a:xfrm>
+            <a:off x="8686800" y="4937760"/>
+            <a:ext cx="800000" cy="300000"/>
+          </a:xfrm>
+          <a:prstGeom prst="rect">
+            <a:avLst/>
+          </a:prstGeom>
+          <a:extLst>
+            <a:ext uri="{C572A759-6A51-4108-AA02-DFA0A04FC94B}">
+              <ma14:wrappingTextBoxFlag xmlns:ma14="http://schemas.microsoft.com/office/mac/drawingml/2011/main" val="0"/>
+            </a:ext>
+          </a:extLst>
+        </p:spPr>
+        <p:txBody>
+          <a:bodyPr/>
+          <a:lstStyle>
+            <a:lvl1pPr>
+              <a:defRPr sz="1000">
+                <a:solidFill>
+                  <a:srgbClr val="FFFFFF"/>
+                </a:solidFill>
+              </a:defRPr>
+            </a:lvl1pPr>
+          </a:lstStyle>
+          <a:p>
+            <a:pPr algn="l"/>
+            <a:fld id="{F7021451-1387-4CA6-816F-3879F97B5CBC}" type="slidenum">
+              <a:rPr b="0" lang="en-US"/>
+              <a:t>18</a:t>
+            </a:fld>
+            <a:endParaRPr lang="en-US"/>
+          </a:p>
+        </p:txBody>
+      </p:sp>
+    </p:spTree>
+  </p:cSld>
+  <p:clrMapOvr>
+    <a:masterClrMapping/>
+  </p:clrMapOvr>
+</p:sld>
+</file>
+
+<file path=ppt/slides/slide19.xml><?xml version="1.0" encoding="utf-8"?>
+<p:sld xmlns:a="http://schemas.openxmlformats.org/drawingml/2006/main" xmlns:r="http://schemas.openxmlformats.org/officeDocument/2006/relationships" xmlns:p="http://schemas.openxmlformats.org/presentationml/2006/main">
+  <p:cSld name="Slide 19">
+    <p:spTree>
+      <p:nvGrpSpPr>
+        <p:cNvPr id="1" name=""/>
+        <p:cNvGrpSpPr/>
+        <p:nvPr/>
+      </p:nvGrpSpPr>
+      <p:grpSpPr>
+        <a:xfrm>
+          <a:off x="0" y="0"/>
+          <a:ext cx="0" cy="0"/>
+          <a:chOff x="0" y="0"/>
+          <a:chExt cx="0" cy="0"/>
+        </a:xfrm>
+      </p:grpSpPr>
+      <p:sp>
+        <p:nvSpPr>
+          <p:cNvPr id="2" name="Text 0"/>
+          <p:cNvSpPr/>
+          <p:nvPr/>
+        </p:nvSpPr>
+        <p:spPr>
+          <a:xfrm>
+            <a:off x="457200" y="274320"/>
+            <a:ext cx="8229600" cy="0"/>
+          </a:xfrm>
+          <a:prstGeom prst="rect">
+            <a:avLst/>
+          </a:prstGeom>
+          <a:noFill/>
+          <a:ln/>
+        </p:spPr>
+        <p:txBody>
+          <a:bodyPr wrap="square" rtlCol="0" anchor="ctr"/>
+          <a:lstStyle/>
+          <a:p>
+            <a:pPr indent="0" marL="0">
+              <a:buNone/>
+            </a:pPr>
+            <a:r>
+              <a:rPr lang="en-US" sz="2800" b="1" dirty="0">
+                <a:solidFill>
+                  <a:srgbClr val="1E40AF"/>
+                </a:solidFill>
+              </a:rPr>
               <a:t>저장과 제출</a:t>
             </a:r>
             <a:endParaRPr lang="en-US" sz="2800" dirty="0"/>
@@ -3409,7 +7224,7 @@
       </p:sp>
       <p:graphicFrame>
         <p:nvGraphicFramePr>
-          <p:cNvPr id="14" name="Table 0"/>
+          <p:cNvPr id="20" name="Table 0"/>
           <p:cNvGraphicFramePr>
             <a:graphicFrameLocks noGrp="1"/>
           </p:cNvGraphicFramePr>
@@ -4274,7 +8089,7 @@
             <a:pPr algn="l"/>
             <a:fld id="{F7021451-1387-4CA6-816F-3879F97B5CBC}" type="slidenum">
               <a:rPr b="0" lang="en-US"/>
-              <a:t>13</a:t>
+              <a:t>19</a:t>
             </a:fld>
             <a:endParaRPr lang="en-US"/>
           </a:p>
@@ -4288,9 +8103,9 @@
 </p:sld>
 </file>
 
-<file path=ppt/slides/slide14.xml><?xml version="1.0" encoding="utf-8"?>
+<file path=ppt/slides/slide2.xml><?xml version="1.0" encoding="utf-8"?>
 <p:sld xmlns:a="http://schemas.openxmlformats.org/drawingml/2006/main" xmlns:r="http://schemas.openxmlformats.org/officeDocument/2006/relationships" xmlns:p="http://schemas.openxmlformats.org/presentationml/2006/main">
-  <p:cSld name="Slide 14">
+  <p:cSld name="Slide 2">
     <p:spTree>
       <p:nvGrpSpPr>
         <p:cNvPr id="1" name=""/>
@@ -4335,7 +8150,7 @@
                   <a:srgbClr val="1E40AF"/>
                 </a:solidFill>
               </a:rPr>
-              <a:t>저장 vs 제출 차이점</a:t>
+              <a:t>목차</a:t>
             </a:r>
             <a:endParaRPr lang="en-US" sz="2800" dirty="0"/>
           </a:p>
@@ -4349,8 +8164,8 @@
         </p:nvSpPr>
         <p:spPr>
           <a:xfrm>
-            <a:off x="640080" y="914400"/>
-            <a:ext cx="7772400" cy="0"/>
+            <a:off x="914400" y="1097280"/>
+            <a:ext cx="7315200" cy="0"/>
           </a:xfrm>
           <a:prstGeom prst="rect">
             <a:avLst/>
@@ -4362,15 +8177,18 @@
           <a:bodyPr wrap="square" rtlCol="0" anchor="ctr"/>
           <a:lstStyle/>
           <a:p>
+            <a:pPr indent="0" marL="0">
+              <a:buNone/>
+            </a:pPr>
             <a:r>
-              <a:rPr lang="en-US" sz="1400" dirty="0">
+              <a:rPr lang="en-US" sz="1600" dirty="0">
                 <a:solidFill>
                   <a:srgbClr val="374151"/>
                 </a:solidFill>
               </a:rPr>
-              <a:t>저장: 나중에 계속 작성 가능, 수정 가능</a:t>
+              <a:t>1. 작성 Flow 개요</a:t>
             </a:r>
-            <a:endParaRPr lang="en-US" sz="1400" dirty="0"/>
+            <a:endParaRPr lang="en-US" sz="1600" dirty="0"/>
           </a:p>
         </p:txBody>
       </p:sp>
@@ -4382,8 +8200,8 @@
         </p:nvSpPr>
         <p:spPr>
           <a:xfrm>
-            <a:off x="640080" y="1280160"/>
-            <a:ext cx="7772400" cy="0"/>
+            <a:off x="914400" y="1508760"/>
+            <a:ext cx="7315200" cy="0"/>
           </a:xfrm>
           <a:prstGeom prst="rect">
             <a:avLst/>
@@ -4395,15 +8213,306 @@
           <a:bodyPr wrap="square" rtlCol="0" anchor="ctr"/>
           <a:lstStyle/>
           <a:p>
+            <a:pPr indent="0" marL="0">
+              <a:buNone/>
+            </a:pPr>
             <a:r>
-              <a:rPr lang="en-US" sz="1400" dirty="0">
+              <a:rPr lang="en-US" sz="1600" dirty="0">
                 <a:solidFill>
                   <a:srgbClr val="374151"/>
                 </a:solidFill>
               </a:rPr>
-              <a:t>제출: 결재자에게 전달, 수정 불가 (회수 후 수정 가능)</a:t>
+              <a:t>2. 예산 정보 입력</a:t>
             </a:r>
-            <a:endParaRPr lang="en-US" sz="1400" dirty="0"/>
+            <a:endParaRPr lang="en-US" sz="1600" dirty="0"/>
+          </a:p>
+        </p:txBody>
+      </p:sp>
+      <p:sp>
+        <p:nvSpPr>
+          <p:cNvPr id="5" name="Text 3"/>
+          <p:cNvSpPr/>
+          <p:nvPr/>
+        </p:nvSpPr>
+        <p:spPr>
+          <a:xfrm>
+            <a:off x="914400" y="1920240"/>
+            <a:ext cx="7315200" cy="0"/>
+          </a:xfrm>
+          <a:prstGeom prst="rect">
+            <a:avLst/>
+          </a:prstGeom>
+          <a:noFill/>
+          <a:ln/>
+        </p:spPr>
+        <p:txBody>
+          <a:bodyPr wrap="square" rtlCol="0" anchor="ctr"/>
+          <a:lstStyle/>
+          <a:p>
+            <a:pPr indent="0" marL="0">
+              <a:buNone/>
+            </a:pPr>
+            <a:r>
+              <a:rPr lang="en-US" sz="1600" dirty="0">
+                <a:solidFill>
+                  <a:srgbClr val="374151"/>
+                </a:solidFill>
+              </a:rPr>
+              <a:t>3. 세부 항목 입력</a:t>
+            </a:r>
+            <a:endParaRPr lang="en-US" sz="1600" dirty="0"/>
+          </a:p>
+        </p:txBody>
+      </p:sp>
+      <p:sp>
+        <p:nvSpPr>
+          <p:cNvPr id="6" name="Text 4"/>
+          <p:cNvSpPr/>
+          <p:nvPr/>
+        </p:nvSpPr>
+        <p:spPr>
+          <a:xfrm>
+            <a:off x="914400" y="2331720"/>
+            <a:ext cx="7315200" cy="0"/>
+          </a:xfrm>
+          <a:prstGeom prst="rect">
+            <a:avLst/>
+          </a:prstGeom>
+          <a:noFill/>
+          <a:ln/>
+        </p:spPr>
+        <p:txBody>
+          <a:bodyPr wrap="square" rtlCol="0" anchor="ctr"/>
+          <a:lstStyle/>
+          <a:p>
+            <a:pPr indent="0" marL="0">
+              <a:buNone/>
+            </a:pPr>
+            <a:r>
+              <a:rPr lang="en-US" sz="1600" dirty="0">
+                <a:solidFill>
+                  <a:srgbClr val="374151"/>
+                </a:solidFill>
+              </a:rPr>
+              <a:t>4. 신청 정보 입력</a:t>
+            </a:r>
+            <a:endParaRPr lang="en-US" sz="1600" dirty="0"/>
+          </a:p>
+        </p:txBody>
+      </p:sp>
+      <p:sp>
+        <p:nvSpPr>
+          <p:cNvPr id="7" name="Text 5"/>
+          <p:cNvSpPr/>
+          <p:nvPr/>
+        </p:nvSpPr>
+        <p:spPr>
+          <a:xfrm>
+            <a:off x="914400" y="2743200"/>
+            <a:ext cx="7315200" cy="0"/>
+          </a:xfrm>
+          <a:prstGeom prst="rect">
+            <a:avLst/>
+          </a:prstGeom>
+          <a:noFill/>
+          <a:ln/>
+        </p:spPr>
+        <p:txBody>
+          <a:bodyPr wrap="square" rtlCol="0" anchor="ctr"/>
+          <a:lstStyle/>
+          <a:p>
+            <a:pPr indent="0" marL="0">
+              <a:buNone/>
+            </a:pPr>
+            <a:r>
+              <a:rPr lang="en-US" sz="1600" dirty="0">
+                <a:solidFill>
+                  <a:srgbClr val="374151"/>
+                </a:solidFill>
+              </a:rPr>
+              <a:t>5. 은행 정보 입력</a:t>
+            </a:r>
+            <a:endParaRPr lang="en-US" sz="1600" dirty="0"/>
+          </a:p>
+        </p:txBody>
+      </p:sp>
+      <p:sp>
+        <p:nvSpPr>
+          <p:cNvPr id="8" name="Text 6"/>
+          <p:cNvSpPr/>
+          <p:nvPr/>
+        </p:nvSpPr>
+        <p:spPr>
+          <a:xfrm>
+            <a:off x="914400" y="3154680"/>
+            <a:ext cx="7315200" cy="0"/>
+          </a:xfrm>
+          <a:prstGeom prst="rect">
+            <a:avLst/>
+          </a:prstGeom>
+          <a:noFill/>
+          <a:ln/>
+        </p:spPr>
+        <p:txBody>
+          <a:bodyPr wrap="square" rtlCol="0" anchor="ctr"/>
+          <a:lstStyle/>
+          <a:p>
+            <a:pPr indent="0" marL="0">
+              <a:buNone/>
+            </a:pPr>
+            <a:r>
+              <a:rPr lang="en-US" sz="1600" dirty="0">
+                <a:solidFill>
+                  <a:srgbClr val="374151"/>
+                </a:solidFill>
+              </a:rPr>
+              <a:t>6. 첨부파일 업로드</a:t>
+            </a:r>
+            <a:endParaRPr lang="en-US" sz="1600" dirty="0"/>
+          </a:p>
+        </p:txBody>
+      </p:sp>
+      <p:sp>
+        <p:nvSpPr>
+          <p:cNvPr id="9" name="Text 7"/>
+          <p:cNvSpPr/>
+          <p:nvPr/>
+        </p:nvSpPr>
+        <p:spPr>
+          <a:xfrm>
+            <a:off x="914400" y="3566160"/>
+            <a:ext cx="7315200" cy="0"/>
+          </a:xfrm>
+          <a:prstGeom prst="rect">
+            <a:avLst/>
+          </a:prstGeom>
+          <a:noFill/>
+          <a:ln/>
+        </p:spPr>
+        <p:txBody>
+          <a:bodyPr wrap="square" rtlCol="0" anchor="ctr"/>
+          <a:lstStyle/>
+          <a:p>
+            <a:pPr indent="0" marL="0">
+              <a:buNone/>
+            </a:pPr>
+            <a:r>
+              <a:rPr lang="en-US" sz="1600" dirty="0">
+                <a:solidFill>
+                  <a:srgbClr val="374151"/>
+                </a:solidFill>
+              </a:rPr>
+              <a:t>7. 결재선 미리보기</a:t>
+            </a:r>
+            <a:endParaRPr lang="en-US" sz="1600" dirty="0"/>
+          </a:p>
+        </p:txBody>
+      </p:sp>
+      <p:sp>
+        <p:nvSpPr>
+          <p:cNvPr id="10" name="Text 8"/>
+          <p:cNvSpPr/>
+          <p:nvPr/>
+        </p:nvSpPr>
+        <p:spPr>
+          <a:xfrm>
+            <a:off x="914400" y="3977640"/>
+            <a:ext cx="7315200" cy="0"/>
+          </a:xfrm>
+          <a:prstGeom prst="rect">
+            <a:avLst/>
+          </a:prstGeom>
+          <a:noFill/>
+          <a:ln/>
+        </p:spPr>
+        <p:txBody>
+          <a:bodyPr wrap="square" rtlCol="0" anchor="ctr"/>
+          <a:lstStyle/>
+          <a:p>
+            <a:pPr indent="0" marL="0">
+              <a:buNone/>
+            </a:pPr>
+            <a:r>
+              <a:rPr lang="en-US" sz="1600" dirty="0">
+                <a:solidFill>
+                  <a:srgbClr val="374151"/>
+                </a:solidFill>
+              </a:rPr>
+              <a:t>8. 저장과 제출</a:t>
+            </a:r>
+            <a:endParaRPr lang="en-US" sz="1600" dirty="0"/>
+          </a:p>
+        </p:txBody>
+      </p:sp>
+      <p:sp>
+        <p:nvSpPr>
+          <p:cNvPr id="11" name="Text 9"/>
+          <p:cNvSpPr/>
+          <p:nvPr/>
+        </p:nvSpPr>
+        <p:spPr>
+          <a:xfrm>
+            <a:off x="914400" y="4389120"/>
+            <a:ext cx="7315200" cy="0"/>
+          </a:xfrm>
+          <a:prstGeom prst="rect">
+            <a:avLst/>
+          </a:prstGeom>
+          <a:noFill/>
+          <a:ln/>
+        </p:spPr>
+        <p:txBody>
+          <a:bodyPr wrap="square" rtlCol="0" anchor="ctr"/>
+          <a:lstStyle/>
+          <a:p>
+            <a:pPr indent="0" marL="0">
+              <a:buNone/>
+            </a:pPr>
+            <a:r>
+              <a:rPr lang="en-US" sz="1600" dirty="0">
+                <a:solidFill>
+                  <a:srgbClr val="374151"/>
+                </a:solidFill>
+              </a:rPr>
+              <a:t>9. 서명/도장 선택</a:t>
+            </a:r>
+            <a:endParaRPr lang="en-US" sz="1600" dirty="0"/>
+          </a:p>
+        </p:txBody>
+      </p:sp>
+      <p:sp>
+        <p:nvSpPr>
+          <p:cNvPr id="12" name="Text 10"/>
+          <p:cNvSpPr/>
+          <p:nvPr/>
+        </p:nvSpPr>
+        <p:spPr>
+          <a:xfrm>
+            <a:off x="914400" y="4800600"/>
+            <a:ext cx="7315200" cy="0"/>
+          </a:xfrm>
+          <a:prstGeom prst="rect">
+            <a:avLst/>
+          </a:prstGeom>
+          <a:noFill/>
+          <a:ln/>
+        </p:spPr>
+        <p:txBody>
+          <a:bodyPr wrap="square" rtlCol="0" anchor="ctr"/>
+          <a:lstStyle/>
+          <a:p>
+            <a:pPr indent="0" marL="0">
+              <a:buNone/>
+            </a:pPr>
+            <a:r>
+              <a:rPr lang="en-US" sz="1600" dirty="0">
+                <a:solidFill>
+                  <a:srgbClr val="374151"/>
+                </a:solidFill>
+              </a:rPr>
+              <a:t>10. 지출결의서 수정</a:t>
+            </a:r>
+            <a:endParaRPr lang="en-US" sz="1600" dirty="0"/>
           </a:p>
         </p:txBody>
       </p:sp>
@@ -4446,7 +8555,7 @@
             <a:pPr algn="l"/>
             <a:fld id="{F7021451-1387-4CA6-816F-3879F97B5CBC}" type="slidenum">
               <a:rPr b="0" lang="en-US"/>
-              <a:t>14</a:t>
+              <a:t>2</a:t>
             </a:fld>
             <a:endParaRPr lang="en-US"/>
           </a:p>
@@ -4460,9 +8569,9 @@
 </p:sld>
 </file>
 
-<file path=ppt/slides/slide15.xml><?xml version="1.0" encoding="utf-8"?>
+<file path=ppt/slides/slide20.xml><?xml version="1.0" encoding="utf-8"?>
 <p:sld xmlns:a="http://schemas.openxmlformats.org/drawingml/2006/main" xmlns:r="http://schemas.openxmlformats.org/officeDocument/2006/relationships" xmlns:p="http://schemas.openxmlformats.org/presentationml/2006/main">
-  <p:cSld name="Slide 15">
+  <p:cSld name="Slide 20">
     <p:spTree>
       <p:nvGrpSpPr>
         <p:cNvPr id="1" name=""/>
@@ -4507,7 +8616,7 @@
                   <a:srgbClr val="1E40AF"/>
                 </a:solidFill>
               </a:rPr>
-              <a:t>서명/도장 선택</a:t>
+              <a:t>저장 vs 제출 차이점</a:t>
             </a:r>
             <a:endParaRPr lang="en-US" sz="2800" dirty="0"/>
           </a:p>
@@ -4540,7 +8649,7 @@
                   <a:srgbClr val="374151"/>
                 </a:solidFill>
               </a:rPr>
-              <a:t>방식 1: 저장된 서명/도장 - 마이페이지에서 미리 등록</a:t>
+              <a:t>저장: 나중에 계속 작성 가능, 수정 가능</a:t>
             </a:r>
             <a:endParaRPr lang="en-US" sz="1400" dirty="0"/>
           </a:p>
@@ -4573,40 +8682,7 @@
                   <a:srgbClr val="374151"/>
                 </a:solidFill>
               </a:rPr>
-              <a:t>방식 2: 실시간 서명 - 화면에 직접 서명 그리기</a:t>
-            </a:r>
-            <a:endParaRPr lang="en-US" sz="1400" dirty="0"/>
-          </a:p>
-        </p:txBody>
-      </p:sp>
-      <p:sp>
-        <p:nvSpPr>
-          <p:cNvPr id="5" name="Text 3"/>
-          <p:cNvSpPr/>
-          <p:nvPr/>
-        </p:nvSpPr>
-        <p:spPr>
-          <a:xfrm>
-            <a:off x="640080" y="1645920"/>
-            <a:ext cx="7772400" cy="0"/>
-          </a:xfrm>
-          <a:prstGeom prst="rect">
-            <a:avLst/>
-          </a:prstGeom>
-          <a:noFill/>
-          <a:ln/>
-        </p:spPr>
-        <p:txBody>
-          <a:bodyPr wrap="square" rtlCol="0" anchor="ctr"/>
-          <a:lstStyle/>
-          <a:p>
-            <a:r>
-              <a:rPr lang="en-US" sz="1400" dirty="0">
-                <a:solidFill>
-                  <a:srgbClr val="374151"/>
-                </a:solidFill>
-              </a:rPr>
-              <a:t>기본 서명이 설정되어 있으면 자동 사용</a:t>
+              <a:t>제출: 결재자에게 전달, 수정 불가 (회수 후 수정 가능)</a:t>
             </a:r>
             <a:endParaRPr lang="en-US" sz="1400" dirty="0"/>
           </a:p>
@@ -4651,7 +8727,7 @@
             <a:pPr algn="l"/>
             <a:fld id="{F7021451-1387-4CA6-816F-3879F97B5CBC}" type="slidenum">
               <a:rPr b="0" lang="en-US"/>
-              <a:t>15</a:t>
+              <a:t>20</a:t>
             </a:fld>
             <a:endParaRPr lang="en-US"/>
           </a:p>
@@ -4665,9 +8741,9 @@
 </p:sld>
 </file>
 
-<file path=ppt/slides/slide16.xml><?xml version="1.0" encoding="utf-8"?>
+<file path=ppt/slides/slide21.xml><?xml version="1.0" encoding="utf-8"?>
 <p:sld xmlns:a="http://schemas.openxmlformats.org/drawingml/2006/main" xmlns:r="http://schemas.openxmlformats.org/officeDocument/2006/relationships" xmlns:p="http://schemas.openxmlformats.org/presentationml/2006/main">
-  <p:cSld name="Slide 16">
+  <p:cSld name="Slide 21">
     <p:spTree>
       <p:nvGrpSpPr>
         <p:cNvPr id="1" name=""/>
@@ -4712,6 +8788,376 @@
                   <a:srgbClr val="1E40AF"/>
                 </a:solidFill>
               </a:rPr>
+              <a:t>서명/도장 선택</a:t>
+            </a:r>
+            <a:endParaRPr lang="en-US" sz="2800" dirty="0"/>
+          </a:p>
+        </p:txBody>
+      </p:sp>
+      <p:pic>
+        <p:nvPicPr>
+          <p:cNvPr id="3" name="Image 0" descr="/Users/wandosea/Documents/GitHub/expense-system/docs/user-guide/screenshots/signature-modal.png">    </p:cNvPr>
+          <p:cNvPicPr>
+            <a:picLocks noChangeAspect="1"/>
+          </p:cNvPicPr>
+          <p:nvPr/>
+        </p:nvPicPr>
+        <p:blipFill>
+          <a:blip r:embed="rId1"/>
+          <a:srcRect l="0" r="0" t="0" b="0"/>
+          <a:stretch/>
+        </p:blipFill>
+        <p:spPr>
+          <a:xfrm>
+            <a:off x="457200" y="914400"/>
+            <a:ext cx="8229600" cy="3657600"/>
+          </a:xfrm>
+          <a:prstGeom prst="rect">
+            <a:avLst/>
+          </a:prstGeom>
+        </p:spPr>
+      </p:pic>
+      <p:sp>
+        <p:nvSpPr>
+          <p:cNvPr id="4" name="Text 1"/>
+          <p:cNvSpPr/>
+          <p:nvPr/>
+        </p:nvSpPr>
+        <p:spPr>
+          <a:xfrm>
+            <a:off x="457200" y="4754880"/>
+            <a:ext cx="8229600" cy="0"/>
+          </a:xfrm>
+          <a:prstGeom prst="rect">
+            <a:avLst/>
+          </a:prstGeom>
+          <a:noFill/>
+          <a:ln/>
+        </p:spPr>
+        <p:txBody>
+          <a:bodyPr wrap="square" rtlCol="0" anchor="ctr"/>
+          <a:lstStyle/>
+          <a:p>
+            <a:pPr indent="0" marL="0">
+              <a:buNone/>
+            </a:pPr>
+            <a:r>
+              <a:rPr lang="en-US" sz="1200" dirty="0">
+                <a:solidFill>
+                  <a:srgbClr val="6B7280"/>
+                </a:solidFill>
+              </a:rPr>
+              <a:t>저장된 서명 또는 실시간 서명</a:t>
+            </a:r>
+            <a:endParaRPr lang="en-US" sz="1200" dirty="0"/>
+          </a:p>
+        </p:txBody>
+      </p:sp>
+      <p:sp>
+        <p:nvSpPr>
+          <p:cNvPr id="25" name="Slide Number Placeholder 0"/>
+          <p:cNvSpPr>
+            <a:spLocks noGrp="1"/>
+          </p:cNvSpPr>
+          <p:nvPr>
+            <p:ph type="sldNum" sz="quarter" idx="4294967295"/>
+          </p:nvPr>
+        </p:nvSpPr>
+        <p:spPr>
+          <a:xfrm>
+            <a:off x="8686800" y="4937760"/>
+            <a:ext cx="800000" cy="300000"/>
+          </a:xfrm>
+          <a:prstGeom prst="rect">
+            <a:avLst/>
+          </a:prstGeom>
+          <a:extLst>
+            <a:ext uri="{C572A759-6A51-4108-AA02-DFA0A04FC94B}">
+              <ma14:wrappingTextBoxFlag xmlns:ma14="http://schemas.microsoft.com/office/mac/drawingml/2011/main" val="0"/>
+            </a:ext>
+          </a:extLst>
+        </p:spPr>
+        <p:txBody>
+          <a:bodyPr/>
+          <a:lstStyle>
+            <a:lvl1pPr>
+              <a:defRPr sz="1000">
+                <a:solidFill>
+                  <a:srgbClr val="FFFFFF"/>
+                </a:solidFill>
+              </a:defRPr>
+            </a:lvl1pPr>
+          </a:lstStyle>
+          <a:p>
+            <a:pPr algn="l"/>
+            <a:fld id="{F7021451-1387-4CA6-816F-3879F97B5CBC}" type="slidenum">
+              <a:rPr b="0" lang="en-US"/>
+              <a:t>21</a:t>
+            </a:fld>
+            <a:endParaRPr lang="en-US"/>
+          </a:p>
+        </p:txBody>
+      </p:sp>
+    </p:spTree>
+  </p:cSld>
+  <p:clrMapOvr>
+    <a:masterClrMapping/>
+  </p:clrMapOvr>
+</p:sld>
+</file>
+
+<file path=ppt/slides/slide22.xml><?xml version="1.0" encoding="utf-8"?>
+<p:sld xmlns:a="http://schemas.openxmlformats.org/drawingml/2006/main" xmlns:r="http://schemas.openxmlformats.org/officeDocument/2006/relationships" xmlns:p="http://schemas.openxmlformats.org/presentationml/2006/main">
+  <p:cSld name="Slide 22">
+    <p:spTree>
+      <p:nvGrpSpPr>
+        <p:cNvPr id="1" name=""/>
+        <p:cNvGrpSpPr/>
+        <p:nvPr/>
+      </p:nvGrpSpPr>
+      <p:grpSpPr>
+        <a:xfrm>
+          <a:off x="0" y="0"/>
+          <a:ext cx="0" cy="0"/>
+          <a:chOff x="0" y="0"/>
+          <a:chExt cx="0" cy="0"/>
+        </a:xfrm>
+      </p:grpSpPr>
+      <p:sp>
+        <p:nvSpPr>
+          <p:cNvPr id="2" name="Text 0"/>
+          <p:cNvSpPr/>
+          <p:nvPr/>
+        </p:nvSpPr>
+        <p:spPr>
+          <a:xfrm>
+            <a:off x="457200" y="274320"/>
+            <a:ext cx="8229600" cy="0"/>
+          </a:xfrm>
+          <a:prstGeom prst="rect">
+            <a:avLst/>
+          </a:prstGeom>
+          <a:noFill/>
+          <a:ln/>
+        </p:spPr>
+        <p:txBody>
+          <a:bodyPr wrap="square" rtlCol="0" anchor="ctr"/>
+          <a:lstStyle/>
+          <a:p>
+            <a:pPr indent="0" marL="0">
+              <a:buNone/>
+            </a:pPr>
+            <a:r>
+              <a:rPr lang="en-US" sz="2800" b="1" dirty="0">
+                <a:solidFill>
+                  <a:srgbClr val="1E40AF"/>
+                </a:solidFill>
+              </a:rPr>
+              <a:t>서명/도장 선택 방식</a:t>
+            </a:r>
+            <a:endParaRPr lang="en-US" sz="2800" dirty="0"/>
+          </a:p>
+        </p:txBody>
+      </p:sp>
+      <p:sp>
+        <p:nvSpPr>
+          <p:cNvPr id="3" name="Text 1"/>
+          <p:cNvSpPr/>
+          <p:nvPr/>
+        </p:nvSpPr>
+        <p:spPr>
+          <a:xfrm>
+            <a:off x="640080" y="914400"/>
+            <a:ext cx="7772400" cy="0"/>
+          </a:xfrm>
+          <a:prstGeom prst="rect">
+            <a:avLst/>
+          </a:prstGeom>
+          <a:noFill/>
+          <a:ln/>
+        </p:spPr>
+        <p:txBody>
+          <a:bodyPr wrap="square" rtlCol="0" anchor="ctr"/>
+          <a:lstStyle/>
+          <a:p>
+            <a:r>
+              <a:rPr lang="en-US" sz="1400" dirty="0">
+                <a:solidFill>
+                  <a:srgbClr val="374151"/>
+                </a:solidFill>
+              </a:rPr>
+              <a:t>방식 1: 저장된 서명/도장 - 마이페이지에서 미리 등록</a:t>
+            </a:r>
+            <a:endParaRPr lang="en-US" sz="1400" dirty="0"/>
+          </a:p>
+        </p:txBody>
+      </p:sp>
+      <p:sp>
+        <p:nvSpPr>
+          <p:cNvPr id="4" name="Text 2"/>
+          <p:cNvSpPr/>
+          <p:nvPr/>
+        </p:nvSpPr>
+        <p:spPr>
+          <a:xfrm>
+            <a:off x="640080" y="1280160"/>
+            <a:ext cx="7772400" cy="0"/>
+          </a:xfrm>
+          <a:prstGeom prst="rect">
+            <a:avLst/>
+          </a:prstGeom>
+          <a:noFill/>
+          <a:ln/>
+        </p:spPr>
+        <p:txBody>
+          <a:bodyPr wrap="square" rtlCol="0" anchor="ctr"/>
+          <a:lstStyle/>
+          <a:p>
+            <a:r>
+              <a:rPr lang="en-US" sz="1400" dirty="0">
+                <a:solidFill>
+                  <a:srgbClr val="374151"/>
+                </a:solidFill>
+              </a:rPr>
+              <a:t>방식 2: 실시간 서명 - 화면에 직접 서명 그리기</a:t>
+            </a:r>
+            <a:endParaRPr lang="en-US" sz="1400" dirty="0"/>
+          </a:p>
+        </p:txBody>
+      </p:sp>
+      <p:sp>
+        <p:nvSpPr>
+          <p:cNvPr id="5" name="Text 3"/>
+          <p:cNvSpPr/>
+          <p:nvPr/>
+        </p:nvSpPr>
+        <p:spPr>
+          <a:xfrm>
+            <a:off x="640080" y="1645920"/>
+            <a:ext cx="7772400" cy="0"/>
+          </a:xfrm>
+          <a:prstGeom prst="rect">
+            <a:avLst/>
+          </a:prstGeom>
+          <a:noFill/>
+          <a:ln/>
+        </p:spPr>
+        <p:txBody>
+          <a:bodyPr wrap="square" rtlCol="0" anchor="ctr"/>
+          <a:lstStyle/>
+          <a:p>
+            <a:r>
+              <a:rPr lang="en-US" sz="1400" dirty="0">
+                <a:solidFill>
+                  <a:srgbClr val="374151"/>
+                </a:solidFill>
+              </a:rPr>
+              <a:t>기본 서명이 설정되어 있으면 자동 사용</a:t>
+            </a:r>
+            <a:endParaRPr lang="en-US" sz="1400" dirty="0"/>
+          </a:p>
+        </p:txBody>
+      </p:sp>
+      <p:sp>
+        <p:nvSpPr>
+          <p:cNvPr id="25" name="Slide Number Placeholder 0"/>
+          <p:cNvSpPr>
+            <a:spLocks noGrp="1"/>
+          </p:cNvSpPr>
+          <p:nvPr>
+            <p:ph type="sldNum" sz="quarter" idx="4294967295"/>
+          </p:nvPr>
+        </p:nvSpPr>
+        <p:spPr>
+          <a:xfrm>
+            <a:off x="8686800" y="4937760"/>
+            <a:ext cx="800000" cy="300000"/>
+          </a:xfrm>
+          <a:prstGeom prst="rect">
+            <a:avLst/>
+          </a:prstGeom>
+          <a:extLst>
+            <a:ext uri="{C572A759-6A51-4108-AA02-DFA0A04FC94B}">
+              <ma14:wrappingTextBoxFlag xmlns:ma14="http://schemas.microsoft.com/office/mac/drawingml/2011/main" val="0"/>
+            </a:ext>
+          </a:extLst>
+        </p:spPr>
+        <p:txBody>
+          <a:bodyPr/>
+          <a:lstStyle>
+            <a:lvl1pPr>
+              <a:defRPr sz="1000">
+                <a:solidFill>
+                  <a:srgbClr val="FFFFFF"/>
+                </a:solidFill>
+              </a:defRPr>
+            </a:lvl1pPr>
+          </a:lstStyle>
+          <a:p>
+            <a:pPr algn="l"/>
+            <a:fld id="{F7021451-1387-4CA6-816F-3879F97B5CBC}" type="slidenum">
+              <a:rPr b="0" lang="en-US"/>
+              <a:t>22</a:t>
+            </a:fld>
+            <a:endParaRPr lang="en-US"/>
+          </a:p>
+        </p:txBody>
+      </p:sp>
+    </p:spTree>
+  </p:cSld>
+  <p:clrMapOvr>
+    <a:masterClrMapping/>
+  </p:clrMapOvr>
+</p:sld>
+</file>
+
+<file path=ppt/slides/slide23.xml><?xml version="1.0" encoding="utf-8"?>
+<p:sld xmlns:a="http://schemas.openxmlformats.org/drawingml/2006/main" xmlns:r="http://schemas.openxmlformats.org/officeDocument/2006/relationships" xmlns:p="http://schemas.openxmlformats.org/presentationml/2006/main">
+  <p:cSld name="Slide 23">
+    <p:spTree>
+      <p:nvGrpSpPr>
+        <p:cNvPr id="1" name=""/>
+        <p:cNvGrpSpPr/>
+        <p:nvPr/>
+      </p:nvGrpSpPr>
+      <p:grpSpPr>
+        <a:xfrm>
+          <a:off x="0" y="0"/>
+          <a:ext cx="0" cy="0"/>
+          <a:chOff x="0" y="0"/>
+          <a:chExt cx="0" cy="0"/>
+        </a:xfrm>
+      </p:grpSpPr>
+      <p:sp>
+        <p:nvSpPr>
+          <p:cNvPr id="2" name="Text 0"/>
+          <p:cNvSpPr/>
+          <p:nvPr/>
+        </p:nvSpPr>
+        <p:spPr>
+          <a:xfrm>
+            <a:off x="457200" y="274320"/>
+            <a:ext cx="8229600" cy="0"/>
+          </a:xfrm>
+          <a:prstGeom prst="rect">
+            <a:avLst/>
+          </a:prstGeom>
+          <a:noFill/>
+          <a:ln/>
+        </p:spPr>
+        <p:txBody>
+          <a:bodyPr wrap="square" rtlCol="0" anchor="ctr"/>
+          <a:lstStyle/>
+          <a:p>
+            <a:pPr indent="0" marL="0">
+              <a:buNone/>
+            </a:pPr>
+            <a:r>
+              <a:rPr lang="en-US" sz="2800" b="1" dirty="0">
+                <a:solidFill>
+                  <a:srgbClr val="1E40AF"/>
+                </a:solidFill>
+              </a:rPr>
               <a:t>지출결의서 수정 가능 상태</a:t>
             </a:r>
             <a:endParaRPr lang="en-US" sz="2800" dirty="0"/>
@@ -4720,7 +9166,7 @@
       </p:sp>
       <p:graphicFrame>
         <p:nvGraphicFramePr>
-          <p:cNvPr id="17" name="Table 0"/>
+          <p:cNvPr id="24" name="Table 0"/>
           <p:cNvGraphicFramePr>
             <a:graphicFrameLocks noGrp="1"/>
           </p:cNvGraphicFramePr>
@@ -5585,7 +10031,7 @@
             <a:pPr algn="l"/>
             <a:fld id="{F7021451-1387-4CA6-816F-3879F97B5CBC}" type="slidenum">
               <a:rPr b="0" lang="en-US"/>
-              <a:t>16</a:t>
+              <a:t>23</a:t>
             </a:fld>
             <a:endParaRPr lang="en-US"/>
           </a:p>
@@ -5599,9 +10045,9 @@
 </p:sld>
 </file>
 
-<file path=ppt/slides/slide17.xml><?xml version="1.0" encoding="utf-8"?>
+<file path=ppt/slides/slide24.xml><?xml version="1.0" encoding="utf-8"?>
 <p:sld xmlns:a="http://schemas.openxmlformats.org/drawingml/2006/main" xmlns:r="http://schemas.openxmlformats.org/officeDocument/2006/relationships" xmlns:p="http://schemas.openxmlformats.org/presentationml/2006/main">
-  <p:cSld name="Slide 17">
+  <p:cSld name="Slide 24">
     <p:spTree>
       <p:nvGrpSpPr>
         <p:cNvPr id="1" name=""/>
@@ -5823,7 +10269,7 @@
             <a:pPr algn="l"/>
             <a:fld id="{F7021451-1387-4CA6-816F-3879F97B5CBC}" type="slidenum">
               <a:rPr b="0" lang="en-US"/>
-              <a:t>17</a:t>
+              <a:t>24</a:t>
             </a:fld>
             <a:endParaRPr lang="en-US"/>
           </a:p>
@@ -5837,9 +10283,9 @@
 </p:sld>
 </file>
 
-<file path=ppt/slides/slide18.xml><?xml version="1.0" encoding="utf-8"?>
+<file path=ppt/slides/slide25.xml><?xml version="1.0" encoding="utf-8"?>
 <p:sld xmlns:a="http://schemas.openxmlformats.org/drawingml/2006/main" xmlns:r="http://schemas.openxmlformats.org/officeDocument/2006/relationships" xmlns:p="http://schemas.openxmlformats.org/presentationml/2006/main">
-  <p:cSld name="Slide 18">
+  <p:cSld name="Slide 25">
     <p:spTree>
       <p:nvGrpSpPr>
         <p:cNvPr id="1" name=""/>
@@ -5923,472 +10369,6 @@
               <a:t>문의: 관리자에게 연락</a:t>
             </a:r>
             <a:endParaRPr lang="en-US" sz="1800" dirty="0"/>
-          </a:p>
-        </p:txBody>
-      </p:sp>
-    </p:spTree>
-  </p:cSld>
-  <p:clrMapOvr>
-    <a:masterClrMapping/>
-  </p:clrMapOvr>
-</p:sld>
-</file>
-
-<file path=ppt/slides/slide2.xml><?xml version="1.0" encoding="utf-8"?>
-<p:sld xmlns:a="http://schemas.openxmlformats.org/drawingml/2006/main" xmlns:r="http://schemas.openxmlformats.org/officeDocument/2006/relationships" xmlns:p="http://schemas.openxmlformats.org/presentationml/2006/main">
-  <p:cSld name="Slide 2">
-    <p:spTree>
-      <p:nvGrpSpPr>
-        <p:cNvPr id="1" name=""/>
-        <p:cNvGrpSpPr/>
-        <p:nvPr/>
-      </p:nvGrpSpPr>
-      <p:grpSpPr>
-        <a:xfrm>
-          <a:off x="0" y="0"/>
-          <a:ext cx="0" cy="0"/>
-          <a:chOff x="0" y="0"/>
-          <a:chExt cx="0" cy="0"/>
-        </a:xfrm>
-      </p:grpSpPr>
-      <p:sp>
-        <p:nvSpPr>
-          <p:cNvPr id="2" name="Text 0"/>
-          <p:cNvSpPr/>
-          <p:nvPr/>
-        </p:nvSpPr>
-        <p:spPr>
-          <a:xfrm>
-            <a:off x="457200" y="274320"/>
-            <a:ext cx="8229600" cy="0"/>
-          </a:xfrm>
-          <a:prstGeom prst="rect">
-            <a:avLst/>
-          </a:prstGeom>
-          <a:noFill/>
-          <a:ln/>
-        </p:spPr>
-        <p:txBody>
-          <a:bodyPr wrap="square" rtlCol="0" anchor="ctr"/>
-          <a:lstStyle/>
-          <a:p>
-            <a:pPr indent="0" marL="0">
-              <a:buNone/>
-            </a:pPr>
-            <a:r>
-              <a:rPr lang="en-US" sz="2800" b="1" dirty="0">
-                <a:solidFill>
-                  <a:srgbClr val="1E40AF"/>
-                </a:solidFill>
-              </a:rPr>
-              <a:t>목차</a:t>
-            </a:r>
-            <a:endParaRPr lang="en-US" sz="2800" dirty="0"/>
-          </a:p>
-        </p:txBody>
-      </p:sp>
-      <p:sp>
-        <p:nvSpPr>
-          <p:cNvPr id="3" name="Text 1"/>
-          <p:cNvSpPr/>
-          <p:nvPr/>
-        </p:nvSpPr>
-        <p:spPr>
-          <a:xfrm>
-            <a:off x="914400" y="1097280"/>
-            <a:ext cx="7315200" cy="0"/>
-          </a:xfrm>
-          <a:prstGeom prst="rect">
-            <a:avLst/>
-          </a:prstGeom>
-          <a:noFill/>
-          <a:ln/>
-        </p:spPr>
-        <p:txBody>
-          <a:bodyPr wrap="square" rtlCol="0" anchor="ctr"/>
-          <a:lstStyle/>
-          <a:p>
-            <a:pPr indent="0" marL="0">
-              <a:buNone/>
-            </a:pPr>
-            <a:r>
-              <a:rPr lang="en-US" sz="1600" dirty="0">
-                <a:solidFill>
-                  <a:srgbClr val="374151"/>
-                </a:solidFill>
-              </a:rPr>
-              <a:t>1. 작성 Flow 개요</a:t>
-            </a:r>
-            <a:endParaRPr lang="en-US" sz="1600" dirty="0"/>
-          </a:p>
-        </p:txBody>
-      </p:sp>
-      <p:sp>
-        <p:nvSpPr>
-          <p:cNvPr id="4" name="Text 2"/>
-          <p:cNvSpPr/>
-          <p:nvPr/>
-        </p:nvSpPr>
-        <p:spPr>
-          <a:xfrm>
-            <a:off x="914400" y="1508760"/>
-            <a:ext cx="7315200" cy="0"/>
-          </a:xfrm>
-          <a:prstGeom prst="rect">
-            <a:avLst/>
-          </a:prstGeom>
-          <a:noFill/>
-          <a:ln/>
-        </p:spPr>
-        <p:txBody>
-          <a:bodyPr wrap="square" rtlCol="0" anchor="ctr"/>
-          <a:lstStyle/>
-          <a:p>
-            <a:pPr indent="0" marL="0">
-              <a:buNone/>
-            </a:pPr>
-            <a:r>
-              <a:rPr lang="en-US" sz="1600" dirty="0">
-                <a:solidFill>
-                  <a:srgbClr val="374151"/>
-                </a:solidFill>
-              </a:rPr>
-              <a:t>2. 예산 정보 입력</a:t>
-            </a:r>
-            <a:endParaRPr lang="en-US" sz="1600" dirty="0"/>
-          </a:p>
-        </p:txBody>
-      </p:sp>
-      <p:sp>
-        <p:nvSpPr>
-          <p:cNvPr id="5" name="Text 3"/>
-          <p:cNvSpPr/>
-          <p:nvPr/>
-        </p:nvSpPr>
-        <p:spPr>
-          <a:xfrm>
-            <a:off x="914400" y="1920240"/>
-            <a:ext cx="7315200" cy="0"/>
-          </a:xfrm>
-          <a:prstGeom prst="rect">
-            <a:avLst/>
-          </a:prstGeom>
-          <a:noFill/>
-          <a:ln/>
-        </p:spPr>
-        <p:txBody>
-          <a:bodyPr wrap="square" rtlCol="0" anchor="ctr"/>
-          <a:lstStyle/>
-          <a:p>
-            <a:pPr indent="0" marL="0">
-              <a:buNone/>
-            </a:pPr>
-            <a:r>
-              <a:rPr lang="en-US" sz="1600" dirty="0">
-                <a:solidFill>
-                  <a:srgbClr val="374151"/>
-                </a:solidFill>
-              </a:rPr>
-              <a:t>3. 세부 항목 입력</a:t>
-            </a:r>
-            <a:endParaRPr lang="en-US" sz="1600" dirty="0"/>
-          </a:p>
-        </p:txBody>
-      </p:sp>
-      <p:sp>
-        <p:nvSpPr>
-          <p:cNvPr id="6" name="Text 4"/>
-          <p:cNvSpPr/>
-          <p:nvPr/>
-        </p:nvSpPr>
-        <p:spPr>
-          <a:xfrm>
-            <a:off x="914400" y="2331720"/>
-            <a:ext cx="7315200" cy="0"/>
-          </a:xfrm>
-          <a:prstGeom prst="rect">
-            <a:avLst/>
-          </a:prstGeom>
-          <a:noFill/>
-          <a:ln/>
-        </p:spPr>
-        <p:txBody>
-          <a:bodyPr wrap="square" rtlCol="0" anchor="ctr"/>
-          <a:lstStyle/>
-          <a:p>
-            <a:pPr indent="0" marL="0">
-              <a:buNone/>
-            </a:pPr>
-            <a:r>
-              <a:rPr lang="en-US" sz="1600" dirty="0">
-                <a:solidFill>
-                  <a:srgbClr val="374151"/>
-                </a:solidFill>
-              </a:rPr>
-              <a:t>4. 신청 정보 입력</a:t>
-            </a:r>
-            <a:endParaRPr lang="en-US" sz="1600" dirty="0"/>
-          </a:p>
-        </p:txBody>
-      </p:sp>
-      <p:sp>
-        <p:nvSpPr>
-          <p:cNvPr id="7" name="Text 5"/>
-          <p:cNvSpPr/>
-          <p:nvPr/>
-        </p:nvSpPr>
-        <p:spPr>
-          <a:xfrm>
-            <a:off x="914400" y="2743200"/>
-            <a:ext cx="7315200" cy="0"/>
-          </a:xfrm>
-          <a:prstGeom prst="rect">
-            <a:avLst/>
-          </a:prstGeom>
-          <a:noFill/>
-          <a:ln/>
-        </p:spPr>
-        <p:txBody>
-          <a:bodyPr wrap="square" rtlCol="0" anchor="ctr"/>
-          <a:lstStyle/>
-          <a:p>
-            <a:pPr indent="0" marL="0">
-              <a:buNone/>
-            </a:pPr>
-            <a:r>
-              <a:rPr lang="en-US" sz="1600" dirty="0">
-                <a:solidFill>
-                  <a:srgbClr val="374151"/>
-                </a:solidFill>
-              </a:rPr>
-              <a:t>5. 은행 정보 입력</a:t>
-            </a:r>
-            <a:endParaRPr lang="en-US" sz="1600" dirty="0"/>
-          </a:p>
-        </p:txBody>
-      </p:sp>
-      <p:sp>
-        <p:nvSpPr>
-          <p:cNvPr id="8" name="Text 6"/>
-          <p:cNvSpPr/>
-          <p:nvPr/>
-        </p:nvSpPr>
-        <p:spPr>
-          <a:xfrm>
-            <a:off x="914400" y="3154680"/>
-            <a:ext cx="7315200" cy="0"/>
-          </a:xfrm>
-          <a:prstGeom prst="rect">
-            <a:avLst/>
-          </a:prstGeom>
-          <a:noFill/>
-          <a:ln/>
-        </p:spPr>
-        <p:txBody>
-          <a:bodyPr wrap="square" rtlCol="0" anchor="ctr"/>
-          <a:lstStyle/>
-          <a:p>
-            <a:pPr indent="0" marL="0">
-              <a:buNone/>
-            </a:pPr>
-            <a:r>
-              <a:rPr lang="en-US" sz="1600" dirty="0">
-                <a:solidFill>
-                  <a:srgbClr val="374151"/>
-                </a:solidFill>
-              </a:rPr>
-              <a:t>6. 첨부파일 업로드</a:t>
-            </a:r>
-            <a:endParaRPr lang="en-US" sz="1600" dirty="0"/>
-          </a:p>
-        </p:txBody>
-      </p:sp>
-      <p:sp>
-        <p:nvSpPr>
-          <p:cNvPr id="9" name="Text 7"/>
-          <p:cNvSpPr/>
-          <p:nvPr/>
-        </p:nvSpPr>
-        <p:spPr>
-          <a:xfrm>
-            <a:off x="914400" y="3566160"/>
-            <a:ext cx="7315200" cy="0"/>
-          </a:xfrm>
-          <a:prstGeom prst="rect">
-            <a:avLst/>
-          </a:prstGeom>
-          <a:noFill/>
-          <a:ln/>
-        </p:spPr>
-        <p:txBody>
-          <a:bodyPr wrap="square" rtlCol="0" anchor="ctr"/>
-          <a:lstStyle/>
-          <a:p>
-            <a:pPr indent="0" marL="0">
-              <a:buNone/>
-            </a:pPr>
-            <a:r>
-              <a:rPr lang="en-US" sz="1600" dirty="0">
-                <a:solidFill>
-                  <a:srgbClr val="374151"/>
-                </a:solidFill>
-              </a:rPr>
-              <a:t>7. 결재선 미리보기</a:t>
-            </a:r>
-            <a:endParaRPr lang="en-US" sz="1600" dirty="0"/>
-          </a:p>
-        </p:txBody>
-      </p:sp>
-      <p:sp>
-        <p:nvSpPr>
-          <p:cNvPr id="10" name="Text 8"/>
-          <p:cNvSpPr/>
-          <p:nvPr/>
-        </p:nvSpPr>
-        <p:spPr>
-          <a:xfrm>
-            <a:off x="914400" y="3977640"/>
-            <a:ext cx="7315200" cy="0"/>
-          </a:xfrm>
-          <a:prstGeom prst="rect">
-            <a:avLst/>
-          </a:prstGeom>
-          <a:noFill/>
-          <a:ln/>
-        </p:spPr>
-        <p:txBody>
-          <a:bodyPr wrap="square" rtlCol="0" anchor="ctr"/>
-          <a:lstStyle/>
-          <a:p>
-            <a:pPr indent="0" marL="0">
-              <a:buNone/>
-            </a:pPr>
-            <a:r>
-              <a:rPr lang="en-US" sz="1600" dirty="0">
-                <a:solidFill>
-                  <a:srgbClr val="374151"/>
-                </a:solidFill>
-              </a:rPr>
-              <a:t>8. 저장과 제출</a:t>
-            </a:r>
-            <a:endParaRPr lang="en-US" sz="1600" dirty="0"/>
-          </a:p>
-        </p:txBody>
-      </p:sp>
-      <p:sp>
-        <p:nvSpPr>
-          <p:cNvPr id="11" name="Text 9"/>
-          <p:cNvSpPr/>
-          <p:nvPr/>
-        </p:nvSpPr>
-        <p:spPr>
-          <a:xfrm>
-            <a:off x="914400" y="4389120"/>
-            <a:ext cx="7315200" cy="0"/>
-          </a:xfrm>
-          <a:prstGeom prst="rect">
-            <a:avLst/>
-          </a:prstGeom>
-          <a:noFill/>
-          <a:ln/>
-        </p:spPr>
-        <p:txBody>
-          <a:bodyPr wrap="square" rtlCol="0" anchor="ctr"/>
-          <a:lstStyle/>
-          <a:p>
-            <a:pPr indent="0" marL="0">
-              <a:buNone/>
-            </a:pPr>
-            <a:r>
-              <a:rPr lang="en-US" sz="1600" dirty="0">
-                <a:solidFill>
-                  <a:srgbClr val="374151"/>
-                </a:solidFill>
-              </a:rPr>
-              <a:t>9. 서명/도장 선택</a:t>
-            </a:r>
-            <a:endParaRPr lang="en-US" sz="1600" dirty="0"/>
-          </a:p>
-        </p:txBody>
-      </p:sp>
-      <p:sp>
-        <p:nvSpPr>
-          <p:cNvPr id="12" name="Text 10"/>
-          <p:cNvSpPr/>
-          <p:nvPr/>
-        </p:nvSpPr>
-        <p:spPr>
-          <a:xfrm>
-            <a:off x="914400" y="4800600"/>
-            <a:ext cx="7315200" cy="0"/>
-          </a:xfrm>
-          <a:prstGeom prst="rect">
-            <a:avLst/>
-          </a:prstGeom>
-          <a:noFill/>
-          <a:ln/>
-        </p:spPr>
-        <p:txBody>
-          <a:bodyPr wrap="square" rtlCol="0" anchor="ctr"/>
-          <a:lstStyle/>
-          <a:p>
-            <a:pPr indent="0" marL="0">
-              <a:buNone/>
-            </a:pPr>
-            <a:r>
-              <a:rPr lang="en-US" sz="1600" dirty="0">
-                <a:solidFill>
-                  <a:srgbClr val="374151"/>
-                </a:solidFill>
-              </a:rPr>
-              <a:t>10. 지출결의서 수정</a:t>
-            </a:r>
-            <a:endParaRPr lang="en-US" sz="1600" dirty="0"/>
-          </a:p>
-        </p:txBody>
-      </p:sp>
-      <p:sp>
-        <p:nvSpPr>
-          <p:cNvPr id="25" name="Slide Number Placeholder 0"/>
-          <p:cNvSpPr>
-            <a:spLocks noGrp="1"/>
-          </p:cNvSpPr>
-          <p:nvPr>
-            <p:ph type="sldNum" sz="quarter" idx="4294967295"/>
-          </p:nvPr>
-        </p:nvSpPr>
-        <p:spPr>
-          <a:xfrm>
-            <a:off x="8686800" y="4937760"/>
-            <a:ext cx="800000" cy="300000"/>
-          </a:xfrm>
-          <a:prstGeom prst="rect">
-            <a:avLst/>
-          </a:prstGeom>
-          <a:extLst>
-            <a:ext uri="{C572A759-6A51-4108-AA02-DFA0A04FC94B}">
-              <ma14:wrappingTextBoxFlag xmlns:ma14="http://schemas.microsoft.com/office/mac/drawingml/2011/main" val="0"/>
-            </a:ext>
-          </a:extLst>
-        </p:spPr>
-        <p:txBody>
-          <a:bodyPr/>
-          <a:lstStyle>
-            <a:lvl1pPr>
-              <a:defRPr sz="1000">
-                <a:solidFill>
-                  <a:srgbClr val="FFFFFF"/>
-                </a:solidFill>
-              </a:defRPr>
-            </a:lvl1pPr>
-          </a:lstStyle>
-          <a:p>
-            <a:pPr algn="l"/>
-            <a:fld id="{F7021451-1387-4CA6-816F-3879F97B5CBC}" type="slidenum">
-              <a:rPr b="0" lang="en-US"/>
-              <a:t>2</a:t>
-            </a:fld>
-            <a:endParaRPr lang="en-US"/>
           </a:p>
         </p:txBody>
       </p:sp>
@@ -6594,6 +10574,171 @@
                   <a:srgbClr val="1E40AF"/>
                 </a:solidFill>
               </a:rPr>
+              <a:t>새 지출결의서 작성 화면</a:t>
+            </a:r>
+            <a:endParaRPr lang="en-US" sz="2800" dirty="0"/>
+          </a:p>
+        </p:txBody>
+      </p:sp>
+      <p:pic>
+        <p:nvPicPr>
+          <p:cNvPr id="3" name="Image 0" descr="/Users/wandosea/Documents/GitHub/expense-system/docs/user-guide/screenshots/expense-new.png">    </p:cNvPr>
+          <p:cNvPicPr>
+            <a:picLocks noChangeAspect="1"/>
+          </p:cNvPicPr>
+          <p:nvPr/>
+        </p:nvPicPr>
+        <p:blipFill>
+          <a:blip r:embed="rId1"/>
+          <a:srcRect l="0" r="0" t="0" b="0"/>
+          <a:stretch/>
+        </p:blipFill>
+        <p:spPr>
+          <a:xfrm>
+            <a:off x="457200" y="914400"/>
+            <a:ext cx="8229600" cy="3657600"/>
+          </a:xfrm>
+          <a:prstGeom prst="rect">
+            <a:avLst/>
+          </a:prstGeom>
+        </p:spPr>
+      </p:pic>
+      <p:sp>
+        <p:nvSpPr>
+          <p:cNvPr id="4" name="Text 1"/>
+          <p:cNvSpPr/>
+          <p:nvPr/>
+        </p:nvSpPr>
+        <p:spPr>
+          <a:xfrm>
+            <a:off x="457200" y="4754880"/>
+            <a:ext cx="8229600" cy="0"/>
+          </a:xfrm>
+          <a:prstGeom prst="rect">
+            <a:avLst/>
+          </a:prstGeom>
+          <a:noFill/>
+          <a:ln/>
+        </p:spPr>
+        <p:txBody>
+          <a:bodyPr wrap="square" rtlCol="0" anchor="ctr"/>
+          <a:lstStyle/>
+          <a:p>
+            <a:pPr indent="0" marL="0">
+              <a:buNone/>
+            </a:pPr>
+            <a:r>
+              <a:rPr lang="en-US" sz="1200" dirty="0">
+                <a:solidFill>
+                  <a:srgbClr val="6B7280"/>
+                </a:solidFill>
+              </a:rPr>
+              <a:t>메뉴 또는 + 버튼을 통해 접근</a:t>
+            </a:r>
+            <a:endParaRPr lang="en-US" sz="1200" dirty="0"/>
+          </a:p>
+        </p:txBody>
+      </p:sp>
+      <p:sp>
+        <p:nvSpPr>
+          <p:cNvPr id="25" name="Slide Number Placeholder 0"/>
+          <p:cNvSpPr>
+            <a:spLocks noGrp="1"/>
+          </p:cNvSpPr>
+          <p:nvPr>
+            <p:ph type="sldNum" sz="quarter" idx="4294967295"/>
+          </p:nvPr>
+        </p:nvSpPr>
+        <p:spPr>
+          <a:xfrm>
+            <a:off x="8686800" y="4937760"/>
+            <a:ext cx="800000" cy="300000"/>
+          </a:xfrm>
+          <a:prstGeom prst="rect">
+            <a:avLst/>
+          </a:prstGeom>
+          <a:extLst>
+            <a:ext uri="{C572A759-6A51-4108-AA02-DFA0A04FC94B}">
+              <ma14:wrappingTextBoxFlag xmlns:ma14="http://schemas.microsoft.com/office/mac/drawingml/2011/main" val="0"/>
+            </a:ext>
+          </a:extLst>
+        </p:spPr>
+        <p:txBody>
+          <a:bodyPr/>
+          <a:lstStyle>
+            <a:lvl1pPr>
+              <a:defRPr sz="1000">
+                <a:solidFill>
+                  <a:srgbClr val="FFFFFF"/>
+                </a:solidFill>
+              </a:defRPr>
+            </a:lvl1pPr>
+          </a:lstStyle>
+          <a:p>
+            <a:pPr algn="l"/>
+            <a:fld id="{F7021451-1387-4CA6-816F-3879F97B5CBC}" type="slidenum">
+              <a:rPr b="0" lang="en-US"/>
+              <a:t>4</a:t>
+            </a:fld>
+            <a:endParaRPr lang="en-US"/>
+          </a:p>
+        </p:txBody>
+      </p:sp>
+    </p:spTree>
+  </p:cSld>
+  <p:clrMapOvr>
+    <a:masterClrMapping/>
+  </p:clrMapOvr>
+</p:sld>
+</file>
+
+<file path=ppt/slides/slide5.xml><?xml version="1.0" encoding="utf-8"?>
+<p:sld xmlns:a="http://schemas.openxmlformats.org/drawingml/2006/main" xmlns:r="http://schemas.openxmlformats.org/officeDocument/2006/relationships" xmlns:p="http://schemas.openxmlformats.org/presentationml/2006/main">
+  <p:cSld name="Slide 5">
+    <p:spTree>
+      <p:nvGrpSpPr>
+        <p:cNvPr id="1" name=""/>
+        <p:cNvGrpSpPr/>
+        <p:nvPr/>
+      </p:nvGrpSpPr>
+      <p:grpSpPr>
+        <a:xfrm>
+          <a:off x="0" y="0"/>
+          <a:ext cx="0" cy="0"/>
+          <a:chOff x="0" y="0"/>
+          <a:chExt cx="0" cy="0"/>
+        </a:xfrm>
+      </p:grpSpPr>
+      <p:sp>
+        <p:nvSpPr>
+          <p:cNvPr id="2" name="Text 0"/>
+          <p:cNvSpPr/>
+          <p:nvPr/>
+        </p:nvSpPr>
+        <p:spPr>
+          <a:xfrm>
+            <a:off x="457200" y="274320"/>
+            <a:ext cx="8229600" cy="0"/>
+          </a:xfrm>
+          <a:prstGeom prst="rect">
+            <a:avLst/>
+          </a:prstGeom>
+          <a:noFill/>
+          <a:ln/>
+        </p:spPr>
+        <p:txBody>
+          <a:bodyPr wrap="square" rtlCol="0" anchor="ctr"/>
+          <a:lstStyle/>
+          <a:p>
+            <a:pPr indent="0" marL="0">
+              <a:buNone/>
+            </a:pPr>
+            <a:r>
+              <a:rPr lang="en-US" sz="2800" b="1" dirty="0">
+                <a:solidFill>
+                  <a:srgbClr val="1E40AF"/>
+                </a:solidFill>
+              </a:rPr>
               <a:t>접근 방법</a:t>
             </a:r>
             <a:endParaRPr lang="en-US" sz="2800" dirty="0"/>
@@ -6602,7 +10747,7 @@
       </p:sp>
       <p:graphicFrame>
         <p:nvGraphicFramePr>
-          <p:cNvPr id="5" name="Table 0"/>
+          <p:cNvPr id="6" name="Table 0"/>
           <p:cNvGraphicFramePr>
             <a:graphicFrameLocks noGrp="1"/>
           </p:cNvGraphicFramePr>
@@ -7071,7 +11216,7 @@
             <a:pPr algn="l"/>
             <a:fld id="{F7021451-1387-4CA6-816F-3879F97B5CBC}" type="slidenum">
               <a:rPr b="0" lang="en-US"/>
-              <a:t>4</a:t>
+              <a:t>5</a:t>
             </a:fld>
             <a:endParaRPr lang="en-US"/>
           </a:p>
@@ -7085,9 +11230,9 @@
 </p:sld>
 </file>
 
-<file path=ppt/slides/slide5.xml><?xml version="1.0" encoding="utf-8"?>
+<file path=ppt/slides/slide6.xml><?xml version="1.0" encoding="utf-8"?>
 <p:sld xmlns:a="http://schemas.openxmlformats.org/drawingml/2006/main" xmlns:r="http://schemas.openxmlformats.org/officeDocument/2006/relationships" xmlns:p="http://schemas.openxmlformats.org/presentationml/2006/main">
-  <p:cSld name="Slide 5">
+  <p:cSld name="Slide 6">
     <p:spTree>
       <p:nvGrpSpPr>
         <p:cNvPr id="1" name=""/>
@@ -7132,15 +11277,180 @@
                   <a:srgbClr val="1E40AF"/>
                 </a:solidFill>
               </a:rPr>
-              <a:t>1단계: 예산 정보 입력 - 4단계 계층 선택</a:t>
+              <a:t>1단계: 예산 정보 입력</a:t>
             </a:r>
             <a:endParaRPr lang="en-US" sz="2800" dirty="0"/>
           </a:p>
         </p:txBody>
       </p:sp>
+      <p:pic>
+        <p:nvPicPr>
+          <p:cNvPr id="3" name="Image 0" descr="/Users/wandosea/Documents/GitHub/expense-system/docs/user-guide/screenshots/budget-section.png">    </p:cNvPr>
+          <p:cNvPicPr>
+            <a:picLocks noChangeAspect="1"/>
+          </p:cNvPicPr>
+          <p:nvPr/>
+        </p:nvPicPr>
+        <p:blipFill>
+          <a:blip r:embed="rId1"/>
+          <a:srcRect l="0" r="0" t="0" b="0"/>
+          <a:stretch/>
+        </p:blipFill>
+        <p:spPr>
+          <a:xfrm>
+            <a:off x="457200" y="914400"/>
+            <a:ext cx="8229600" cy="3657600"/>
+          </a:xfrm>
+          <a:prstGeom prst="rect">
+            <a:avLst/>
+          </a:prstGeom>
+        </p:spPr>
+      </p:pic>
+      <p:sp>
+        <p:nvSpPr>
+          <p:cNvPr id="4" name="Text 1"/>
+          <p:cNvSpPr/>
+          <p:nvPr/>
+        </p:nvSpPr>
+        <p:spPr>
+          <a:xfrm>
+            <a:off x="457200" y="4754880"/>
+            <a:ext cx="8229600" cy="0"/>
+          </a:xfrm>
+          <a:prstGeom prst="rect">
+            <a:avLst/>
+          </a:prstGeom>
+          <a:noFill/>
+          <a:ln/>
+        </p:spPr>
+        <p:txBody>
+          <a:bodyPr wrap="square" rtlCol="0" anchor="ctr"/>
+          <a:lstStyle/>
+          <a:p>
+            <a:pPr indent="0" marL="0">
+              <a:buNone/>
+            </a:pPr>
+            <a:r>
+              <a:rPr lang="en-US" sz="1200" dirty="0">
+                <a:solidFill>
+                  <a:srgbClr val="6B7280"/>
+                </a:solidFill>
+              </a:rPr>
+              <a:t>4단계 계층 선택 방식</a:t>
+            </a:r>
+            <a:endParaRPr lang="en-US" sz="1200" dirty="0"/>
+          </a:p>
+        </p:txBody>
+      </p:sp>
+      <p:sp>
+        <p:nvSpPr>
+          <p:cNvPr id="25" name="Slide Number Placeholder 0"/>
+          <p:cNvSpPr>
+            <a:spLocks noGrp="1"/>
+          </p:cNvSpPr>
+          <p:nvPr>
+            <p:ph type="sldNum" sz="quarter" idx="4294967295"/>
+          </p:nvPr>
+        </p:nvSpPr>
+        <p:spPr>
+          <a:xfrm>
+            <a:off x="8686800" y="4937760"/>
+            <a:ext cx="800000" cy="300000"/>
+          </a:xfrm>
+          <a:prstGeom prst="rect">
+            <a:avLst/>
+          </a:prstGeom>
+          <a:extLst>
+            <a:ext uri="{C572A759-6A51-4108-AA02-DFA0A04FC94B}">
+              <ma14:wrappingTextBoxFlag xmlns:ma14="http://schemas.microsoft.com/office/mac/drawingml/2011/main" val="0"/>
+            </a:ext>
+          </a:extLst>
+        </p:spPr>
+        <p:txBody>
+          <a:bodyPr/>
+          <a:lstStyle>
+            <a:lvl1pPr>
+              <a:defRPr sz="1000">
+                <a:solidFill>
+                  <a:srgbClr val="FFFFFF"/>
+                </a:solidFill>
+              </a:defRPr>
+            </a:lvl1pPr>
+          </a:lstStyle>
+          <a:p>
+            <a:pPr algn="l"/>
+            <a:fld id="{F7021451-1387-4CA6-816F-3879F97B5CBC}" type="slidenum">
+              <a:rPr b="0" lang="en-US"/>
+              <a:t>6</a:t>
+            </a:fld>
+            <a:endParaRPr lang="en-US"/>
+          </a:p>
+        </p:txBody>
+      </p:sp>
+    </p:spTree>
+  </p:cSld>
+  <p:clrMapOvr>
+    <a:masterClrMapping/>
+  </p:clrMapOvr>
+</p:sld>
+</file>
+
+<file path=ppt/slides/slide7.xml><?xml version="1.0" encoding="utf-8"?>
+<p:sld xmlns:a="http://schemas.openxmlformats.org/drawingml/2006/main" xmlns:r="http://schemas.openxmlformats.org/officeDocument/2006/relationships" xmlns:p="http://schemas.openxmlformats.org/presentationml/2006/main">
+  <p:cSld name="Slide 7">
+    <p:spTree>
+      <p:nvGrpSpPr>
+        <p:cNvPr id="1" name=""/>
+        <p:cNvGrpSpPr/>
+        <p:nvPr/>
+      </p:nvGrpSpPr>
+      <p:grpSpPr>
+        <a:xfrm>
+          <a:off x="0" y="0"/>
+          <a:ext cx="0" cy="0"/>
+          <a:chOff x="0" y="0"/>
+          <a:chExt cx="0" cy="0"/>
+        </a:xfrm>
+      </p:grpSpPr>
+      <p:sp>
+        <p:nvSpPr>
+          <p:cNvPr id="2" name="Text 0"/>
+          <p:cNvSpPr/>
+          <p:nvPr/>
+        </p:nvSpPr>
+        <p:spPr>
+          <a:xfrm>
+            <a:off x="457200" y="274320"/>
+            <a:ext cx="8229600" cy="0"/>
+          </a:xfrm>
+          <a:prstGeom prst="rect">
+            <a:avLst/>
+          </a:prstGeom>
+          <a:noFill/>
+          <a:ln/>
+        </p:spPr>
+        <p:txBody>
+          <a:bodyPr wrap="square" rtlCol="0" anchor="ctr"/>
+          <a:lstStyle/>
+          <a:p>
+            <a:pPr indent="0" marL="0">
+              <a:buNone/>
+            </a:pPr>
+            <a:r>
+              <a:rPr lang="en-US" sz="2800" b="1" dirty="0">
+                <a:solidFill>
+                  <a:srgbClr val="1E40AF"/>
+                </a:solidFill>
+              </a:rPr>
+              <a:t>예산 정보 - 4단계 계층 선택</a:t>
+            </a:r>
+            <a:endParaRPr lang="en-US" sz="2800" dirty="0"/>
+          </a:p>
+        </p:txBody>
+      </p:sp>
       <p:graphicFrame>
         <p:nvGraphicFramePr>
-          <p:cNvPr id="6" name="Table 0"/>
+          <p:cNvPr id="8" name="Table 0"/>
           <p:cNvGraphicFramePr>
             <a:graphicFrameLocks noGrp="1"/>
           </p:cNvGraphicFramePr>
@@ -8202,1539 +12512,6 @@
             <a:pPr algn="l"/>
             <a:fld id="{F7021451-1387-4CA6-816F-3879F97B5CBC}" type="slidenum">
               <a:rPr b="0" lang="en-US"/>
-              <a:t>5</a:t>
-            </a:fld>
-            <a:endParaRPr lang="en-US"/>
-          </a:p>
-        </p:txBody>
-      </p:sp>
-    </p:spTree>
-  </p:cSld>
-  <p:clrMapOvr>
-    <a:masterClrMapping/>
-  </p:clrMapOvr>
-</p:sld>
-</file>
-
-<file path=ppt/slides/slide6.xml><?xml version="1.0" encoding="utf-8"?>
-<p:sld xmlns:a="http://schemas.openxmlformats.org/drawingml/2006/main" xmlns:r="http://schemas.openxmlformats.org/officeDocument/2006/relationships" xmlns:p="http://schemas.openxmlformats.org/presentationml/2006/main">
-  <p:cSld name="Slide 6">
-    <p:spTree>
-      <p:nvGrpSpPr>
-        <p:cNvPr id="1" name=""/>
-        <p:cNvGrpSpPr/>
-        <p:nvPr/>
-      </p:nvGrpSpPr>
-      <p:grpSpPr>
-        <a:xfrm>
-          <a:off x="0" y="0"/>
-          <a:ext cx="0" cy="0"/>
-          <a:chOff x="0" y="0"/>
-          <a:chExt cx="0" cy="0"/>
-        </a:xfrm>
-      </p:grpSpPr>
-      <p:sp>
-        <p:nvSpPr>
-          <p:cNvPr id="2" name="Text 0"/>
-          <p:cNvSpPr/>
-          <p:nvPr/>
-        </p:nvSpPr>
-        <p:spPr>
-          <a:xfrm>
-            <a:off x="457200" y="274320"/>
-            <a:ext cx="8229600" cy="0"/>
-          </a:xfrm>
-          <a:prstGeom prst="rect">
-            <a:avLst/>
-          </a:prstGeom>
-          <a:noFill/>
-          <a:ln/>
-        </p:spPr>
-        <p:txBody>
-          <a:bodyPr wrap="square" rtlCol="0" anchor="ctr"/>
-          <a:lstStyle/>
-          <a:p>
-            <a:pPr indent="0" marL="0">
-              <a:buNone/>
-            </a:pPr>
-            <a:r>
-              <a:rPr lang="en-US" sz="2800" b="1" dirty="0">
-                <a:solidFill>
-                  <a:srgbClr val="1E40AF"/>
-                </a:solidFill>
-              </a:rPr>
-              <a:t>예산 정보 선택 규칙</a:t>
-            </a:r>
-            <a:endParaRPr lang="en-US" sz="2800" dirty="0"/>
-          </a:p>
-        </p:txBody>
-      </p:sp>
-      <p:sp>
-        <p:nvSpPr>
-          <p:cNvPr id="3" name="Text 1"/>
-          <p:cNvSpPr/>
-          <p:nvPr/>
-        </p:nvSpPr>
-        <p:spPr>
-          <a:xfrm>
-            <a:off x="640080" y="914400"/>
-            <a:ext cx="7772400" cy="0"/>
-          </a:xfrm>
-          <a:prstGeom prst="rect">
-            <a:avLst/>
-          </a:prstGeom>
-          <a:noFill/>
-          <a:ln/>
-        </p:spPr>
-        <p:txBody>
-          <a:bodyPr wrap="square" rtlCol="0" anchor="ctr"/>
-          <a:lstStyle/>
-          <a:p>
-            <a:r>
-              <a:rPr lang="en-US" sz="1400" dirty="0">
-                <a:solidFill>
-                  <a:srgbClr val="374151"/>
-                </a:solidFill>
-              </a:rPr>
-              <a:t>상위 항목 선택 → 하위 항목 활성화</a:t>
-            </a:r>
-            <a:endParaRPr lang="en-US" sz="1400" dirty="0"/>
-          </a:p>
-        </p:txBody>
-      </p:sp>
-      <p:sp>
-        <p:nvSpPr>
-          <p:cNvPr id="4" name="Text 2"/>
-          <p:cNvSpPr/>
-          <p:nvPr/>
-        </p:nvSpPr>
-        <p:spPr>
-          <a:xfrm>
-            <a:off x="640080" y="1280160"/>
-            <a:ext cx="7772400" cy="0"/>
-          </a:xfrm>
-          <a:prstGeom prst="rect">
-            <a:avLst/>
-          </a:prstGeom>
-          <a:noFill/>
-          <a:ln/>
-        </p:spPr>
-        <p:txBody>
-          <a:bodyPr wrap="square" rtlCol="0" anchor="ctr"/>
-          <a:lstStyle/>
-          <a:p>
-            <a:r>
-              <a:rPr lang="en-US" sz="1400" dirty="0">
-                <a:solidFill>
-                  <a:srgbClr val="374151"/>
-                </a:solidFill>
-              </a:rPr>
-              <a:t>상위 항목 변경 시 하위 항목 초기화</a:t>
-            </a:r>
-            <a:endParaRPr lang="en-US" sz="1400" dirty="0"/>
-          </a:p>
-        </p:txBody>
-      </p:sp>
-      <p:sp>
-        <p:nvSpPr>
-          <p:cNvPr id="5" name="Text 3"/>
-          <p:cNvSpPr/>
-          <p:nvPr/>
-        </p:nvSpPr>
-        <p:spPr>
-          <a:xfrm>
-            <a:off x="640080" y="1645920"/>
-            <a:ext cx="7772400" cy="0"/>
-          </a:xfrm>
-          <a:prstGeom prst="rect">
-            <a:avLst/>
-          </a:prstGeom>
-          <a:noFill/>
-          <a:ln/>
-        </p:spPr>
-        <p:txBody>
-          <a:bodyPr wrap="square" rtlCol="0" anchor="ctr"/>
-          <a:lstStyle/>
-          <a:p>
-            <a:r>
-              <a:rPr lang="en-US" sz="1400" dirty="0">
-                <a:solidFill>
-                  <a:srgbClr val="374151"/>
-                </a:solidFill>
-              </a:rPr>
-              <a:t>예산(목)까지 선택해야 세목 선택 가능</a:t>
-            </a:r>
-            <a:endParaRPr lang="en-US" sz="1400" dirty="0"/>
-          </a:p>
-        </p:txBody>
-      </p:sp>
-      <p:sp>
-        <p:nvSpPr>
-          <p:cNvPr id="25" name="Slide Number Placeholder 0"/>
-          <p:cNvSpPr>
-            <a:spLocks noGrp="1"/>
-          </p:cNvSpPr>
-          <p:nvPr>
-            <p:ph type="sldNum" sz="quarter" idx="4294967295"/>
-          </p:nvPr>
-        </p:nvSpPr>
-        <p:spPr>
-          <a:xfrm>
-            <a:off x="8686800" y="4937760"/>
-            <a:ext cx="800000" cy="300000"/>
-          </a:xfrm>
-          <a:prstGeom prst="rect">
-            <a:avLst/>
-          </a:prstGeom>
-          <a:extLst>
-            <a:ext uri="{C572A759-6A51-4108-AA02-DFA0A04FC94B}">
-              <ma14:wrappingTextBoxFlag xmlns:ma14="http://schemas.microsoft.com/office/mac/drawingml/2011/main" val="0"/>
-            </a:ext>
-          </a:extLst>
-        </p:spPr>
-        <p:txBody>
-          <a:bodyPr/>
-          <a:lstStyle>
-            <a:lvl1pPr>
-              <a:defRPr sz="1000">
-                <a:solidFill>
-                  <a:srgbClr val="FFFFFF"/>
-                </a:solidFill>
-              </a:defRPr>
-            </a:lvl1pPr>
-          </a:lstStyle>
-          <a:p>
-            <a:pPr algn="l"/>
-            <a:fld id="{F7021451-1387-4CA6-816F-3879F97B5CBC}" type="slidenum">
-              <a:rPr b="0" lang="en-US"/>
-              <a:t>6</a:t>
-            </a:fld>
-            <a:endParaRPr lang="en-US"/>
-          </a:p>
-        </p:txBody>
-      </p:sp>
-    </p:spTree>
-  </p:cSld>
-  <p:clrMapOvr>
-    <a:masterClrMapping/>
-  </p:clrMapOvr>
-</p:sld>
-</file>
-
-<file path=ppt/slides/slide7.xml><?xml version="1.0" encoding="utf-8"?>
-<p:sld xmlns:a="http://schemas.openxmlformats.org/drawingml/2006/main" xmlns:r="http://schemas.openxmlformats.org/officeDocument/2006/relationships" xmlns:p="http://schemas.openxmlformats.org/presentationml/2006/main">
-  <p:cSld name="Slide 7">
-    <p:spTree>
-      <p:nvGrpSpPr>
-        <p:cNvPr id="1" name=""/>
-        <p:cNvGrpSpPr/>
-        <p:nvPr/>
-      </p:nvGrpSpPr>
-      <p:grpSpPr>
-        <a:xfrm>
-          <a:off x="0" y="0"/>
-          <a:ext cx="0" cy="0"/>
-          <a:chOff x="0" y="0"/>
-          <a:chExt cx="0" cy="0"/>
-        </a:xfrm>
-      </p:grpSpPr>
-      <p:sp>
-        <p:nvSpPr>
-          <p:cNvPr id="2" name="Text 0"/>
-          <p:cNvSpPr/>
-          <p:nvPr/>
-        </p:nvSpPr>
-        <p:spPr>
-          <a:xfrm>
-            <a:off x="457200" y="274320"/>
-            <a:ext cx="8229600" cy="0"/>
-          </a:xfrm>
-          <a:prstGeom prst="rect">
-            <a:avLst/>
-          </a:prstGeom>
-          <a:noFill/>
-          <a:ln/>
-        </p:spPr>
-        <p:txBody>
-          <a:bodyPr wrap="square" rtlCol="0" anchor="ctr"/>
-          <a:lstStyle/>
-          <a:p>
-            <a:pPr indent="0" marL="0">
-              <a:buNone/>
-            </a:pPr>
-            <a:r>
-              <a:rPr lang="en-US" sz="2800" b="1" dirty="0">
-                <a:solidFill>
-                  <a:srgbClr val="1E40AF"/>
-                </a:solidFill>
-              </a:rPr>
-              <a:t>2단계: 세부 항목 입력 (1~10개)</a:t>
-            </a:r>
-            <a:endParaRPr lang="en-US" sz="2800" dirty="0"/>
-          </a:p>
-        </p:txBody>
-      </p:sp>
-      <p:graphicFrame>
-        <p:nvGraphicFramePr>
-          <p:cNvPr id="8" name="Table 0"/>
-          <p:cNvGraphicFramePr>
-            <a:graphicFrameLocks noGrp="1"/>
-          </p:cNvGraphicFramePr>
-          <p:nvPr>
-            <p:extLst>
-              <p:ext uri="{D42A27DB-BD31-4B8C-83A1-F6EECF244321}">
-                <p14:modId xmlns:p14="http://schemas.microsoft.com/office/powerpoint/2010/main" val="1579011935"/>
-              </p:ext>
-            </p:extLst>
-          </p:nvPr>
-        </p:nvGraphicFramePr>
-        <p:xfrm>
-          <a:off x="457200" y="914400"/>
-          <a:ext cx="8229600" cy="914400"/>
-        </p:xfrm>
-        <a:graphic>
-          <a:graphicData uri="http://schemas.openxmlformats.org/drawingml/2006/table">
-            <a:tbl>
-              <a:tblPr/>
-              <a:tblGrid>
-                <a:gridCol w="2743200"/>
-                <a:gridCol w="2743200"/>
-                <a:gridCol w="2743200"/>
-              </a:tblGrid>
-              <a:tr h="0">
-                <a:tc>
-                  <a:txBody>
-                    <a:bodyPr/>
-                    <a:lstStyle/>
-                    <a:p>
-                      <a:pPr indent="0" marL="0">
-                        <a:buNone/>
-                      </a:pPr>
-                      <a:r>
-                        <a:rPr lang="en-US" sz="1200" b="1" dirty="0">
-                          <a:solidFill>
-                            <a:srgbClr val="FFFFFF"/>
-                          </a:solidFill>
-                          <a:latin typeface="Apple SD Gothic Neo" pitchFamily="34" charset="0"/>
-                          <a:ea typeface="Apple SD Gothic Neo" pitchFamily="34" charset="-122"/>
-                          <a:cs typeface="Apple SD Gothic Neo" pitchFamily="34" charset="-120"/>
-                        </a:rPr>
-                        <a:t>필드</a:t>
-                      </a:r>
-                      <a:endParaRPr lang="en-US" sz="1200" dirty="0">
-                        <a:latin typeface="Apple SD Gothic Neo" charset="0"/>
-                        <a:ea typeface="Apple SD Gothic Neo" charset="0"/>
-                        <a:cs typeface="Apple SD Gothic Neo" charset="0"/>
-                      </a:endParaRPr>
-                    </a:p>
-                  </a:txBody>
-                  <a:tcPr marL="91440" marR="91440" marT="45720" marB="45720">
-                    <a:lnL w="6350" cap="flat" cmpd="sng" algn="ctr">
-                      <a:solidFill>
-                        <a:srgbClr val="E5E7EB"/>
-                      </a:solidFill>
-                      <a:prstDash val="solid"/>
-                      <a:round/>
-                      <a:headEnd type="none" w="med" len="med"/>
-                      <a:tailEnd type="none" w="med" len="med"/>
-                    </a:lnL>
-                    <a:lnR w="6350" cap="flat" cmpd="sng" algn="ctr">
-                      <a:solidFill>
-                        <a:srgbClr val="E5E7EB"/>
-                      </a:solidFill>
-                      <a:prstDash val="solid"/>
-                      <a:round/>
-                      <a:headEnd type="none" w="med" len="med"/>
-                      <a:tailEnd type="none" w="med" len="med"/>
-                    </a:lnR>
-                    <a:lnT w="6350" cap="flat" cmpd="sng" algn="ctr">
-                      <a:solidFill>
-                        <a:srgbClr val="E5E7EB"/>
-                      </a:solidFill>
-                      <a:prstDash val="solid"/>
-                      <a:round/>
-                      <a:headEnd type="none" w="med" len="med"/>
-                      <a:tailEnd type="none" w="med" len="med"/>
-                    </a:lnT>
-                    <a:lnB w="6350" cap="flat" cmpd="sng" algn="ctr">
-                      <a:solidFill>
-                        <a:srgbClr val="E5E7EB"/>
-                      </a:solidFill>
-                      <a:prstDash val="solid"/>
-                      <a:round/>
-                      <a:headEnd type="none" w="med" len="med"/>
-                      <a:tailEnd type="none" w="med" len="med"/>
-                    </a:lnB>
-                    <a:solidFill>
-                      <a:srgbClr val="3B82F6"/>
-                    </a:solidFill>
-                  </a:tcPr>
-                </a:tc>
-                <a:tc>
-                  <a:txBody>
-                    <a:bodyPr/>
-                    <a:lstStyle/>
-                    <a:p>
-                      <a:pPr indent="0" marL="0">
-                        <a:buNone/>
-                      </a:pPr>
-                      <a:r>
-                        <a:rPr lang="en-US" sz="1200" b="1" dirty="0">
-                          <a:solidFill>
-                            <a:srgbClr val="FFFFFF"/>
-                          </a:solidFill>
-                          <a:latin typeface="Apple SD Gothic Neo" pitchFamily="34" charset="0"/>
-                          <a:ea typeface="Apple SD Gothic Neo" pitchFamily="34" charset="-122"/>
-                          <a:cs typeface="Apple SD Gothic Neo" pitchFamily="34" charset="-120"/>
-                        </a:rPr>
-                        <a:t>설명</a:t>
-                      </a:r>
-                      <a:endParaRPr lang="en-US" sz="1200" dirty="0">
-                        <a:latin typeface="Apple SD Gothic Neo" charset="0"/>
-                        <a:ea typeface="Apple SD Gothic Neo" charset="0"/>
-                        <a:cs typeface="Apple SD Gothic Neo" charset="0"/>
-                      </a:endParaRPr>
-                    </a:p>
-                  </a:txBody>
-                  <a:tcPr marL="91440" marR="91440" marT="45720" marB="45720">
-                    <a:lnL w="6350" cap="flat" cmpd="sng" algn="ctr">
-                      <a:solidFill>
-                        <a:srgbClr val="E5E7EB"/>
-                      </a:solidFill>
-                      <a:prstDash val="solid"/>
-                      <a:round/>
-                      <a:headEnd type="none" w="med" len="med"/>
-                      <a:tailEnd type="none" w="med" len="med"/>
-                    </a:lnL>
-                    <a:lnR w="6350" cap="flat" cmpd="sng" algn="ctr">
-                      <a:solidFill>
-                        <a:srgbClr val="E5E7EB"/>
-                      </a:solidFill>
-                      <a:prstDash val="solid"/>
-                      <a:round/>
-                      <a:headEnd type="none" w="med" len="med"/>
-                      <a:tailEnd type="none" w="med" len="med"/>
-                    </a:lnR>
-                    <a:lnT w="6350" cap="flat" cmpd="sng" algn="ctr">
-                      <a:solidFill>
-                        <a:srgbClr val="E5E7EB"/>
-                      </a:solidFill>
-                      <a:prstDash val="solid"/>
-                      <a:round/>
-                      <a:headEnd type="none" w="med" len="med"/>
-                      <a:tailEnd type="none" w="med" len="med"/>
-                    </a:lnT>
-                    <a:lnB w="6350" cap="flat" cmpd="sng" algn="ctr">
-                      <a:solidFill>
-                        <a:srgbClr val="E5E7EB"/>
-                      </a:solidFill>
-                      <a:prstDash val="solid"/>
-                      <a:round/>
-                      <a:headEnd type="none" w="med" len="med"/>
-                      <a:tailEnd type="none" w="med" len="med"/>
-                    </a:lnB>
-                    <a:solidFill>
-                      <a:srgbClr val="3B82F6"/>
-                    </a:solidFill>
-                  </a:tcPr>
-                </a:tc>
-                <a:tc>
-                  <a:txBody>
-                    <a:bodyPr/>
-                    <a:lstStyle/>
-                    <a:p>
-                      <a:pPr indent="0" marL="0">
-                        <a:buNone/>
-                      </a:pPr>
-                      <a:r>
-                        <a:rPr lang="en-US" sz="1200" b="1" dirty="0">
-                          <a:solidFill>
-                            <a:srgbClr val="FFFFFF"/>
-                          </a:solidFill>
-                          <a:latin typeface="Apple SD Gothic Neo" pitchFamily="34" charset="0"/>
-                          <a:ea typeface="Apple SD Gothic Neo" pitchFamily="34" charset="-122"/>
-                          <a:cs typeface="Apple SD Gothic Neo" pitchFamily="34" charset="-120"/>
-                        </a:rPr>
-                        <a:t>필수</a:t>
-                      </a:r>
-                      <a:endParaRPr lang="en-US" sz="1200" dirty="0">
-                        <a:latin typeface="Apple SD Gothic Neo" charset="0"/>
-                        <a:ea typeface="Apple SD Gothic Neo" charset="0"/>
-                        <a:cs typeface="Apple SD Gothic Neo" charset="0"/>
-                      </a:endParaRPr>
-                    </a:p>
-                  </a:txBody>
-                  <a:tcPr marL="91440" marR="91440" marT="45720" marB="45720">
-                    <a:lnL w="6350" cap="flat" cmpd="sng" algn="ctr">
-                      <a:solidFill>
-                        <a:srgbClr val="E5E7EB"/>
-                      </a:solidFill>
-                      <a:prstDash val="solid"/>
-                      <a:round/>
-                      <a:headEnd type="none" w="med" len="med"/>
-                      <a:tailEnd type="none" w="med" len="med"/>
-                    </a:lnL>
-                    <a:lnR w="6350" cap="flat" cmpd="sng" algn="ctr">
-                      <a:solidFill>
-                        <a:srgbClr val="E5E7EB"/>
-                      </a:solidFill>
-                      <a:prstDash val="solid"/>
-                      <a:round/>
-                      <a:headEnd type="none" w="med" len="med"/>
-                      <a:tailEnd type="none" w="med" len="med"/>
-                    </a:lnR>
-                    <a:lnT w="6350" cap="flat" cmpd="sng" algn="ctr">
-                      <a:solidFill>
-                        <a:srgbClr val="E5E7EB"/>
-                      </a:solidFill>
-                      <a:prstDash val="solid"/>
-                      <a:round/>
-                      <a:headEnd type="none" w="med" len="med"/>
-                      <a:tailEnd type="none" w="med" len="med"/>
-                    </a:lnT>
-                    <a:lnB w="6350" cap="flat" cmpd="sng" algn="ctr">
-                      <a:solidFill>
-                        <a:srgbClr val="E5E7EB"/>
-                      </a:solidFill>
-                      <a:prstDash val="solid"/>
-                      <a:round/>
-                      <a:headEnd type="none" w="med" len="med"/>
-                      <a:tailEnd type="none" w="med" len="med"/>
-                    </a:lnB>
-                    <a:solidFill>
-                      <a:srgbClr val="3B82F6"/>
-                    </a:solidFill>
-                  </a:tcPr>
-                </a:tc>
-              </a:tr>
-              <a:tr h="0">
-                <a:tc>
-                  <a:txBody>
-                    <a:bodyPr/>
-                    <a:lstStyle/>
-                    <a:p>
-                      <a:pPr indent="0" marL="0">
-                        <a:buNone/>
-                      </a:pPr>
-                      <a:r>
-                        <a:rPr lang="en-US" sz="1100" dirty="0">
-                          <a:solidFill>
-                            <a:srgbClr val="374151"/>
-                          </a:solidFill>
-                          <a:latin typeface="Apple SD Gothic Neo" pitchFamily="34" charset="0"/>
-                          <a:ea typeface="Apple SD Gothic Neo" pitchFamily="34" charset="-122"/>
-                          <a:cs typeface="Apple SD Gothic Neo" pitchFamily="34" charset="-120"/>
-                        </a:rPr>
-                        <a:t>예산(세목)</a:t>
-                      </a:r>
-                      <a:endParaRPr lang="en-US" sz="1100" dirty="0">
-                        <a:latin typeface="Apple SD Gothic Neo" charset="0"/>
-                        <a:ea typeface="Apple SD Gothic Neo" charset="0"/>
-                        <a:cs typeface="Apple SD Gothic Neo" charset="0"/>
-                      </a:endParaRPr>
-                    </a:p>
-                  </a:txBody>
-                  <a:tcPr marL="91440" marR="91440" marT="45720" marB="45720">
-                    <a:lnL w="6350" cap="flat" cmpd="sng" algn="ctr">
-                      <a:solidFill>
-                        <a:srgbClr val="E5E7EB"/>
-                      </a:solidFill>
-                      <a:prstDash val="solid"/>
-                      <a:round/>
-                      <a:headEnd type="none" w="med" len="med"/>
-                      <a:tailEnd type="none" w="med" len="med"/>
-                    </a:lnL>
-                    <a:lnR w="6350" cap="flat" cmpd="sng" algn="ctr">
-                      <a:solidFill>
-                        <a:srgbClr val="E5E7EB"/>
-                      </a:solidFill>
-                      <a:prstDash val="solid"/>
-                      <a:round/>
-                      <a:headEnd type="none" w="med" len="med"/>
-                      <a:tailEnd type="none" w="med" len="med"/>
-                    </a:lnR>
-                    <a:lnT w="6350" cap="flat" cmpd="sng" algn="ctr">
-                      <a:solidFill>
-                        <a:srgbClr val="E5E7EB"/>
-                      </a:solidFill>
-                      <a:prstDash val="solid"/>
-                      <a:round/>
-                      <a:headEnd type="none" w="med" len="med"/>
-                      <a:tailEnd type="none" w="med" len="med"/>
-                    </a:lnT>
-                    <a:lnB w="6350" cap="flat" cmpd="sng" algn="ctr">
-                      <a:solidFill>
-                        <a:srgbClr val="E5E7EB"/>
-                      </a:solidFill>
-                      <a:prstDash val="solid"/>
-                      <a:round/>
-                      <a:headEnd type="none" w="med" len="med"/>
-                      <a:tailEnd type="none" w="med" len="med"/>
-                    </a:lnB>
-                  </a:tcPr>
-                </a:tc>
-                <a:tc>
-                  <a:txBody>
-                    <a:bodyPr/>
-                    <a:lstStyle/>
-                    <a:p>
-                      <a:pPr indent="0" marL="0">
-                        <a:buNone/>
-                      </a:pPr>
-                      <a:r>
-                        <a:rPr lang="en-US" sz="1100" dirty="0">
-                          <a:solidFill>
-                            <a:srgbClr val="374151"/>
-                          </a:solidFill>
-                          <a:latin typeface="Apple SD Gothic Neo" pitchFamily="34" charset="0"/>
-                          <a:ea typeface="Apple SD Gothic Neo" pitchFamily="34" charset="-122"/>
-                          <a:cs typeface="Apple SD Gothic Neo" pitchFamily="34" charset="-120"/>
-                        </a:rPr>
-                        <a:t>드롭다운 선택</a:t>
-                      </a:r>
-                      <a:endParaRPr lang="en-US" sz="1100" dirty="0">
-                        <a:latin typeface="Apple SD Gothic Neo" charset="0"/>
-                        <a:ea typeface="Apple SD Gothic Neo" charset="0"/>
-                        <a:cs typeface="Apple SD Gothic Neo" charset="0"/>
-                      </a:endParaRPr>
-                    </a:p>
-                  </a:txBody>
-                  <a:tcPr marL="91440" marR="91440" marT="45720" marB="45720">
-                    <a:lnL w="6350" cap="flat" cmpd="sng" algn="ctr">
-                      <a:solidFill>
-                        <a:srgbClr val="E5E7EB"/>
-                      </a:solidFill>
-                      <a:prstDash val="solid"/>
-                      <a:round/>
-                      <a:headEnd type="none" w="med" len="med"/>
-                      <a:tailEnd type="none" w="med" len="med"/>
-                    </a:lnL>
-                    <a:lnR w="6350" cap="flat" cmpd="sng" algn="ctr">
-                      <a:solidFill>
-                        <a:srgbClr val="E5E7EB"/>
-                      </a:solidFill>
-                      <a:prstDash val="solid"/>
-                      <a:round/>
-                      <a:headEnd type="none" w="med" len="med"/>
-                      <a:tailEnd type="none" w="med" len="med"/>
-                    </a:lnR>
-                    <a:lnT w="6350" cap="flat" cmpd="sng" algn="ctr">
-                      <a:solidFill>
-                        <a:srgbClr val="E5E7EB"/>
-                      </a:solidFill>
-                      <a:prstDash val="solid"/>
-                      <a:round/>
-                      <a:headEnd type="none" w="med" len="med"/>
-                      <a:tailEnd type="none" w="med" len="med"/>
-                    </a:lnT>
-                    <a:lnB w="6350" cap="flat" cmpd="sng" algn="ctr">
-                      <a:solidFill>
-                        <a:srgbClr val="E5E7EB"/>
-                      </a:solidFill>
-                      <a:prstDash val="solid"/>
-                      <a:round/>
-                      <a:headEnd type="none" w="med" len="med"/>
-                      <a:tailEnd type="none" w="med" len="med"/>
-                    </a:lnB>
-                  </a:tcPr>
-                </a:tc>
-                <a:tc>
-                  <a:txBody>
-                    <a:bodyPr/>
-                    <a:lstStyle/>
-                    <a:p>
-                      <a:pPr indent="0" marL="0">
-                        <a:buNone/>
-                      </a:pPr>
-                      <a:r>
-                        <a:rPr lang="en-US" sz="1100" dirty="0">
-                          <a:solidFill>
-                            <a:srgbClr val="374151"/>
-                          </a:solidFill>
-                          <a:latin typeface="Apple SD Gothic Neo" pitchFamily="34" charset="0"/>
-                          <a:ea typeface="Apple SD Gothic Neo" pitchFamily="34" charset="-122"/>
-                          <a:cs typeface="Apple SD Gothic Neo" pitchFamily="34" charset="-120"/>
-                        </a:rPr>
-                        <a:t>O</a:t>
-                      </a:r>
-                      <a:endParaRPr lang="en-US" sz="1100" dirty="0">
-                        <a:latin typeface="Apple SD Gothic Neo" charset="0"/>
-                        <a:ea typeface="Apple SD Gothic Neo" charset="0"/>
-                        <a:cs typeface="Apple SD Gothic Neo" charset="0"/>
-                      </a:endParaRPr>
-                    </a:p>
-                  </a:txBody>
-                  <a:tcPr marL="91440" marR="91440" marT="45720" marB="45720">
-                    <a:lnL w="6350" cap="flat" cmpd="sng" algn="ctr">
-                      <a:solidFill>
-                        <a:srgbClr val="E5E7EB"/>
-                      </a:solidFill>
-                      <a:prstDash val="solid"/>
-                      <a:round/>
-                      <a:headEnd type="none" w="med" len="med"/>
-                      <a:tailEnd type="none" w="med" len="med"/>
-                    </a:lnL>
-                    <a:lnR w="6350" cap="flat" cmpd="sng" algn="ctr">
-                      <a:solidFill>
-                        <a:srgbClr val="E5E7EB"/>
-                      </a:solidFill>
-                      <a:prstDash val="solid"/>
-                      <a:round/>
-                      <a:headEnd type="none" w="med" len="med"/>
-                      <a:tailEnd type="none" w="med" len="med"/>
-                    </a:lnR>
-                    <a:lnT w="6350" cap="flat" cmpd="sng" algn="ctr">
-                      <a:solidFill>
-                        <a:srgbClr val="E5E7EB"/>
-                      </a:solidFill>
-                      <a:prstDash val="solid"/>
-                      <a:round/>
-                      <a:headEnd type="none" w="med" len="med"/>
-                      <a:tailEnd type="none" w="med" len="med"/>
-                    </a:lnT>
-                    <a:lnB w="6350" cap="flat" cmpd="sng" algn="ctr">
-                      <a:solidFill>
-                        <a:srgbClr val="E5E7EB"/>
-                      </a:solidFill>
-                      <a:prstDash val="solid"/>
-                      <a:round/>
-                      <a:headEnd type="none" w="med" len="med"/>
-                      <a:tailEnd type="none" w="med" len="med"/>
-                    </a:lnB>
-                  </a:tcPr>
-                </a:tc>
-              </a:tr>
-              <a:tr h="0">
-                <a:tc>
-                  <a:txBody>
-                    <a:bodyPr/>
-                    <a:lstStyle/>
-                    <a:p>
-                      <a:pPr indent="0" marL="0">
-                        <a:buNone/>
-                      </a:pPr>
-                      <a:r>
-                        <a:rPr lang="en-US" sz="1100" dirty="0">
-                          <a:solidFill>
-                            <a:srgbClr val="374151"/>
-                          </a:solidFill>
-                          <a:latin typeface="Apple SD Gothic Neo" pitchFamily="34" charset="0"/>
-                          <a:ea typeface="Apple SD Gothic Neo" pitchFamily="34" charset="-122"/>
-                          <a:cs typeface="Apple SD Gothic Neo" pitchFamily="34" charset="-120"/>
-                        </a:rPr>
-                        <a:t>적요</a:t>
-                      </a:r>
-                      <a:endParaRPr lang="en-US" sz="1100" dirty="0">
-                        <a:latin typeface="Apple SD Gothic Neo" charset="0"/>
-                        <a:ea typeface="Apple SD Gothic Neo" charset="0"/>
-                        <a:cs typeface="Apple SD Gothic Neo" charset="0"/>
-                      </a:endParaRPr>
-                    </a:p>
-                  </a:txBody>
-                  <a:tcPr marL="91440" marR="91440" marT="45720" marB="45720">
-                    <a:lnL w="6350" cap="flat" cmpd="sng" algn="ctr">
-                      <a:solidFill>
-                        <a:srgbClr val="E5E7EB"/>
-                      </a:solidFill>
-                      <a:prstDash val="solid"/>
-                      <a:round/>
-                      <a:headEnd type="none" w="med" len="med"/>
-                      <a:tailEnd type="none" w="med" len="med"/>
-                    </a:lnL>
-                    <a:lnR w="6350" cap="flat" cmpd="sng" algn="ctr">
-                      <a:solidFill>
-                        <a:srgbClr val="E5E7EB"/>
-                      </a:solidFill>
-                      <a:prstDash val="solid"/>
-                      <a:round/>
-                      <a:headEnd type="none" w="med" len="med"/>
-                      <a:tailEnd type="none" w="med" len="med"/>
-                    </a:lnR>
-                    <a:lnT w="6350" cap="flat" cmpd="sng" algn="ctr">
-                      <a:solidFill>
-                        <a:srgbClr val="E5E7EB"/>
-                      </a:solidFill>
-                      <a:prstDash val="solid"/>
-                      <a:round/>
-                      <a:headEnd type="none" w="med" len="med"/>
-                      <a:tailEnd type="none" w="med" len="med"/>
-                    </a:lnT>
-                    <a:lnB w="6350" cap="flat" cmpd="sng" algn="ctr">
-                      <a:solidFill>
-                        <a:srgbClr val="E5E7EB"/>
-                      </a:solidFill>
-                      <a:prstDash val="solid"/>
-                      <a:round/>
-                      <a:headEnd type="none" w="med" len="med"/>
-                      <a:tailEnd type="none" w="med" len="med"/>
-                    </a:lnB>
-                  </a:tcPr>
-                </a:tc>
-                <a:tc>
-                  <a:txBody>
-                    <a:bodyPr/>
-                    <a:lstStyle/>
-                    <a:p>
-                      <a:pPr indent="0" marL="0">
-                        <a:buNone/>
-                      </a:pPr>
-                      <a:r>
-                        <a:rPr lang="en-US" sz="1100" dirty="0">
-                          <a:solidFill>
-                            <a:srgbClr val="374151"/>
-                          </a:solidFill>
-                          <a:latin typeface="Apple SD Gothic Neo" pitchFamily="34" charset="0"/>
-                          <a:ea typeface="Apple SD Gothic Neo" pitchFamily="34" charset="-122"/>
-                          <a:cs typeface="Apple SD Gothic Neo" pitchFamily="34" charset="-120"/>
-                        </a:rPr>
-                        <a:t>지출 상세 설명</a:t>
-                      </a:r>
-                      <a:endParaRPr lang="en-US" sz="1100" dirty="0">
-                        <a:latin typeface="Apple SD Gothic Neo" charset="0"/>
-                        <a:ea typeface="Apple SD Gothic Neo" charset="0"/>
-                        <a:cs typeface="Apple SD Gothic Neo" charset="0"/>
-                      </a:endParaRPr>
-                    </a:p>
-                  </a:txBody>
-                  <a:tcPr marL="91440" marR="91440" marT="45720" marB="45720">
-                    <a:lnL w="6350" cap="flat" cmpd="sng" algn="ctr">
-                      <a:solidFill>
-                        <a:srgbClr val="E5E7EB"/>
-                      </a:solidFill>
-                      <a:prstDash val="solid"/>
-                      <a:round/>
-                      <a:headEnd type="none" w="med" len="med"/>
-                      <a:tailEnd type="none" w="med" len="med"/>
-                    </a:lnL>
-                    <a:lnR w="6350" cap="flat" cmpd="sng" algn="ctr">
-                      <a:solidFill>
-                        <a:srgbClr val="E5E7EB"/>
-                      </a:solidFill>
-                      <a:prstDash val="solid"/>
-                      <a:round/>
-                      <a:headEnd type="none" w="med" len="med"/>
-                      <a:tailEnd type="none" w="med" len="med"/>
-                    </a:lnR>
-                    <a:lnT w="6350" cap="flat" cmpd="sng" algn="ctr">
-                      <a:solidFill>
-                        <a:srgbClr val="E5E7EB"/>
-                      </a:solidFill>
-                      <a:prstDash val="solid"/>
-                      <a:round/>
-                      <a:headEnd type="none" w="med" len="med"/>
-                      <a:tailEnd type="none" w="med" len="med"/>
-                    </a:lnT>
-                    <a:lnB w="6350" cap="flat" cmpd="sng" algn="ctr">
-                      <a:solidFill>
-                        <a:srgbClr val="E5E7EB"/>
-                      </a:solidFill>
-                      <a:prstDash val="solid"/>
-                      <a:round/>
-                      <a:headEnd type="none" w="med" len="med"/>
-                      <a:tailEnd type="none" w="med" len="med"/>
-                    </a:lnB>
-                  </a:tcPr>
-                </a:tc>
-                <a:tc>
-                  <a:txBody>
-                    <a:bodyPr/>
-                    <a:lstStyle/>
-                    <a:p>
-                      <a:pPr indent="0" marL="0">
-                        <a:buNone/>
-                      </a:pPr>
-                      <a:r>
-                        <a:rPr lang="en-US" sz="1100" dirty="0">
-                          <a:solidFill>
-                            <a:srgbClr val="374151"/>
-                          </a:solidFill>
-                          <a:latin typeface="Apple SD Gothic Neo" pitchFamily="34" charset="0"/>
-                          <a:ea typeface="Apple SD Gothic Neo" pitchFamily="34" charset="-122"/>
-                          <a:cs typeface="Apple SD Gothic Neo" pitchFamily="34" charset="-120"/>
-                        </a:rPr>
-                        <a:t>O</a:t>
-                      </a:r>
-                      <a:endParaRPr lang="en-US" sz="1100" dirty="0">
-                        <a:latin typeface="Apple SD Gothic Neo" charset="0"/>
-                        <a:ea typeface="Apple SD Gothic Neo" charset="0"/>
-                        <a:cs typeface="Apple SD Gothic Neo" charset="0"/>
-                      </a:endParaRPr>
-                    </a:p>
-                  </a:txBody>
-                  <a:tcPr marL="91440" marR="91440" marT="45720" marB="45720">
-                    <a:lnL w="6350" cap="flat" cmpd="sng" algn="ctr">
-                      <a:solidFill>
-                        <a:srgbClr val="E5E7EB"/>
-                      </a:solidFill>
-                      <a:prstDash val="solid"/>
-                      <a:round/>
-                      <a:headEnd type="none" w="med" len="med"/>
-                      <a:tailEnd type="none" w="med" len="med"/>
-                    </a:lnL>
-                    <a:lnR w="6350" cap="flat" cmpd="sng" algn="ctr">
-                      <a:solidFill>
-                        <a:srgbClr val="E5E7EB"/>
-                      </a:solidFill>
-                      <a:prstDash val="solid"/>
-                      <a:round/>
-                      <a:headEnd type="none" w="med" len="med"/>
-                      <a:tailEnd type="none" w="med" len="med"/>
-                    </a:lnR>
-                    <a:lnT w="6350" cap="flat" cmpd="sng" algn="ctr">
-                      <a:solidFill>
-                        <a:srgbClr val="E5E7EB"/>
-                      </a:solidFill>
-                      <a:prstDash val="solid"/>
-                      <a:round/>
-                      <a:headEnd type="none" w="med" len="med"/>
-                      <a:tailEnd type="none" w="med" len="med"/>
-                    </a:lnT>
-                    <a:lnB w="6350" cap="flat" cmpd="sng" algn="ctr">
-                      <a:solidFill>
-                        <a:srgbClr val="E5E7EB"/>
-                      </a:solidFill>
-                      <a:prstDash val="solid"/>
-                      <a:round/>
-                      <a:headEnd type="none" w="med" len="med"/>
-                      <a:tailEnd type="none" w="med" len="med"/>
-                    </a:lnB>
-                  </a:tcPr>
-                </a:tc>
-              </a:tr>
-              <a:tr h="0">
-                <a:tc>
-                  <a:txBody>
-                    <a:bodyPr/>
-                    <a:lstStyle/>
-                    <a:p>
-                      <a:pPr indent="0" marL="0">
-                        <a:buNone/>
-                      </a:pPr>
-                      <a:r>
-                        <a:rPr lang="en-US" sz="1100" dirty="0">
-                          <a:solidFill>
-                            <a:srgbClr val="374151"/>
-                          </a:solidFill>
-                          <a:latin typeface="Apple SD Gothic Neo" pitchFamily="34" charset="0"/>
-                          <a:ea typeface="Apple SD Gothic Neo" pitchFamily="34" charset="-122"/>
-                          <a:cs typeface="Apple SD Gothic Neo" pitchFamily="34" charset="-120"/>
-                        </a:rPr>
-                        <a:t>단가</a:t>
-                      </a:r>
-                      <a:endParaRPr lang="en-US" sz="1100" dirty="0">
-                        <a:latin typeface="Apple SD Gothic Neo" charset="0"/>
-                        <a:ea typeface="Apple SD Gothic Neo" charset="0"/>
-                        <a:cs typeface="Apple SD Gothic Neo" charset="0"/>
-                      </a:endParaRPr>
-                    </a:p>
-                  </a:txBody>
-                  <a:tcPr marL="91440" marR="91440" marT="45720" marB="45720">
-                    <a:lnL w="6350" cap="flat" cmpd="sng" algn="ctr">
-                      <a:solidFill>
-                        <a:srgbClr val="E5E7EB"/>
-                      </a:solidFill>
-                      <a:prstDash val="solid"/>
-                      <a:round/>
-                      <a:headEnd type="none" w="med" len="med"/>
-                      <a:tailEnd type="none" w="med" len="med"/>
-                    </a:lnL>
-                    <a:lnR w="6350" cap="flat" cmpd="sng" algn="ctr">
-                      <a:solidFill>
-                        <a:srgbClr val="E5E7EB"/>
-                      </a:solidFill>
-                      <a:prstDash val="solid"/>
-                      <a:round/>
-                      <a:headEnd type="none" w="med" len="med"/>
-                      <a:tailEnd type="none" w="med" len="med"/>
-                    </a:lnR>
-                    <a:lnT w="6350" cap="flat" cmpd="sng" algn="ctr">
-                      <a:solidFill>
-                        <a:srgbClr val="E5E7EB"/>
-                      </a:solidFill>
-                      <a:prstDash val="solid"/>
-                      <a:round/>
-                      <a:headEnd type="none" w="med" len="med"/>
-                      <a:tailEnd type="none" w="med" len="med"/>
-                    </a:lnT>
-                    <a:lnB w="6350" cap="flat" cmpd="sng" algn="ctr">
-                      <a:solidFill>
-                        <a:srgbClr val="E5E7EB"/>
-                      </a:solidFill>
-                      <a:prstDash val="solid"/>
-                      <a:round/>
-                      <a:headEnd type="none" w="med" len="med"/>
-                      <a:tailEnd type="none" w="med" len="med"/>
-                    </a:lnB>
-                  </a:tcPr>
-                </a:tc>
-                <a:tc>
-                  <a:txBody>
-                    <a:bodyPr/>
-                    <a:lstStyle/>
-                    <a:p>
-                      <a:pPr indent="0" marL="0">
-                        <a:buNone/>
-                      </a:pPr>
-                      <a:r>
-                        <a:rPr lang="en-US" sz="1100" dirty="0">
-                          <a:solidFill>
-                            <a:srgbClr val="374151"/>
-                          </a:solidFill>
-                          <a:latin typeface="Apple SD Gothic Neo" pitchFamily="34" charset="0"/>
-                          <a:ea typeface="Apple SD Gothic Neo" pitchFamily="34" charset="-122"/>
-                          <a:cs typeface="Apple SD Gothic Neo" pitchFamily="34" charset="-120"/>
-                        </a:rPr>
-                        <a:t>건당 금액 (원)</a:t>
-                      </a:r>
-                      <a:endParaRPr lang="en-US" sz="1100" dirty="0">
-                        <a:latin typeface="Apple SD Gothic Neo" charset="0"/>
-                        <a:ea typeface="Apple SD Gothic Neo" charset="0"/>
-                        <a:cs typeface="Apple SD Gothic Neo" charset="0"/>
-                      </a:endParaRPr>
-                    </a:p>
-                  </a:txBody>
-                  <a:tcPr marL="91440" marR="91440" marT="45720" marB="45720">
-                    <a:lnL w="6350" cap="flat" cmpd="sng" algn="ctr">
-                      <a:solidFill>
-                        <a:srgbClr val="E5E7EB"/>
-                      </a:solidFill>
-                      <a:prstDash val="solid"/>
-                      <a:round/>
-                      <a:headEnd type="none" w="med" len="med"/>
-                      <a:tailEnd type="none" w="med" len="med"/>
-                    </a:lnL>
-                    <a:lnR w="6350" cap="flat" cmpd="sng" algn="ctr">
-                      <a:solidFill>
-                        <a:srgbClr val="E5E7EB"/>
-                      </a:solidFill>
-                      <a:prstDash val="solid"/>
-                      <a:round/>
-                      <a:headEnd type="none" w="med" len="med"/>
-                      <a:tailEnd type="none" w="med" len="med"/>
-                    </a:lnR>
-                    <a:lnT w="6350" cap="flat" cmpd="sng" algn="ctr">
-                      <a:solidFill>
-                        <a:srgbClr val="E5E7EB"/>
-                      </a:solidFill>
-                      <a:prstDash val="solid"/>
-                      <a:round/>
-                      <a:headEnd type="none" w="med" len="med"/>
-                      <a:tailEnd type="none" w="med" len="med"/>
-                    </a:lnT>
-                    <a:lnB w="6350" cap="flat" cmpd="sng" algn="ctr">
-                      <a:solidFill>
-                        <a:srgbClr val="E5E7EB"/>
-                      </a:solidFill>
-                      <a:prstDash val="solid"/>
-                      <a:round/>
-                      <a:headEnd type="none" w="med" len="med"/>
-                      <a:tailEnd type="none" w="med" len="med"/>
-                    </a:lnB>
-                  </a:tcPr>
-                </a:tc>
-                <a:tc>
-                  <a:txBody>
-                    <a:bodyPr/>
-                    <a:lstStyle/>
-                    <a:p>
-                      <a:pPr indent="0" marL="0">
-                        <a:buNone/>
-                      </a:pPr>
-                      <a:r>
-                        <a:rPr lang="en-US" sz="1100" dirty="0">
-                          <a:solidFill>
-                            <a:srgbClr val="374151"/>
-                          </a:solidFill>
-                          <a:latin typeface="Apple SD Gothic Neo" pitchFamily="34" charset="0"/>
-                          <a:ea typeface="Apple SD Gothic Neo" pitchFamily="34" charset="-122"/>
-                          <a:cs typeface="Apple SD Gothic Neo" pitchFamily="34" charset="-120"/>
-                        </a:rPr>
-                        <a:t>O</a:t>
-                      </a:r>
-                      <a:endParaRPr lang="en-US" sz="1100" dirty="0">
-                        <a:latin typeface="Apple SD Gothic Neo" charset="0"/>
-                        <a:ea typeface="Apple SD Gothic Neo" charset="0"/>
-                        <a:cs typeface="Apple SD Gothic Neo" charset="0"/>
-                      </a:endParaRPr>
-                    </a:p>
-                  </a:txBody>
-                  <a:tcPr marL="91440" marR="91440" marT="45720" marB="45720">
-                    <a:lnL w="6350" cap="flat" cmpd="sng" algn="ctr">
-                      <a:solidFill>
-                        <a:srgbClr val="E5E7EB"/>
-                      </a:solidFill>
-                      <a:prstDash val="solid"/>
-                      <a:round/>
-                      <a:headEnd type="none" w="med" len="med"/>
-                      <a:tailEnd type="none" w="med" len="med"/>
-                    </a:lnL>
-                    <a:lnR w="6350" cap="flat" cmpd="sng" algn="ctr">
-                      <a:solidFill>
-                        <a:srgbClr val="E5E7EB"/>
-                      </a:solidFill>
-                      <a:prstDash val="solid"/>
-                      <a:round/>
-                      <a:headEnd type="none" w="med" len="med"/>
-                      <a:tailEnd type="none" w="med" len="med"/>
-                    </a:lnR>
-                    <a:lnT w="6350" cap="flat" cmpd="sng" algn="ctr">
-                      <a:solidFill>
-                        <a:srgbClr val="E5E7EB"/>
-                      </a:solidFill>
-                      <a:prstDash val="solid"/>
-                      <a:round/>
-                      <a:headEnd type="none" w="med" len="med"/>
-                      <a:tailEnd type="none" w="med" len="med"/>
-                    </a:lnT>
-                    <a:lnB w="6350" cap="flat" cmpd="sng" algn="ctr">
-                      <a:solidFill>
-                        <a:srgbClr val="E5E7EB"/>
-                      </a:solidFill>
-                      <a:prstDash val="solid"/>
-                      <a:round/>
-                      <a:headEnd type="none" w="med" len="med"/>
-                      <a:tailEnd type="none" w="med" len="med"/>
-                    </a:lnB>
-                  </a:tcPr>
-                </a:tc>
-              </a:tr>
-              <a:tr h="0">
-                <a:tc>
-                  <a:txBody>
-                    <a:bodyPr/>
-                    <a:lstStyle/>
-                    <a:p>
-                      <a:pPr indent="0" marL="0">
-                        <a:buNone/>
-                      </a:pPr>
-                      <a:r>
-                        <a:rPr lang="en-US" sz="1100" dirty="0">
-                          <a:solidFill>
-                            <a:srgbClr val="374151"/>
-                          </a:solidFill>
-                          <a:latin typeface="Apple SD Gothic Neo" pitchFamily="34" charset="0"/>
-                          <a:ea typeface="Apple SD Gothic Neo" pitchFamily="34" charset="-122"/>
-                          <a:cs typeface="Apple SD Gothic Neo" pitchFamily="34" charset="-120"/>
-                        </a:rPr>
-                        <a:t>수량</a:t>
-                      </a:r>
-                      <a:endParaRPr lang="en-US" sz="1100" dirty="0">
-                        <a:latin typeface="Apple SD Gothic Neo" charset="0"/>
-                        <a:ea typeface="Apple SD Gothic Neo" charset="0"/>
-                        <a:cs typeface="Apple SD Gothic Neo" charset="0"/>
-                      </a:endParaRPr>
-                    </a:p>
-                  </a:txBody>
-                  <a:tcPr marL="91440" marR="91440" marT="45720" marB="45720">
-                    <a:lnL w="6350" cap="flat" cmpd="sng" algn="ctr">
-                      <a:solidFill>
-                        <a:srgbClr val="E5E7EB"/>
-                      </a:solidFill>
-                      <a:prstDash val="solid"/>
-                      <a:round/>
-                      <a:headEnd type="none" w="med" len="med"/>
-                      <a:tailEnd type="none" w="med" len="med"/>
-                    </a:lnL>
-                    <a:lnR w="6350" cap="flat" cmpd="sng" algn="ctr">
-                      <a:solidFill>
-                        <a:srgbClr val="E5E7EB"/>
-                      </a:solidFill>
-                      <a:prstDash val="solid"/>
-                      <a:round/>
-                      <a:headEnd type="none" w="med" len="med"/>
-                      <a:tailEnd type="none" w="med" len="med"/>
-                    </a:lnR>
-                    <a:lnT w="6350" cap="flat" cmpd="sng" algn="ctr">
-                      <a:solidFill>
-                        <a:srgbClr val="E5E7EB"/>
-                      </a:solidFill>
-                      <a:prstDash val="solid"/>
-                      <a:round/>
-                      <a:headEnd type="none" w="med" len="med"/>
-                      <a:tailEnd type="none" w="med" len="med"/>
-                    </a:lnT>
-                    <a:lnB w="6350" cap="flat" cmpd="sng" algn="ctr">
-                      <a:solidFill>
-                        <a:srgbClr val="E5E7EB"/>
-                      </a:solidFill>
-                      <a:prstDash val="solid"/>
-                      <a:round/>
-                      <a:headEnd type="none" w="med" len="med"/>
-                      <a:tailEnd type="none" w="med" len="med"/>
-                    </a:lnB>
-                  </a:tcPr>
-                </a:tc>
-                <a:tc>
-                  <a:txBody>
-                    <a:bodyPr/>
-                    <a:lstStyle/>
-                    <a:p>
-                      <a:pPr indent="0" marL="0">
-                        <a:buNone/>
-                      </a:pPr>
-                      <a:r>
-                        <a:rPr lang="en-US" sz="1100" dirty="0">
-                          <a:solidFill>
-                            <a:srgbClr val="374151"/>
-                          </a:solidFill>
-                          <a:latin typeface="Apple SD Gothic Neo" pitchFamily="34" charset="0"/>
-                          <a:ea typeface="Apple SD Gothic Neo" pitchFamily="34" charset="-122"/>
-                          <a:cs typeface="Apple SD Gothic Neo" pitchFamily="34" charset="-120"/>
-                        </a:rPr>
-                        <a:t>개수/인원</a:t>
-                      </a:r>
-                      <a:endParaRPr lang="en-US" sz="1100" dirty="0">
-                        <a:latin typeface="Apple SD Gothic Neo" charset="0"/>
-                        <a:ea typeface="Apple SD Gothic Neo" charset="0"/>
-                        <a:cs typeface="Apple SD Gothic Neo" charset="0"/>
-                      </a:endParaRPr>
-                    </a:p>
-                  </a:txBody>
-                  <a:tcPr marL="91440" marR="91440" marT="45720" marB="45720">
-                    <a:lnL w="6350" cap="flat" cmpd="sng" algn="ctr">
-                      <a:solidFill>
-                        <a:srgbClr val="E5E7EB"/>
-                      </a:solidFill>
-                      <a:prstDash val="solid"/>
-                      <a:round/>
-                      <a:headEnd type="none" w="med" len="med"/>
-                      <a:tailEnd type="none" w="med" len="med"/>
-                    </a:lnL>
-                    <a:lnR w="6350" cap="flat" cmpd="sng" algn="ctr">
-                      <a:solidFill>
-                        <a:srgbClr val="E5E7EB"/>
-                      </a:solidFill>
-                      <a:prstDash val="solid"/>
-                      <a:round/>
-                      <a:headEnd type="none" w="med" len="med"/>
-                      <a:tailEnd type="none" w="med" len="med"/>
-                    </a:lnR>
-                    <a:lnT w="6350" cap="flat" cmpd="sng" algn="ctr">
-                      <a:solidFill>
-                        <a:srgbClr val="E5E7EB"/>
-                      </a:solidFill>
-                      <a:prstDash val="solid"/>
-                      <a:round/>
-                      <a:headEnd type="none" w="med" len="med"/>
-                      <a:tailEnd type="none" w="med" len="med"/>
-                    </a:lnT>
-                    <a:lnB w="6350" cap="flat" cmpd="sng" algn="ctr">
-                      <a:solidFill>
-                        <a:srgbClr val="E5E7EB"/>
-                      </a:solidFill>
-                      <a:prstDash val="solid"/>
-                      <a:round/>
-                      <a:headEnd type="none" w="med" len="med"/>
-                      <a:tailEnd type="none" w="med" len="med"/>
-                    </a:lnB>
-                  </a:tcPr>
-                </a:tc>
-                <a:tc>
-                  <a:txBody>
-                    <a:bodyPr/>
-                    <a:lstStyle/>
-                    <a:p>
-                      <a:pPr indent="0" marL="0">
-                        <a:buNone/>
-                      </a:pPr>
-                      <a:r>
-                        <a:rPr lang="en-US" sz="1100" dirty="0">
-                          <a:solidFill>
-                            <a:srgbClr val="374151"/>
-                          </a:solidFill>
-                          <a:latin typeface="Apple SD Gothic Neo" pitchFamily="34" charset="0"/>
-                          <a:ea typeface="Apple SD Gothic Neo" pitchFamily="34" charset="-122"/>
-                          <a:cs typeface="Apple SD Gothic Neo" pitchFamily="34" charset="-120"/>
-                        </a:rPr>
-                        <a:t>O</a:t>
-                      </a:r>
-                      <a:endParaRPr lang="en-US" sz="1100" dirty="0">
-                        <a:latin typeface="Apple SD Gothic Neo" charset="0"/>
-                        <a:ea typeface="Apple SD Gothic Neo" charset="0"/>
-                        <a:cs typeface="Apple SD Gothic Neo" charset="0"/>
-                      </a:endParaRPr>
-                    </a:p>
-                  </a:txBody>
-                  <a:tcPr marL="91440" marR="91440" marT="45720" marB="45720">
-                    <a:lnL w="6350" cap="flat" cmpd="sng" algn="ctr">
-                      <a:solidFill>
-                        <a:srgbClr val="E5E7EB"/>
-                      </a:solidFill>
-                      <a:prstDash val="solid"/>
-                      <a:round/>
-                      <a:headEnd type="none" w="med" len="med"/>
-                      <a:tailEnd type="none" w="med" len="med"/>
-                    </a:lnL>
-                    <a:lnR w="6350" cap="flat" cmpd="sng" algn="ctr">
-                      <a:solidFill>
-                        <a:srgbClr val="E5E7EB"/>
-                      </a:solidFill>
-                      <a:prstDash val="solid"/>
-                      <a:round/>
-                      <a:headEnd type="none" w="med" len="med"/>
-                      <a:tailEnd type="none" w="med" len="med"/>
-                    </a:lnR>
-                    <a:lnT w="6350" cap="flat" cmpd="sng" algn="ctr">
-                      <a:solidFill>
-                        <a:srgbClr val="E5E7EB"/>
-                      </a:solidFill>
-                      <a:prstDash val="solid"/>
-                      <a:round/>
-                      <a:headEnd type="none" w="med" len="med"/>
-                      <a:tailEnd type="none" w="med" len="med"/>
-                    </a:lnT>
-                    <a:lnB w="6350" cap="flat" cmpd="sng" algn="ctr">
-                      <a:solidFill>
-                        <a:srgbClr val="E5E7EB"/>
-                      </a:solidFill>
-                      <a:prstDash val="solid"/>
-                      <a:round/>
-                      <a:headEnd type="none" w="med" len="med"/>
-                      <a:tailEnd type="none" w="med" len="med"/>
-                    </a:lnB>
-                  </a:tcPr>
-                </a:tc>
-              </a:tr>
-              <a:tr h="0">
-                <a:tc>
-                  <a:txBody>
-                    <a:bodyPr/>
-                    <a:lstStyle/>
-                    <a:p>
-                      <a:pPr indent="0" marL="0">
-                        <a:buNone/>
-                      </a:pPr>
-                      <a:r>
-                        <a:rPr lang="en-US" sz="1100" dirty="0">
-                          <a:solidFill>
-                            <a:srgbClr val="374151"/>
-                          </a:solidFill>
-                          <a:latin typeface="Apple SD Gothic Neo" pitchFamily="34" charset="0"/>
-                          <a:ea typeface="Apple SD Gothic Neo" pitchFamily="34" charset="-122"/>
-                          <a:cs typeface="Apple SD Gothic Neo" pitchFamily="34" charset="-120"/>
-                        </a:rPr>
-                        <a:t>금액</a:t>
-                      </a:r>
-                      <a:endParaRPr lang="en-US" sz="1100" dirty="0">
-                        <a:latin typeface="Apple SD Gothic Neo" charset="0"/>
-                        <a:ea typeface="Apple SD Gothic Neo" charset="0"/>
-                        <a:cs typeface="Apple SD Gothic Neo" charset="0"/>
-                      </a:endParaRPr>
-                    </a:p>
-                  </a:txBody>
-                  <a:tcPr marL="91440" marR="91440" marT="45720" marB="45720">
-                    <a:lnL w="6350" cap="flat" cmpd="sng" algn="ctr">
-                      <a:solidFill>
-                        <a:srgbClr val="E5E7EB"/>
-                      </a:solidFill>
-                      <a:prstDash val="solid"/>
-                      <a:round/>
-                      <a:headEnd type="none" w="med" len="med"/>
-                      <a:tailEnd type="none" w="med" len="med"/>
-                    </a:lnL>
-                    <a:lnR w="6350" cap="flat" cmpd="sng" algn="ctr">
-                      <a:solidFill>
-                        <a:srgbClr val="E5E7EB"/>
-                      </a:solidFill>
-                      <a:prstDash val="solid"/>
-                      <a:round/>
-                      <a:headEnd type="none" w="med" len="med"/>
-                      <a:tailEnd type="none" w="med" len="med"/>
-                    </a:lnR>
-                    <a:lnT w="6350" cap="flat" cmpd="sng" algn="ctr">
-                      <a:solidFill>
-                        <a:srgbClr val="E5E7EB"/>
-                      </a:solidFill>
-                      <a:prstDash val="solid"/>
-                      <a:round/>
-                      <a:headEnd type="none" w="med" len="med"/>
-                      <a:tailEnd type="none" w="med" len="med"/>
-                    </a:lnT>
-                    <a:lnB w="6350" cap="flat" cmpd="sng" algn="ctr">
-                      <a:solidFill>
-                        <a:srgbClr val="E5E7EB"/>
-                      </a:solidFill>
-                      <a:prstDash val="solid"/>
-                      <a:round/>
-                      <a:headEnd type="none" w="med" len="med"/>
-                      <a:tailEnd type="none" w="med" len="med"/>
-                    </a:lnB>
-                  </a:tcPr>
-                </a:tc>
-                <a:tc>
-                  <a:txBody>
-                    <a:bodyPr/>
-                    <a:lstStyle/>
-                    <a:p>
-                      <a:pPr indent="0" marL="0">
-                        <a:buNone/>
-                      </a:pPr>
-                      <a:r>
-                        <a:rPr lang="en-US" sz="1100" dirty="0">
-                          <a:solidFill>
-                            <a:srgbClr val="374151"/>
-                          </a:solidFill>
-                          <a:latin typeface="Apple SD Gothic Neo" pitchFamily="34" charset="0"/>
-                          <a:ea typeface="Apple SD Gothic Neo" pitchFamily="34" charset="-122"/>
-                          <a:cs typeface="Apple SD Gothic Neo" pitchFamily="34" charset="-120"/>
-                        </a:rPr>
-                        <a:t>자동 계산 (단가 × 수량)</a:t>
-                      </a:r>
-                      <a:endParaRPr lang="en-US" sz="1100" dirty="0">
-                        <a:latin typeface="Apple SD Gothic Neo" charset="0"/>
-                        <a:ea typeface="Apple SD Gothic Neo" charset="0"/>
-                        <a:cs typeface="Apple SD Gothic Neo" charset="0"/>
-                      </a:endParaRPr>
-                    </a:p>
-                  </a:txBody>
-                  <a:tcPr marL="91440" marR="91440" marT="45720" marB="45720">
-                    <a:lnL w="6350" cap="flat" cmpd="sng" algn="ctr">
-                      <a:solidFill>
-                        <a:srgbClr val="E5E7EB"/>
-                      </a:solidFill>
-                      <a:prstDash val="solid"/>
-                      <a:round/>
-                      <a:headEnd type="none" w="med" len="med"/>
-                      <a:tailEnd type="none" w="med" len="med"/>
-                    </a:lnL>
-                    <a:lnR w="6350" cap="flat" cmpd="sng" algn="ctr">
-                      <a:solidFill>
-                        <a:srgbClr val="E5E7EB"/>
-                      </a:solidFill>
-                      <a:prstDash val="solid"/>
-                      <a:round/>
-                      <a:headEnd type="none" w="med" len="med"/>
-                      <a:tailEnd type="none" w="med" len="med"/>
-                    </a:lnR>
-                    <a:lnT w="6350" cap="flat" cmpd="sng" algn="ctr">
-                      <a:solidFill>
-                        <a:srgbClr val="E5E7EB"/>
-                      </a:solidFill>
-                      <a:prstDash val="solid"/>
-                      <a:round/>
-                      <a:headEnd type="none" w="med" len="med"/>
-                      <a:tailEnd type="none" w="med" len="med"/>
-                    </a:lnT>
-                    <a:lnB w="6350" cap="flat" cmpd="sng" algn="ctr">
-                      <a:solidFill>
-                        <a:srgbClr val="E5E7EB"/>
-                      </a:solidFill>
-                      <a:prstDash val="solid"/>
-                      <a:round/>
-                      <a:headEnd type="none" w="med" len="med"/>
-                      <a:tailEnd type="none" w="med" len="med"/>
-                    </a:lnB>
-                  </a:tcPr>
-                </a:tc>
-                <a:tc>
-                  <a:txBody>
-                    <a:bodyPr/>
-                    <a:lstStyle/>
-                    <a:p>
-                      <a:pPr indent="0" marL="0">
-                        <a:buNone/>
-                      </a:pPr>
-                      <a:r>
-                        <a:rPr lang="en-US" sz="1100" dirty="0">
-                          <a:solidFill>
-                            <a:srgbClr val="374151"/>
-                          </a:solidFill>
-                          <a:latin typeface="Apple SD Gothic Neo" pitchFamily="34" charset="0"/>
-                          <a:ea typeface="Apple SD Gothic Neo" pitchFamily="34" charset="-122"/>
-                          <a:cs typeface="Apple SD Gothic Neo" pitchFamily="34" charset="-120"/>
-                        </a:rPr>
-                        <a:t>자동</a:t>
-                      </a:r>
-                      <a:endParaRPr lang="en-US" sz="1100" dirty="0">
-                        <a:latin typeface="Apple SD Gothic Neo" charset="0"/>
-                        <a:ea typeface="Apple SD Gothic Neo" charset="0"/>
-                        <a:cs typeface="Apple SD Gothic Neo" charset="0"/>
-                      </a:endParaRPr>
-                    </a:p>
-                  </a:txBody>
-                  <a:tcPr marL="91440" marR="91440" marT="45720" marB="45720">
-                    <a:lnL w="6350" cap="flat" cmpd="sng" algn="ctr">
-                      <a:solidFill>
-                        <a:srgbClr val="E5E7EB"/>
-                      </a:solidFill>
-                      <a:prstDash val="solid"/>
-                      <a:round/>
-                      <a:headEnd type="none" w="med" len="med"/>
-                      <a:tailEnd type="none" w="med" len="med"/>
-                    </a:lnL>
-                    <a:lnR w="6350" cap="flat" cmpd="sng" algn="ctr">
-                      <a:solidFill>
-                        <a:srgbClr val="E5E7EB"/>
-                      </a:solidFill>
-                      <a:prstDash val="solid"/>
-                      <a:round/>
-                      <a:headEnd type="none" w="med" len="med"/>
-                      <a:tailEnd type="none" w="med" len="med"/>
-                    </a:lnR>
-                    <a:lnT w="6350" cap="flat" cmpd="sng" algn="ctr">
-                      <a:solidFill>
-                        <a:srgbClr val="E5E7EB"/>
-                      </a:solidFill>
-                      <a:prstDash val="solid"/>
-                      <a:round/>
-                      <a:headEnd type="none" w="med" len="med"/>
-                      <a:tailEnd type="none" w="med" len="med"/>
-                    </a:lnT>
-                    <a:lnB w="6350" cap="flat" cmpd="sng" algn="ctr">
-                      <a:solidFill>
-                        <a:srgbClr val="E5E7EB"/>
-                      </a:solidFill>
-                      <a:prstDash val="solid"/>
-                      <a:round/>
-                      <a:headEnd type="none" w="med" len="med"/>
-                      <a:tailEnd type="none" w="med" len="med"/>
-                    </a:lnB>
-                  </a:tcPr>
-                </a:tc>
-              </a:tr>
-            </a:tbl>
-          </a:graphicData>
-        </a:graphic>
-      </p:graphicFrame>
-      <p:sp>
-        <p:nvSpPr>
-          <p:cNvPr id="25" name="Slide Number Placeholder 0"/>
-          <p:cNvSpPr>
-            <a:spLocks noGrp="1"/>
-          </p:cNvSpPr>
-          <p:nvPr>
-            <p:ph type="sldNum" sz="quarter" idx="4294967295"/>
-          </p:nvPr>
-        </p:nvSpPr>
-        <p:spPr>
-          <a:xfrm>
-            <a:off x="8686800" y="4937760"/>
-            <a:ext cx="800000" cy="300000"/>
-          </a:xfrm>
-          <a:prstGeom prst="rect">
-            <a:avLst/>
-          </a:prstGeom>
-          <a:extLst>
-            <a:ext uri="{C572A759-6A51-4108-AA02-DFA0A04FC94B}">
-              <ma14:wrappingTextBoxFlag xmlns:ma14="http://schemas.microsoft.com/office/mac/drawingml/2011/main" val="0"/>
-            </a:ext>
-          </a:extLst>
-        </p:spPr>
-        <p:txBody>
-          <a:bodyPr/>
-          <a:lstStyle>
-            <a:lvl1pPr>
-              <a:defRPr sz="1000">
-                <a:solidFill>
-                  <a:srgbClr val="FFFFFF"/>
-                </a:solidFill>
-              </a:defRPr>
-            </a:lvl1pPr>
-          </a:lstStyle>
-          <a:p>
-            <a:pPr algn="l"/>
-            <a:fld id="{F7021451-1387-4CA6-816F-3879F97B5CBC}" type="slidenum">
-              <a:rPr b="0" lang="en-US"/>
               <a:t>7</a:t>
             </a:fld>
             <a:endParaRPr lang="en-US"/>
@@ -9796,7 +12573,7 @@
                   <a:srgbClr val="1E40AF"/>
                 </a:solidFill>
               </a:rPr>
-              <a:t>세부 항목 - 편의 기능</a:t>
+              <a:t>예산 정보 선택 규칙</a:t>
             </a:r>
             <a:endParaRPr lang="en-US" sz="2800" dirty="0"/>
           </a:p>
@@ -9829,7 +12606,7 @@
                   <a:srgbClr val="374151"/>
                 </a:solidFill>
               </a:rPr>
-              <a:t>적요 입력 도우미: 포커스 시 예제 툴팁 표시</a:t>
+              <a:t>상위 항목 선택 → 하위 항목 활성화</a:t>
             </a:r>
             <a:endParaRPr lang="en-US" sz="1400" dirty="0"/>
           </a:p>
@@ -9862,7 +12639,7 @@
                   <a:srgbClr val="374151"/>
                 </a:solidFill>
               </a:rPr>
-              <a:t>음성 입력 (모바일): 마이크 버튼 탭 → 음성으로 적요 입력</a:t>
+              <a:t>상위 항목 변경 시 하위 항목 초기화</a:t>
             </a:r>
             <a:endParaRPr lang="en-US" sz="1400" dirty="0"/>
           </a:p>
@@ -9895,40 +12672,7 @@
                   <a:srgbClr val="374151"/>
                 </a:solidFill>
               </a:rPr>
-              <a:t>항목 추가: "+ 항목 추가" 버튼 (최대 10개)</a:t>
-            </a:r>
-            <a:endParaRPr lang="en-US" sz="1400" dirty="0"/>
-          </a:p>
-        </p:txBody>
-      </p:sp>
-      <p:sp>
-        <p:nvSpPr>
-          <p:cNvPr id="6" name="Text 4"/>
-          <p:cNvSpPr/>
-          <p:nvPr/>
-        </p:nvSpPr>
-        <p:spPr>
-          <a:xfrm>
-            <a:off x="640080" y="2011680"/>
-            <a:ext cx="7772400" cy="0"/>
-          </a:xfrm>
-          <a:prstGeom prst="rect">
-            <a:avLst/>
-          </a:prstGeom>
-          <a:noFill/>
-          <a:ln/>
-        </p:spPr>
-        <p:txBody>
-          <a:bodyPr wrap="square" rtlCol="0" anchor="ctr"/>
-          <a:lstStyle/>
-          <a:p>
-            <a:r>
-              <a:rPr lang="en-US" sz="1400" dirty="0">
-                <a:solidFill>
-                  <a:srgbClr val="374151"/>
-                </a:solidFill>
-              </a:rPr>
-              <a:t>항목 삭제: 각 항목의 "X" 버튼 (최소 1개 유지)</a:t>
+              <a:t>예산(목)까지 선택해야 세목 선택 가능</a:t>
             </a:r>
             <a:endParaRPr lang="en-US" sz="1400" dirty="0"/>
           </a:p>
@@ -10034,1037 +12778,71 @@
                   <a:srgbClr val="1E40AF"/>
                 </a:solidFill>
               </a:rPr>
-              <a:t>3단계: 신청 정보 입력</a:t>
+              <a:t>2단계: 세부 항목 입력</a:t>
             </a:r>
             <a:endParaRPr lang="en-US" sz="2800" dirty="0"/>
           </a:p>
         </p:txBody>
       </p:sp>
-      <p:graphicFrame>
-        <p:nvGraphicFramePr>
-          <p:cNvPr id="10" name="Table 0"/>
-          <p:cNvGraphicFramePr>
-            <a:graphicFrameLocks noGrp="1"/>
-          </p:cNvGraphicFramePr>
-          <p:nvPr>
-            <p:extLst>
-              <p:ext uri="{D42A27DB-BD31-4B8C-83A1-F6EECF244321}">
-                <p14:modId xmlns:p14="http://schemas.microsoft.com/office/powerpoint/2010/main" val="1579011935"/>
-              </p:ext>
-            </p:extLst>
-          </p:nvPr>
-        </p:nvGraphicFramePr>
-        <p:xfrm>
-          <a:off x="457200" y="914400"/>
-          <a:ext cx="8229600" cy="914400"/>
-        </p:xfrm>
-        <a:graphic>
-          <a:graphicData uri="http://schemas.openxmlformats.org/drawingml/2006/table">
-            <a:tbl>
-              <a:tblPr/>
-              <a:tblGrid>
-                <a:gridCol w="2743200"/>
-                <a:gridCol w="2743200"/>
-                <a:gridCol w="2743200"/>
-              </a:tblGrid>
-              <a:tr h="0">
-                <a:tc>
-                  <a:txBody>
-                    <a:bodyPr/>
-                    <a:lstStyle/>
-                    <a:p>
-                      <a:pPr indent="0" marL="0">
-                        <a:buNone/>
-                      </a:pPr>
-                      <a:r>
-                        <a:rPr lang="en-US" sz="1200" b="1" dirty="0">
-                          <a:solidFill>
-                            <a:srgbClr val="FFFFFF"/>
-                          </a:solidFill>
-                          <a:latin typeface="Apple SD Gothic Neo" pitchFamily="34" charset="0"/>
-                          <a:ea typeface="Apple SD Gothic Neo" pitchFamily="34" charset="-122"/>
-                          <a:cs typeface="Apple SD Gothic Neo" pitchFamily="34" charset="-120"/>
-                        </a:rPr>
-                        <a:t>필드</a:t>
-                      </a:r>
-                      <a:endParaRPr lang="en-US" sz="1200" dirty="0">
-                        <a:latin typeface="Apple SD Gothic Neo" charset="0"/>
-                        <a:ea typeface="Apple SD Gothic Neo" charset="0"/>
-                        <a:cs typeface="Apple SD Gothic Neo" charset="0"/>
-                      </a:endParaRPr>
-                    </a:p>
-                  </a:txBody>
-                  <a:tcPr marL="91440" marR="91440" marT="45720" marB="45720">
-                    <a:lnL w="6350" cap="flat" cmpd="sng" algn="ctr">
-                      <a:solidFill>
-                        <a:srgbClr val="E5E7EB"/>
-                      </a:solidFill>
-                      <a:prstDash val="solid"/>
-                      <a:round/>
-                      <a:headEnd type="none" w="med" len="med"/>
-                      <a:tailEnd type="none" w="med" len="med"/>
-                    </a:lnL>
-                    <a:lnR w="6350" cap="flat" cmpd="sng" algn="ctr">
-                      <a:solidFill>
-                        <a:srgbClr val="E5E7EB"/>
-                      </a:solidFill>
-                      <a:prstDash val="solid"/>
-                      <a:round/>
-                      <a:headEnd type="none" w="med" len="med"/>
-                      <a:tailEnd type="none" w="med" len="med"/>
-                    </a:lnR>
-                    <a:lnT w="6350" cap="flat" cmpd="sng" algn="ctr">
-                      <a:solidFill>
-                        <a:srgbClr val="E5E7EB"/>
-                      </a:solidFill>
-                      <a:prstDash val="solid"/>
-                      <a:round/>
-                      <a:headEnd type="none" w="med" len="med"/>
-                      <a:tailEnd type="none" w="med" len="med"/>
-                    </a:lnT>
-                    <a:lnB w="6350" cap="flat" cmpd="sng" algn="ctr">
-                      <a:solidFill>
-                        <a:srgbClr val="E5E7EB"/>
-                      </a:solidFill>
-                      <a:prstDash val="solid"/>
-                      <a:round/>
-                      <a:headEnd type="none" w="med" len="med"/>
-                      <a:tailEnd type="none" w="med" len="med"/>
-                    </a:lnB>
-                    <a:solidFill>
-                      <a:srgbClr val="3B82F6"/>
-                    </a:solidFill>
-                  </a:tcPr>
-                </a:tc>
-                <a:tc>
-                  <a:txBody>
-                    <a:bodyPr/>
-                    <a:lstStyle/>
-                    <a:p>
-                      <a:pPr indent="0" marL="0">
-                        <a:buNone/>
-                      </a:pPr>
-                      <a:r>
-                        <a:rPr lang="en-US" sz="1200" b="1" dirty="0">
-                          <a:solidFill>
-                            <a:srgbClr val="FFFFFF"/>
-                          </a:solidFill>
-                          <a:latin typeface="Apple SD Gothic Neo" pitchFamily="34" charset="0"/>
-                          <a:ea typeface="Apple SD Gothic Neo" pitchFamily="34" charset="-122"/>
-                          <a:cs typeface="Apple SD Gothic Neo" pitchFamily="34" charset="-120"/>
-                        </a:rPr>
-                        <a:t>설명</a:t>
-                      </a:r>
-                      <a:endParaRPr lang="en-US" sz="1200" dirty="0">
-                        <a:latin typeface="Apple SD Gothic Neo" charset="0"/>
-                        <a:ea typeface="Apple SD Gothic Neo" charset="0"/>
-                        <a:cs typeface="Apple SD Gothic Neo" charset="0"/>
-                      </a:endParaRPr>
-                    </a:p>
-                  </a:txBody>
-                  <a:tcPr marL="91440" marR="91440" marT="45720" marB="45720">
-                    <a:lnL w="6350" cap="flat" cmpd="sng" algn="ctr">
-                      <a:solidFill>
-                        <a:srgbClr val="E5E7EB"/>
-                      </a:solidFill>
-                      <a:prstDash val="solid"/>
-                      <a:round/>
-                      <a:headEnd type="none" w="med" len="med"/>
-                      <a:tailEnd type="none" w="med" len="med"/>
-                    </a:lnL>
-                    <a:lnR w="6350" cap="flat" cmpd="sng" algn="ctr">
-                      <a:solidFill>
-                        <a:srgbClr val="E5E7EB"/>
-                      </a:solidFill>
-                      <a:prstDash val="solid"/>
-                      <a:round/>
-                      <a:headEnd type="none" w="med" len="med"/>
-                      <a:tailEnd type="none" w="med" len="med"/>
-                    </a:lnR>
-                    <a:lnT w="6350" cap="flat" cmpd="sng" algn="ctr">
-                      <a:solidFill>
-                        <a:srgbClr val="E5E7EB"/>
-                      </a:solidFill>
-                      <a:prstDash val="solid"/>
-                      <a:round/>
-                      <a:headEnd type="none" w="med" len="med"/>
-                      <a:tailEnd type="none" w="med" len="med"/>
-                    </a:lnT>
-                    <a:lnB w="6350" cap="flat" cmpd="sng" algn="ctr">
-                      <a:solidFill>
-                        <a:srgbClr val="E5E7EB"/>
-                      </a:solidFill>
-                      <a:prstDash val="solid"/>
-                      <a:round/>
-                      <a:headEnd type="none" w="med" len="med"/>
-                      <a:tailEnd type="none" w="med" len="med"/>
-                    </a:lnB>
-                    <a:solidFill>
-                      <a:srgbClr val="3B82F6"/>
-                    </a:solidFill>
-                  </a:tcPr>
-                </a:tc>
-                <a:tc>
-                  <a:txBody>
-                    <a:bodyPr/>
-                    <a:lstStyle/>
-                    <a:p>
-                      <a:pPr indent="0" marL="0">
-                        <a:buNone/>
-                      </a:pPr>
-                      <a:r>
-                        <a:rPr lang="en-US" sz="1200" b="1" dirty="0">
-                          <a:solidFill>
-                            <a:srgbClr val="FFFFFF"/>
-                          </a:solidFill>
-                          <a:latin typeface="Apple SD Gothic Neo" pitchFamily="34" charset="0"/>
-                          <a:ea typeface="Apple SD Gothic Neo" pitchFamily="34" charset="-122"/>
-                          <a:cs typeface="Apple SD Gothic Neo" pitchFamily="34" charset="-120"/>
-                        </a:rPr>
-                        <a:t>자동 입력</a:t>
-                      </a:r>
-                      <a:endParaRPr lang="en-US" sz="1200" dirty="0">
-                        <a:latin typeface="Apple SD Gothic Neo" charset="0"/>
-                        <a:ea typeface="Apple SD Gothic Neo" charset="0"/>
-                        <a:cs typeface="Apple SD Gothic Neo" charset="0"/>
-                      </a:endParaRPr>
-                    </a:p>
-                  </a:txBody>
-                  <a:tcPr marL="91440" marR="91440" marT="45720" marB="45720">
-                    <a:lnL w="6350" cap="flat" cmpd="sng" algn="ctr">
-                      <a:solidFill>
-                        <a:srgbClr val="E5E7EB"/>
-                      </a:solidFill>
-                      <a:prstDash val="solid"/>
-                      <a:round/>
-                      <a:headEnd type="none" w="med" len="med"/>
-                      <a:tailEnd type="none" w="med" len="med"/>
-                    </a:lnL>
-                    <a:lnR w="6350" cap="flat" cmpd="sng" algn="ctr">
-                      <a:solidFill>
-                        <a:srgbClr val="E5E7EB"/>
-                      </a:solidFill>
-                      <a:prstDash val="solid"/>
-                      <a:round/>
-                      <a:headEnd type="none" w="med" len="med"/>
-                      <a:tailEnd type="none" w="med" len="med"/>
-                    </a:lnR>
-                    <a:lnT w="6350" cap="flat" cmpd="sng" algn="ctr">
-                      <a:solidFill>
-                        <a:srgbClr val="E5E7EB"/>
-                      </a:solidFill>
-                      <a:prstDash val="solid"/>
-                      <a:round/>
-                      <a:headEnd type="none" w="med" len="med"/>
-                      <a:tailEnd type="none" w="med" len="med"/>
-                    </a:lnT>
-                    <a:lnB w="6350" cap="flat" cmpd="sng" algn="ctr">
-                      <a:solidFill>
-                        <a:srgbClr val="E5E7EB"/>
-                      </a:solidFill>
-                      <a:prstDash val="solid"/>
-                      <a:round/>
-                      <a:headEnd type="none" w="med" len="med"/>
-                      <a:tailEnd type="none" w="med" len="med"/>
-                    </a:lnB>
-                    <a:solidFill>
-                      <a:srgbClr val="3B82F6"/>
-                    </a:solidFill>
-                  </a:tcPr>
-                </a:tc>
-              </a:tr>
-              <a:tr h="0">
-                <a:tc>
-                  <a:txBody>
-                    <a:bodyPr/>
-                    <a:lstStyle/>
-                    <a:p>
-                      <a:pPr indent="0" marL="0">
-                        <a:buNone/>
-                      </a:pPr>
-                      <a:r>
-                        <a:rPr lang="en-US" sz="1100" dirty="0">
-                          <a:solidFill>
-                            <a:srgbClr val="374151"/>
-                          </a:solidFill>
-                          <a:latin typeface="Apple SD Gothic Neo" pitchFamily="34" charset="0"/>
-                          <a:ea typeface="Apple SD Gothic Neo" pitchFamily="34" charset="-122"/>
-                          <a:cs typeface="Apple SD Gothic Neo" pitchFamily="34" charset="-120"/>
-                        </a:rPr>
-                        <a:t>청구일자</a:t>
-                      </a:r>
-                      <a:endParaRPr lang="en-US" sz="1100" dirty="0">
-                        <a:latin typeface="Apple SD Gothic Neo" charset="0"/>
-                        <a:ea typeface="Apple SD Gothic Neo" charset="0"/>
-                        <a:cs typeface="Apple SD Gothic Neo" charset="0"/>
-                      </a:endParaRPr>
-                    </a:p>
-                  </a:txBody>
-                  <a:tcPr marL="91440" marR="91440" marT="45720" marB="45720">
-                    <a:lnL w="6350" cap="flat" cmpd="sng" algn="ctr">
-                      <a:solidFill>
-                        <a:srgbClr val="E5E7EB"/>
-                      </a:solidFill>
-                      <a:prstDash val="solid"/>
-                      <a:round/>
-                      <a:headEnd type="none" w="med" len="med"/>
-                      <a:tailEnd type="none" w="med" len="med"/>
-                    </a:lnL>
-                    <a:lnR w="6350" cap="flat" cmpd="sng" algn="ctr">
-                      <a:solidFill>
-                        <a:srgbClr val="E5E7EB"/>
-                      </a:solidFill>
-                      <a:prstDash val="solid"/>
-                      <a:round/>
-                      <a:headEnd type="none" w="med" len="med"/>
-                      <a:tailEnd type="none" w="med" len="med"/>
-                    </a:lnR>
-                    <a:lnT w="6350" cap="flat" cmpd="sng" algn="ctr">
-                      <a:solidFill>
-                        <a:srgbClr val="E5E7EB"/>
-                      </a:solidFill>
-                      <a:prstDash val="solid"/>
-                      <a:round/>
-                      <a:headEnd type="none" w="med" len="med"/>
-                      <a:tailEnd type="none" w="med" len="med"/>
-                    </a:lnT>
-                    <a:lnB w="6350" cap="flat" cmpd="sng" algn="ctr">
-                      <a:solidFill>
-                        <a:srgbClr val="E5E7EB"/>
-                      </a:solidFill>
-                      <a:prstDash val="solid"/>
-                      <a:round/>
-                      <a:headEnd type="none" w="med" len="med"/>
-                      <a:tailEnd type="none" w="med" len="med"/>
-                    </a:lnB>
-                  </a:tcPr>
-                </a:tc>
-                <a:tc>
-                  <a:txBody>
-                    <a:bodyPr/>
-                    <a:lstStyle/>
-                    <a:p>
-                      <a:pPr indent="0" marL="0">
-                        <a:buNone/>
-                      </a:pPr>
-                      <a:r>
-                        <a:rPr lang="en-US" sz="1100" dirty="0">
-                          <a:solidFill>
-                            <a:srgbClr val="374151"/>
-                          </a:solidFill>
-                          <a:latin typeface="Apple SD Gothic Neo" pitchFamily="34" charset="0"/>
-                          <a:ea typeface="Apple SD Gothic Neo" pitchFamily="34" charset="-122"/>
-                          <a:cs typeface="Apple SD Gothic Neo" pitchFamily="34" charset="-120"/>
-                        </a:rPr>
-                        <a:t>청구 날짜</a:t>
-                      </a:r>
-                      <a:endParaRPr lang="en-US" sz="1100" dirty="0">
-                        <a:latin typeface="Apple SD Gothic Neo" charset="0"/>
-                        <a:ea typeface="Apple SD Gothic Neo" charset="0"/>
-                        <a:cs typeface="Apple SD Gothic Neo" charset="0"/>
-                      </a:endParaRPr>
-                    </a:p>
-                  </a:txBody>
-                  <a:tcPr marL="91440" marR="91440" marT="45720" marB="45720">
-                    <a:lnL w="6350" cap="flat" cmpd="sng" algn="ctr">
-                      <a:solidFill>
-                        <a:srgbClr val="E5E7EB"/>
-                      </a:solidFill>
-                      <a:prstDash val="solid"/>
-                      <a:round/>
-                      <a:headEnd type="none" w="med" len="med"/>
-                      <a:tailEnd type="none" w="med" len="med"/>
-                    </a:lnL>
-                    <a:lnR w="6350" cap="flat" cmpd="sng" algn="ctr">
-                      <a:solidFill>
-                        <a:srgbClr val="E5E7EB"/>
-                      </a:solidFill>
-                      <a:prstDash val="solid"/>
-                      <a:round/>
-                      <a:headEnd type="none" w="med" len="med"/>
-                      <a:tailEnd type="none" w="med" len="med"/>
-                    </a:lnR>
-                    <a:lnT w="6350" cap="flat" cmpd="sng" algn="ctr">
-                      <a:solidFill>
-                        <a:srgbClr val="E5E7EB"/>
-                      </a:solidFill>
-                      <a:prstDash val="solid"/>
-                      <a:round/>
-                      <a:headEnd type="none" w="med" len="med"/>
-                      <a:tailEnd type="none" w="med" len="med"/>
-                    </a:lnT>
-                    <a:lnB w="6350" cap="flat" cmpd="sng" algn="ctr">
-                      <a:solidFill>
-                        <a:srgbClr val="E5E7EB"/>
-                      </a:solidFill>
-                      <a:prstDash val="solid"/>
-                      <a:round/>
-                      <a:headEnd type="none" w="med" len="med"/>
-                      <a:tailEnd type="none" w="med" len="med"/>
-                    </a:lnB>
-                  </a:tcPr>
-                </a:tc>
-                <a:tc>
-                  <a:txBody>
-                    <a:bodyPr/>
-                    <a:lstStyle/>
-                    <a:p>
-                      <a:pPr indent="0" marL="0">
-                        <a:buNone/>
-                      </a:pPr>
-                      <a:r>
-                        <a:rPr lang="en-US" sz="1100" dirty="0">
-                          <a:solidFill>
-                            <a:srgbClr val="374151"/>
-                          </a:solidFill>
-                          <a:latin typeface="Apple SD Gothic Neo" pitchFamily="34" charset="0"/>
-                          <a:ea typeface="Apple SD Gothic Neo" pitchFamily="34" charset="-122"/>
-                          <a:cs typeface="Apple SD Gothic Neo" pitchFamily="34" charset="-120"/>
-                        </a:rPr>
-                        <a:t>오늘 날짜</a:t>
-                      </a:r>
-                      <a:endParaRPr lang="en-US" sz="1100" dirty="0">
-                        <a:latin typeface="Apple SD Gothic Neo" charset="0"/>
-                        <a:ea typeface="Apple SD Gothic Neo" charset="0"/>
-                        <a:cs typeface="Apple SD Gothic Neo" charset="0"/>
-                      </a:endParaRPr>
-                    </a:p>
-                  </a:txBody>
-                  <a:tcPr marL="91440" marR="91440" marT="45720" marB="45720">
-                    <a:lnL w="6350" cap="flat" cmpd="sng" algn="ctr">
-                      <a:solidFill>
-                        <a:srgbClr val="E5E7EB"/>
-                      </a:solidFill>
-                      <a:prstDash val="solid"/>
-                      <a:round/>
-                      <a:headEnd type="none" w="med" len="med"/>
-                      <a:tailEnd type="none" w="med" len="med"/>
-                    </a:lnL>
-                    <a:lnR w="6350" cap="flat" cmpd="sng" algn="ctr">
-                      <a:solidFill>
-                        <a:srgbClr val="E5E7EB"/>
-                      </a:solidFill>
-                      <a:prstDash val="solid"/>
-                      <a:round/>
-                      <a:headEnd type="none" w="med" len="med"/>
-                      <a:tailEnd type="none" w="med" len="med"/>
-                    </a:lnR>
-                    <a:lnT w="6350" cap="flat" cmpd="sng" algn="ctr">
-                      <a:solidFill>
-                        <a:srgbClr val="E5E7EB"/>
-                      </a:solidFill>
-                      <a:prstDash val="solid"/>
-                      <a:round/>
-                      <a:headEnd type="none" w="med" len="med"/>
-                      <a:tailEnd type="none" w="med" len="med"/>
-                    </a:lnT>
-                    <a:lnB w="6350" cap="flat" cmpd="sng" algn="ctr">
-                      <a:solidFill>
-                        <a:srgbClr val="E5E7EB"/>
-                      </a:solidFill>
-                      <a:prstDash val="solid"/>
-                      <a:round/>
-                      <a:headEnd type="none" w="med" len="med"/>
-                      <a:tailEnd type="none" w="med" len="med"/>
-                    </a:lnB>
-                  </a:tcPr>
-                </a:tc>
-              </a:tr>
-              <a:tr h="0">
-                <a:tc>
-                  <a:txBody>
-                    <a:bodyPr/>
-                    <a:lstStyle/>
-                    <a:p>
-                      <a:pPr indent="0" marL="0">
-                        <a:buNone/>
-                      </a:pPr>
-                      <a:r>
-                        <a:rPr lang="en-US" sz="1100" dirty="0">
-                          <a:solidFill>
-                            <a:srgbClr val="374151"/>
-                          </a:solidFill>
-                          <a:latin typeface="Apple SD Gothic Neo" pitchFamily="34" charset="0"/>
-                          <a:ea typeface="Apple SD Gothic Neo" pitchFamily="34" charset="-122"/>
-                          <a:cs typeface="Apple SD Gothic Neo" pitchFamily="34" charset="-120"/>
-                        </a:rPr>
-                        <a:t>청구팀</a:t>
-                      </a:r>
-                      <a:endParaRPr lang="en-US" sz="1100" dirty="0">
-                        <a:latin typeface="Apple SD Gothic Neo" charset="0"/>
-                        <a:ea typeface="Apple SD Gothic Neo" charset="0"/>
-                        <a:cs typeface="Apple SD Gothic Neo" charset="0"/>
-                      </a:endParaRPr>
-                    </a:p>
-                  </a:txBody>
-                  <a:tcPr marL="91440" marR="91440" marT="45720" marB="45720">
-                    <a:lnL w="6350" cap="flat" cmpd="sng" algn="ctr">
-                      <a:solidFill>
-                        <a:srgbClr val="E5E7EB"/>
-                      </a:solidFill>
-                      <a:prstDash val="solid"/>
-                      <a:round/>
-                      <a:headEnd type="none" w="med" len="med"/>
-                      <a:tailEnd type="none" w="med" len="med"/>
-                    </a:lnL>
-                    <a:lnR w="6350" cap="flat" cmpd="sng" algn="ctr">
-                      <a:solidFill>
-                        <a:srgbClr val="E5E7EB"/>
-                      </a:solidFill>
-                      <a:prstDash val="solid"/>
-                      <a:round/>
-                      <a:headEnd type="none" w="med" len="med"/>
-                      <a:tailEnd type="none" w="med" len="med"/>
-                    </a:lnR>
-                    <a:lnT w="6350" cap="flat" cmpd="sng" algn="ctr">
-                      <a:solidFill>
-                        <a:srgbClr val="E5E7EB"/>
-                      </a:solidFill>
-                      <a:prstDash val="solid"/>
-                      <a:round/>
-                      <a:headEnd type="none" w="med" len="med"/>
-                      <a:tailEnd type="none" w="med" len="med"/>
-                    </a:lnT>
-                    <a:lnB w="6350" cap="flat" cmpd="sng" algn="ctr">
-                      <a:solidFill>
-                        <a:srgbClr val="E5E7EB"/>
-                      </a:solidFill>
-                      <a:prstDash val="solid"/>
-                      <a:round/>
-                      <a:headEnd type="none" w="med" len="med"/>
-                      <a:tailEnd type="none" w="med" len="med"/>
-                    </a:lnB>
-                  </a:tcPr>
-                </a:tc>
-                <a:tc>
-                  <a:txBody>
-                    <a:bodyPr/>
-                    <a:lstStyle/>
-                    <a:p>
-                      <a:pPr indent="0" marL="0">
-                        <a:buNone/>
-                      </a:pPr>
-                      <a:r>
-                        <a:rPr lang="en-US" sz="1100" dirty="0">
-                          <a:solidFill>
-                            <a:srgbClr val="374151"/>
-                          </a:solidFill>
-                          <a:latin typeface="Apple SD Gothic Neo" pitchFamily="34" charset="0"/>
-                          <a:ea typeface="Apple SD Gothic Neo" pitchFamily="34" charset="-122"/>
-                          <a:cs typeface="Apple SD Gothic Neo" pitchFamily="34" charset="-120"/>
-                        </a:rPr>
-                        <a:t>위원회 + 사역팀</a:t>
-                      </a:r>
-                      <a:endParaRPr lang="en-US" sz="1100" dirty="0">
-                        <a:latin typeface="Apple SD Gothic Neo" charset="0"/>
-                        <a:ea typeface="Apple SD Gothic Neo" charset="0"/>
-                        <a:cs typeface="Apple SD Gothic Neo" charset="0"/>
-                      </a:endParaRPr>
-                    </a:p>
-                  </a:txBody>
-                  <a:tcPr marL="91440" marR="91440" marT="45720" marB="45720">
-                    <a:lnL w="6350" cap="flat" cmpd="sng" algn="ctr">
-                      <a:solidFill>
-                        <a:srgbClr val="E5E7EB"/>
-                      </a:solidFill>
-                      <a:prstDash val="solid"/>
-                      <a:round/>
-                      <a:headEnd type="none" w="med" len="med"/>
-                      <a:tailEnd type="none" w="med" len="med"/>
-                    </a:lnL>
-                    <a:lnR w="6350" cap="flat" cmpd="sng" algn="ctr">
-                      <a:solidFill>
-                        <a:srgbClr val="E5E7EB"/>
-                      </a:solidFill>
-                      <a:prstDash val="solid"/>
-                      <a:round/>
-                      <a:headEnd type="none" w="med" len="med"/>
-                      <a:tailEnd type="none" w="med" len="med"/>
-                    </a:lnR>
-                    <a:lnT w="6350" cap="flat" cmpd="sng" algn="ctr">
-                      <a:solidFill>
-                        <a:srgbClr val="E5E7EB"/>
-                      </a:solidFill>
-                      <a:prstDash val="solid"/>
-                      <a:round/>
-                      <a:headEnd type="none" w="med" len="med"/>
-                      <a:tailEnd type="none" w="med" len="med"/>
-                    </a:lnT>
-                    <a:lnB w="6350" cap="flat" cmpd="sng" algn="ctr">
-                      <a:solidFill>
-                        <a:srgbClr val="E5E7EB"/>
-                      </a:solidFill>
-                      <a:prstDash val="solid"/>
-                      <a:round/>
-                      <a:headEnd type="none" w="med" len="med"/>
-                      <a:tailEnd type="none" w="med" len="med"/>
-                    </a:lnB>
-                  </a:tcPr>
-                </a:tc>
-                <a:tc>
-                  <a:txBody>
-                    <a:bodyPr/>
-                    <a:lstStyle/>
-                    <a:p>
-                      <a:pPr indent="0" marL="0">
-                        <a:buNone/>
-                      </a:pPr>
-                      <a:r>
-                        <a:rPr lang="en-US" sz="1100" dirty="0">
-                          <a:solidFill>
-                            <a:srgbClr val="374151"/>
-                          </a:solidFill>
-                          <a:latin typeface="Apple SD Gothic Neo" pitchFamily="34" charset="0"/>
-                          <a:ea typeface="Apple SD Gothic Neo" pitchFamily="34" charset="-122"/>
-                          <a:cs typeface="Apple SD Gothic Neo" pitchFamily="34" charset="-120"/>
-                        </a:rPr>
-                        <a:t>자동 생성</a:t>
-                      </a:r>
-                      <a:endParaRPr lang="en-US" sz="1100" dirty="0">
-                        <a:latin typeface="Apple SD Gothic Neo" charset="0"/>
-                        <a:ea typeface="Apple SD Gothic Neo" charset="0"/>
-                        <a:cs typeface="Apple SD Gothic Neo" charset="0"/>
-                      </a:endParaRPr>
-                    </a:p>
-                  </a:txBody>
-                  <a:tcPr marL="91440" marR="91440" marT="45720" marB="45720">
-                    <a:lnL w="6350" cap="flat" cmpd="sng" algn="ctr">
-                      <a:solidFill>
-                        <a:srgbClr val="E5E7EB"/>
-                      </a:solidFill>
-                      <a:prstDash val="solid"/>
-                      <a:round/>
-                      <a:headEnd type="none" w="med" len="med"/>
-                      <a:tailEnd type="none" w="med" len="med"/>
-                    </a:lnL>
-                    <a:lnR w="6350" cap="flat" cmpd="sng" algn="ctr">
-                      <a:solidFill>
-                        <a:srgbClr val="E5E7EB"/>
-                      </a:solidFill>
-                      <a:prstDash val="solid"/>
-                      <a:round/>
-                      <a:headEnd type="none" w="med" len="med"/>
-                      <a:tailEnd type="none" w="med" len="med"/>
-                    </a:lnR>
-                    <a:lnT w="6350" cap="flat" cmpd="sng" algn="ctr">
-                      <a:solidFill>
-                        <a:srgbClr val="E5E7EB"/>
-                      </a:solidFill>
-                      <a:prstDash val="solid"/>
-                      <a:round/>
-                      <a:headEnd type="none" w="med" len="med"/>
-                      <a:tailEnd type="none" w="med" len="med"/>
-                    </a:lnT>
-                    <a:lnB w="6350" cap="flat" cmpd="sng" algn="ctr">
-                      <a:solidFill>
-                        <a:srgbClr val="E5E7EB"/>
-                      </a:solidFill>
-                      <a:prstDash val="solid"/>
-                      <a:round/>
-                      <a:headEnd type="none" w="med" len="med"/>
-                      <a:tailEnd type="none" w="med" len="med"/>
-                    </a:lnB>
-                  </a:tcPr>
-                </a:tc>
-              </a:tr>
-              <a:tr h="0">
-                <a:tc>
-                  <a:txBody>
-                    <a:bodyPr/>
-                    <a:lstStyle/>
-                    <a:p>
-                      <a:pPr indent="0" marL="0">
-                        <a:buNone/>
-                      </a:pPr>
-                      <a:r>
-                        <a:rPr lang="en-US" sz="1100" dirty="0">
-                          <a:solidFill>
-                            <a:srgbClr val="374151"/>
-                          </a:solidFill>
-                          <a:latin typeface="Apple SD Gothic Neo" pitchFamily="34" charset="0"/>
-                          <a:ea typeface="Apple SD Gothic Neo" pitchFamily="34" charset="-122"/>
-                          <a:cs typeface="Apple SD Gothic Neo" pitchFamily="34" charset="-120"/>
-                        </a:rPr>
-                        <a:t>청구인</a:t>
-                      </a:r>
-                      <a:endParaRPr lang="en-US" sz="1100" dirty="0">
-                        <a:latin typeface="Apple SD Gothic Neo" charset="0"/>
-                        <a:ea typeface="Apple SD Gothic Neo" charset="0"/>
-                        <a:cs typeface="Apple SD Gothic Neo" charset="0"/>
-                      </a:endParaRPr>
-                    </a:p>
-                  </a:txBody>
-                  <a:tcPr marL="91440" marR="91440" marT="45720" marB="45720">
-                    <a:lnL w="6350" cap="flat" cmpd="sng" algn="ctr">
-                      <a:solidFill>
-                        <a:srgbClr val="E5E7EB"/>
-                      </a:solidFill>
-                      <a:prstDash val="solid"/>
-                      <a:round/>
-                      <a:headEnd type="none" w="med" len="med"/>
-                      <a:tailEnd type="none" w="med" len="med"/>
-                    </a:lnL>
-                    <a:lnR w="6350" cap="flat" cmpd="sng" algn="ctr">
-                      <a:solidFill>
-                        <a:srgbClr val="E5E7EB"/>
-                      </a:solidFill>
-                      <a:prstDash val="solid"/>
-                      <a:round/>
-                      <a:headEnd type="none" w="med" len="med"/>
-                      <a:tailEnd type="none" w="med" len="med"/>
-                    </a:lnR>
-                    <a:lnT w="6350" cap="flat" cmpd="sng" algn="ctr">
-                      <a:solidFill>
-                        <a:srgbClr val="E5E7EB"/>
-                      </a:solidFill>
-                      <a:prstDash val="solid"/>
-                      <a:round/>
-                      <a:headEnd type="none" w="med" len="med"/>
-                      <a:tailEnd type="none" w="med" len="med"/>
-                    </a:lnT>
-                    <a:lnB w="6350" cap="flat" cmpd="sng" algn="ctr">
-                      <a:solidFill>
-                        <a:srgbClr val="E5E7EB"/>
-                      </a:solidFill>
-                      <a:prstDash val="solid"/>
-                      <a:round/>
-                      <a:headEnd type="none" w="med" len="med"/>
-                      <a:tailEnd type="none" w="med" len="med"/>
-                    </a:lnB>
-                  </a:tcPr>
-                </a:tc>
-                <a:tc>
-                  <a:txBody>
-                    <a:bodyPr/>
-                    <a:lstStyle/>
-                    <a:p>
-                      <a:pPr indent="0" marL="0">
-                        <a:buNone/>
-                      </a:pPr>
-                      <a:r>
-                        <a:rPr lang="en-US" sz="1100" dirty="0">
-                          <a:solidFill>
-                            <a:srgbClr val="374151"/>
-                          </a:solidFill>
-                          <a:latin typeface="Apple SD Gothic Neo" pitchFamily="34" charset="0"/>
-                          <a:ea typeface="Apple SD Gothic Neo" pitchFamily="34" charset="-122"/>
-                          <a:cs typeface="Apple SD Gothic Neo" pitchFamily="34" charset="-120"/>
-                        </a:rPr>
-                        <a:t>작성자 이름</a:t>
-                      </a:r>
-                      <a:endParaRPr lang="en-US" sz="1100" dirty="0">
-                        <a:latin typeface="Apple SD Gothic Neo" charset="0"/>
-                        <a:ea typeface="Apple SD Gothic Neo" charset="0"/>
-                        <a:cs typeface="Apple SD Gothic Neo" charset="0"/>
-                      </a:endParaRPr>
-                    </a:p>
-                  </a:txBody>
-                  <a:tcPr marL="91440" marR="91440" marT="45720" marB="45720">
-                    <a:lnL w="6350" cap="flat" cmpd="sng" algn="ctr">
-                      <a:solidFill>
-                        <a:srgbClr val="E5E7EB"/>
-                      </a:solidFill>
-                      <a:prstDash val="solid"/>
-                      <a:round/>
-                      <a:headEnd type="none" w="med" len="med"/>
-                      <a:tailEnd type="none" w="med" len="med"/>
-                    </a:lnL>
-                    <a:lnR w="6350" cap="flat" cmpd="sng" algn="ctr">
-                      <a:solidFill>
-                        <a:srgbClr val="E5E7EB"/>
-                      </a:solidFill>
-                      <a:prstDash val="solid"/>
-                      <a:round/>
-                      <a:headEnd type="none" w="med" len="med"/>
-                      <a:tailEnd type="none" w="med" len="med"/>
-                    </a:lnR>
-                    <a:lnT w="6350" cap="flat" cmpd="sng" algn="ctr">
-                      <a:solidFill>
-                        <a:srgbClr val="E5E7EB"/>
-                      </a:solidFill>
-                      <a:prstDash val="solid"/>
-                      <a:round/>
-                      <a:headEnd type="none" w="med" len="med"/>
-                      <a:tailEnd type="none" w="med" len="med"/>
-                    </a:lnT>
-                    <a:lnB w="6350" cap="flat" cmpd="sng" algn="ctr">
-                      <a:solidFill>
-                        <a:srgbClr val="E5E7EB"/>
-                      </a:solidFill>
-                      <a:prstDash val="solid"/>
-                      <a:round/>
-                      <a:headEnd type="none" w="med" len="med"/>
-                      <a:tailEnd type="none" w="med" len="med"/>
-                    </a:lnB>
-                  </a:tcPr>
-                </a:tc>
-                <a:tc>
-                  <a:txBody>
-                    <a:bodyPr/>
-                    <a:lstStyle/>
-                    <a:p>
-                      <a:pPr indent="0" marL="0">
-                        <a:buNone/>
-                      </a:pPr>
-                      <a:r>
-                        <a:rPr lang="en-US" sz="1100" dirty="0">
-                          <a:solidFill>
-                            <a:srgbClr val="374151"/>
-                          </a:solidFill>
-                          <a:latin typeface="Apple SD Gothic Neo" pitchFamily="34" charset="0"/>
-                          <a:ea typeface="Apple SD Gothic Neo" pitchFamily="34" charset="-122"/>
-                          <a:cs typeface="Apple SD Gothic Neo" pitchFamily="34" charset="-120"/>
-                        </a:rPr>
-                        <a:t>로그인 사용자</a:t>
-                      </a:r>
-                      <a:endParaRPr lang="en-US" sz="1100" dirty="0">
-                        <a:latin typeface="Apple SD Gothic Neo" charset="0"/>
-                        <a:ea typeface="Apple SD Gothic Neo" charset="0"/>
-                        <a:cs typeface="Apple SD Gothic Neo" charset="0"/>
-                      </a:endParaRPr>
-                    </a:p>
-                  </a:txBody>
-                  <a:tcPr marL="91440" marR="91440" marT="45720" marB="45720">
-                    <a:lnL w="6350" cap="flat" cmpd="sng" algn="ctr">
-                      <a:solidFill>
-                        <a:srgbClr val="E5E7EB"/>
-                      </a:solidFill>
-                      <a:prstDash val="solid"/>
-                      <a:round/>
-                      <a:headEnd type="none" w="med" len="med"/>
-                      <a:tailEnd type="none" w="med" len="med"/>
-                    </a:lnL>
-                    <a:lnR w="6350" cap="flat" cmpd="sng" algn="ctr">
-                      <a:solidFill>
-                        <a:srgbClr val="E5E7EB"/>
-                      </a:solidFill>
-                      <a:prstDash val="solid"/>
-                      <a:round/>
-                      <a:headEnd type="none" w="med" len="med"/>
-                      <a:tailEnd type="none" w="med" len="med"/>
-                    </a:lnR>
-                    <a:lnT w="6350" cap="flat" cmpd="sng" algn="ctr">
-                      <a:solidFill>
-                        <a:srgbClr val="E5E7EB"/>
-                      </a:solidFill>
-                      <a:prstDash val="solid"/>
-                      <a:round/>
-                      <a:headEnd type="none" w="med" len="med"/>
-                      <a:tailEnd type="none" w="med" len="med"/>
-                    </a:lnT>
-                    <a:lnB w="6350" cap="flat" cmpd="sng" algn="ctr">
-                      <a:solidFill>
-                        <a:srgbClr val="E5E7EB"/>
-                      </a:solidFill>
-                      <a:prstDash val="solid"/>
-                      <a:round/>
-                      <a:headEnd type="none" w="med" len="med"/>
-                      <a:tailEnd type="none" w="med" len="med"/>
-                    </a:lnB>
-                  </a:tcPr>
-                </a:tc>
-              </a:tr>
-              <a:tr h="0">
-                <a:tc>
-                  <a:txBody>
-                    <a:bodyPr/>
-                    <a:lstStyle/>
-                    <a:p>
-                      <a:pPr indent="0" marL="0">
-                        <a:buNone/>
-                      </a:pPr>
-                      <a:r>
-                        <a:rPr lang="en-US" sz="1100" dirty="0">
-                          <a:solidFill>
-                            <a:srgbClr val="374151"/>
-                          </a:solidFill>
-                          <a:latin typeface="Apple SD Gothic Neo" pitchFamily="34" charset="0"/>
-                          <a:ea typeface="Apple SD Gothic Neo" pitchFamily="34" charset="-122"/>
-                          <a:cs typeface="Apple SD Gothic Neo" pitchFamily="34" charset="-120"/>
-                        </a:rPr>
-                        <a:t>직책</a:t>
-                      </a:r>
-                      <a:endParaRPr lang="en-US" sz="1100" dirty="0">
-                        <a:latin typeface="Apple SD Gothic Neo" charset="0"/>
-                        <a:ea typeface="Apple SD Gothic Neo" charset="0"/>
-                        <a:cs typeface="Apple SD Gothic Neo" charset="0"/>
-                      </a:endParaRPr>
-                    </a:p>
-                  </a:txBody>
-                  <a:tcPr marL="91440" marR="91440" marT="45720" marB="45720">
-                    <a:lnL w="6350" cap="flat" cmpd="sng" algn="ctr">
-                      <a:solidFill>
-                        <a:srgbClr val="E5E7EB"/>
-                      </a:solidFill>
-                      <a:prstDash val="solid"/>
-                      <a:round/>
-                      <a:headEnd type="none" w="med" len="med"/>
-                      <a:tailEnd type="none" w="med" len="med"/>
-                    </a:lnL>
-                    <a:lnR w="6350" cap="flat" cmpd="sng" algn="ctr">
-                      <a:solidFill>
-                        <a:srgbClr val="E5E7EB"/>
-                      </a:solidFill>
-                      <a:prstDash val="solid"/>
-                      <a:round/>
-                      <a:headEnd type="none" w="med" len="med"/>
-                      <a:tailEnd type="none" w="med" len="med"/>
-                    </a:lnR>
-                    <a:lnT w="6350" cap="flat" cmpd="sng" algn="ctr">
-                      <a:solidFill>
-                        <a:srgbClr val="E5E7EB"/>
-                      </a:solidFill>
-                      <a:prstDash val="solid"/>
-                      <a:round/>
-                      <a:headEnd type="none" w="med" len="med"/>
-                      <a:tailEnd type="none" w="med" len="med"/>
-                    </a:lnT>
-                    <a:lnB w="6350" cap="flat" cmpd="sng" algn="ctr">
-                      <a:solidFill>
-                        <a:srgbClr val="E5E7EB"/>
-                      </a:solidFill>
-                      <a:prstDash val="solid"/>
-                      <a:round/>
-                      <a:headEnd type="none" w="med" len="med"/>
-                      <a:tailEnd type="none" w="med" len="med"/>
-                    </a:lnB>
-                  </a:tcPr>
-                </a:tc>
-                <a:tc>
-                  <a:txBody>
-                    <a:bodyPr/>
-                    <a:lstStyle/>
-                    <a:p>
-                      <a:pPr indent="0" marL="0">
-                        <a:buNone/>
-                      </a:pPr>
-                      <a:r>
-                        <a:rPr lang="en-US" sz="1100" dirty="0">
-                          <a:solidFill>
-                            <a:srgbClr val="374151"/>
-                          </a:solidFill>
-                          <a:latin typeface="Apple SD Gothic Neo" pitchFamily="34" charset="0"/>
-                          <a:ea typeface="Apple SD Gothic Neo" pitchFamily="34" charset="-122"/>
-                          <a:cs typeface="Apple SD Gothic Neo" pitchFamily="34" charset="-120"/>
-                        </a:rPr>
-                        <a:t>작성자 직책</a:t>
-                      </a:r>
-                      <a:endParaRPr lang="en-US" sz="1100" dirty="0">
-                        <a:latin typeface="Apple SD Gothic Neo" charset="0"/>
-                        <a:ea typeface="Apple SD Gothic Neo" charset="0"/>
-                        <a:cs typeface="Apple SD Gothic Neo" charset="0"/>
-                      </a:endParaRPr>
-                    </a:p>
-                  </a:txBody>
-                  <a:tcPr marL="91440" marR="91440" marT="45720" marB="45720">
-                    <a:lnL w="6350" cap="flat" cmpd="sng" algn="ctr">
-                      <a:solidFill>
-                        <a:srgbClr val="E5E7EB"/>
-                      </a:solidFill>
-                      <a:prstDash val="solid"/>
-                      <a:round/>
-                      <a:headEnd type="none" w="med" len="med"/>
-                      <a:tailEnd type="none" w="med" len="med"/>
-                    </a:lnL>
-                    <a:lnR w="6350" cap="flat" cmpd="sng" algn="ctr">
-                      <a:solidFill>
-                        <a:srgbClr val="E5E7EB"/>
-                      </a:solidFill>
-                      <a:prstDash val="solid"/>
-                      <a:round/>
-                      <a:headEnd type="none" w="med" len="med"/>
-                      <a:tailEnd type="none" w="med" len="med"/>
-                    </a:lnR>
-                    <a:lnT w="6350" cap="flat" cmpd="sng" algn="ctr">
-                      <a:solidFill>
-                        <a:srgbClr val="E5E7EB"/>
-                      </a:solidFill>
-                      <a:prstDash val="solid"/>
-                      <a:round/>
-                      <a:headEnd type="none" w="med" len="med"/>
-                      <a:tailEnd type="none" w="med" len="med"/>
-                    </a:lnT>
-                    <a:lnB w="6350" cap="flat" cmpd="sng" algn="ctr">
-                      <a:solidFill>
-                        <a:srgbClr val="E5E7EB"/>
-                      </a:solidFill>
-                      <a:prstDash val="solid"/>
-                      <a:round/>
-                      <a:headEnd type="none" w="med" len="med"/>
-                      <a:tailEnd type="none" w="med" len="med"/>
-                    </a:lnB>
-                  </a:tcPr>
-                </a:tc>
-                <a:tc>
-                  <a:txBody>
-                    <a:bodyPr/>
-                    <a:lstStyle/>
-                    <a:p>
-                      <a:pPr indent="0" marL="0">
-                        <a:buNone/>
-                      </a:pPr>
-                      <a:r>
-                        <a:rPr lang="en-US" sz="1100" dirty="0">
-                          <a:solidFill>
-                            <a:srgbClr val="374151"/>
-                          </a:solidFill>
-                          <a:latin typeface="Apple SD Gothic Neo" pitchFamily="34" charset="0"/>
-                          <a:ea typeface="Apple SD Gothic Neo" pitchFamily="34" charset="-122"/>
-                          <a:cs typeface="Apple SD Gothic Neo" pitchFamily="34" charset="-120"/>
-                        </a:rPr>
-                        <a:t>-</a:t>
-                      </a:r>
-                      <a:endParaRPr lang="en-US" sz="1100" dirty="0">
-                        <a:latin typeface="Apple SD Gothic Neo" charset="0"/>
-                        <a:ea typeface="Apple SD Gothic Neo" charset="0"/>
-                        <a:cs typeface="Apple SD Gothic Neo" charset="0"/>
-                      </a:endParaRPr>
-                    </a:p>
-                  </a:txBody>
-                  <a:tcPr marL="91440" marR="91440" marT="45720" marB="45720">
-                    <a:lnL w="6350" cap="flat" cmpd="sng" algn="ctr">
-                      <a:solidFill>
-                        <a:srgbClr val="E5E7EB"/>
-                      </a:solidFill>
-                      <a:prstDash val="solid"/>
-                      <a:round/>
-                      <a:headEnd type="none" w="med" len="med"/>
-                      <a:tailEnd type="none" w="med" len="med"/>
-                    </a:lnL>
-                    <a:lnR w="6350" cap="flat" cmpd="sng" algn="ctr">
-                      <a:solidFill>
-                        <a:srgbClr val="E5E7EB"/>
-                      </a:solidFill>
-                      <a:prstDash val="solid"/>
-                      <a:round/>
-                      <a:headEnd type="none" w="med" len="med"/>
-                      <a:tailEnd type="none" w="med" len="med"/>
-                    </a:lnR>
-                    <a:lnT w="6350" cap="flat" cmpd="sng" algn="ctr">
-                      <a:solidFill>
-                        <a:srgbClr val="E5E7EB"/>
-                      </a:solidFill>
-                      <a:prstDash val="solid"/>
-                      <a:round/>
-                      <a:headEnd type="none" w="med" len="med"/>
-                      <a:tailEnd type="none" w="med" len="med"/>
-                    </a:lnT>
-                    <a:lnB w="6350" cap="flat" cmpd="sng" algn="ctr">
-                      <a:solidFill>
-                        <a:srgbClr val="E5E7EB"/>
-                      </a:solidFill>
-                      <a:prstDash val="solid"/>
-                      <a:round/>
-                      <a:headEnd type="none" w="med" len="med"/>
-                      <a:tailEnd type="none" w="med" len="med"/>
-                    </a:lnB>
-                  </a:tcPr>
-                </a:tc>
-              </a:tr>
-            </a:tbl>
-          </a:graphicData>
-        </a:graphic>
-      </p:graphicFrame>
+      <p:pic>
+        <p:nvPicPr>
+          <p:cNvPr id="3" name="Image 0" descr="/Users/wandosea/Documents/GitHub/expense-system/docs/user-guide/screenshots/items-section.png">    </p:cNvPr>
+          <p:cNvPicPr>
+            <a:picLocks noChangeAspect="1"/>
+          </p:cNvPicPr>
+          <p:nvPr/>
+        </p:nvPicPr>
+        <p:blipFill>
+          <a:blip r:embed="rId1"/>
+          <a:srcRect l="0" r="0" t="0" b="0"/>
+          <a:stretch/>
+        </p:blipFill>
+        <p:spPr>
+          <a:xfrm>
+            <a:off x="457200" y="914400"/>
+            <a:ext cx="8229600" cy="3657600"/>
+          </a:xfrm>
+          <a:prstGeom prst="rect">
+            <a:avLst/>
+          </a:prstGeom>
+        </p:spPr>
+      </p:pic>
+      <p:sp>
+        <p:nvSpPr>
+          <p:cNvPr id="4" name="Text 1"/>
+          <p:cNvSpPr/>
+          <p:nvPr/>
+        </p:nvSpPr>
+        <p:spPr>
+          <a:xfrm>
+            <a:off x="457200" y="4754880"/>
+            <a:ext cx="8229600" cy="0"/>
+          </a:xfrm>
+          <a:prstGeom prst="rect">
+            <a:avLst/>
+          </a:prstGeom>
+          <a:noFill/>
+          <a:ln/>
+        </p:spPr>
+        <p:txBody>
+          <a:bodyPr wrap="square" rtlCol="0" anchor="ctr"/>
+          <a:lstStyle/>
+          <a:p>
+            <a:pPr indent="0" marL="0">
+              <a:buNone/>
+            </a:pPr>
+            <a:r>
+              <a:rPr lang="en-US" sz="1200" dirty="0">
+                <a:solidFill>
+                  <a:srgbClr val="6B7280"/>
+                </a:solidFill>
+              </a:rPr>
+              <a:t>1~10개의 세부 항목 입력 가능</a:t>
+            </a:r>
+            <a:endParaRPr lang="en-US" sz="1200" dirty="0"/>
+          </a:p>
+        </p:txBody>
+      </p:sp>
       <p:sp>
         <p:nvSpPr>
           <p:cNvPr id="25" name="Slide Number Placeholder 0"/>
